--- a/docs/隐盾安全智能体_项目汇报.pptx
+++ b/docs/隐盾安全智能体_项目汇报.pptx
@@ -24,6 +24,7 @@
     <p:sldId id="272" r:id="rId23"/>
     <p:sldId id="273" r:id="rId24"/>
     <p:sldId id="274" r:id="rId25"/>
+    <p:sldId id="275" r:id="rId26"/>
   </p:sldIdLst>
   <p:sldSz cx="12191695" cy="6858000" type="screen4x3"/>
   <p:notesSz cx="6858000" cy="9144000"/>
@@ -3563,7 +3564,7 @@
                 <a:ea typeface="微软雅黑"/>
                 <a:cs typeface="微软雅黑"/>
               </a:rPr>
-              <a:t>    ·    V3.3    ·    LangChain · PySide6 · 本地/云端双算力    ·    2026</a:t>
+              <a:t>    ·    V3.4    ·    LangChain · pywebview/WebView2 · 本地/云端双算力    ·    2026</a:t>
             </a:r>
           </a:p>
         </p:txBody>
@@ -8720,6 +8721,1372 @@
                 <a:ea typeface="微软雅黑"/>
                 <a:cs typeface="微软雅黑"/>
               </a:rPr>
+              <a:t>核心创新 · 五</a:t>
+            </a:r>
+          </a:p>
+        </p:txBody>
+      </p:sp>
+      <p:sp>
+        <p:nvSpPr>
+          <p:cNvPr id="4" name="TextBox 3"/>
+          <p:cNvSpPr txBox="1"/>
+          <p:nvPr/>
+        </p:nvSpPr>
+        <p:spPr>
+          <a:xfrm>
+            <a:off x="640080" y="822960"/>
+            <a:ext cx="10911535" cy="731520"/>
+          </a:xfrm>
+          <a:prstGeom prst="rect">
+            <a:avLst/>
+          </a:prstGeom>
+          <a:noFill/>
+        </p:spPr>
+        <p:txBody>
+          <a:bodyPr wrap="square" anchor="t" lIns="0" rIns="0" tIns="0" bIns="0">
+            <a:spAutoFit/>
+          </a:bodyPr>
+          <a:lstStyle/>
+          <a:p>
+            <a:pPr algn="l"/>
+            <a:r>
+              <a:rPr sz="2700" b="1">
+                <a:solidFill>
+                  <a:srgbClr val="1A2332"/>
+                </a:solidFill>
+                <a:latin typeface="微软雅黑"/>
+                <a:ea typeface="微软雅黑"/>
+                <a:cs typeface="微软雅黑"/>
+              </a:rPr>
+              <a:t>插件体系：内核不可插件化，其余皆可插</a:t>
+            </a:r>
+          </a:p>
+        </p:txBody>
+      </p:sp>
+      <p:sp>
+        <p:nvSpPr>
+          <p:cNvPr id="5" name="TextBox 4"/>
+          <p:cNvSpPr txBox="1"/>
+          <p:nvPr/>
+        </p:nvSpPr>
+        <p:spPr>
+          <a:xfrm>
+            <a:off x="640080" y="1600200"/>
+            <a:ext cx="5394960" cy="320040"/>
+          </a:xfrm>
+          <a:prstGeom prst="rect">
+            <a:avLst/>
+          </a:prstGeom>
+          <a:noFill/>
+        </p:spPr>
+        <p:txBody>
+          <a:bodyPr wrap="square" anchor="t" lIns="0" rIns="0" tIns="0" bIns="0">
+            <a:spAutoFit/>
+          </a:bodyPr>
+          <a:lstStyle/>
+          <a:p>
+            <a:pPr algn="l"/>
+            <a:r>
+              <a:rPr sz="1300" b="0">
+                <a:solidFill>
+                  <a:srgbClr val="6B7A72"/>
+                </a:solidFill>
+                <a:latin typeface="微软雅黑"/>
+                <a:ea typeface="微软雅黑"/>
+                <a:cs typeface="微软雅黑"/>
+              </a:rPr>
+              <a:t>边界按「能力性质」划分，而不是按模块归属</a:t>
+            </a:r>
+          </a:p>
+        </p:txBody>
+      </p:sp>
+      <p:sp>
+        <p:nvSpPr>
+          <p:cNvPr id="6" name="Rectangle 5"/>
+          <p:cNvSpPr/>
+          <p:nvPr/>
+        </p:nvSpPr>
+        <p:spPr>
+          <a:xfrm>
+            <a:off x="640080" y="2057400"/>
+            <a:ext cx="54864" cy="1371600"/>
+          </a:xfrm>
+          <a:prstGeom prst="rect">
+            <a:avLst/>
+          </a:prstGeom>
+          <a:solidFill>
+            <a:srgbClr val="E8590C"/>
+          </a:solidFill>
+          <a:ln>
+            <a:noFill/>
+          </a:ln>
+          <a:effectLst/>
+        </p:spPr>
+        <p:style>
+          <a:lnRef idx="1">
+            <a:schemeClr val="accent1"/>
+          </a:lnRef>
+          <a:fillRef idx="3">
+            <a:schemeClr val="accent1"/>
+          </a:fillRef>
+          <a:effectRef idx="2">
+            <a:schemeClr val="accent1"/>
+          </a:effectRef>
+          <a:fontRef idx="minor">
+            <a:schemeClr val="lt1"/>
+          </a:fontRef>
+        </p:style>
+        <p:txBody>
+          <a:bodyPr rtlCol="0" anchor="ctr"/>
+          <a:lstStyle/>
+          <a:p>
+            <a:pPr algn="ctr"/>
+          </a:p>
+        </p:txBody>
+      </p:sp>
+      <p:sp>
+        <p:nvSpPr>
+          <p:cNvPr id="7" name="TextBox 6"/>
+          <p:cNvSpPr txBox="1"/>
+          <p:nvPr/>
+        </p:nvSpPr>
+        <p:spPr>
+          <a:xfrm>
+            <a:off x="896112" y="2057400"/>
+            <a:ext cx="5029200" cy="329184"/>
+          </a:xfrm>
+          <a:prstGeom prst="rect">
+            <a:avLst/>
+          </a:prstGeom>
+          <a:noFill/>
+        </p:spPr>
+        <p:txBody>
+          <a:bodyPr wrap="square" anchor="t" lIns="0" rIns="0" tIns="0" bIns="0">
+            <a:spAutoFit/>
+          </a:bodyPr>
+          <a:lstStyle/>
+          <a:p>
+            <a:pPr algn="l"/>
+            <a:r>
+              <a:rPr sz="1550" b="1">
+                <a:solidFill>
+                  <a:srgbClr val="E8590C"/>
+                </a:solidFill>
+                <a:latin typeface="微软雅黑"/>
+                <a:ea typeface="微软雅黑"/>
+                <a:cs typeface="微软雅黑"/>
+              </a:rPr>
+              <a:t>安全内核（永不开放）</a:t>
+            </a:r>
+          </a:p>
+        </p:txBody>
+      </p:sp>
+      <p:sp>
+        <p:nvSpPr>
+          <p:cNvPr id="8" name="TextBox 7"/>
+          <p:cNvSpPr txBox="1"/>
+          <p:nvPr/>
+        </p:nvSpPr>
+        <p:spPr>
+          <a:xfrm>
+            <a:off x="896112" y="2423160"/>
+            <a:ext cx="5029200" cy="914400"/>
+          </a:xfrm>
+          <a:prstGeom prst="rect">
+            <a:avLst/>
+          </a:prstGeom>
+          <a:noFill/>
+        </p:spPr>
+        <p:txBody>
+          <a:bodyPr wrap="square" anchor="t" lIns="0" rIns="0" tIns="0" bIns="0">
+            <a:spAutoFit/>
+          </a:bodyPr>
+          <a:lstStyle/>
+          <a:p>
+            <a:pPr algn="l">
+              <a:lnSpc>
+                <a:spcPct val="125000"/>
+              </a:lnSpc>
+            </a:pPr>
+            <a:r>
+              <a:rPr sz="1250" b="0">
+                <a:solidFill>
+                  <a:srgbClr val="1A2332"/>
+                </a:solidFill>
+                <a:latin typeface="微软雅黑"/>
+                <a:ea typeface="微软雅黑"/>
+                <a:cs typeface="微软雅黑"/>
+              </a:rPr>
+              <a:t>脱敏网关 / 白名单 / 审批放行 / 审计链 / 沙箱 / 模型接入</a:t>
+            </a:r>
+          </a:p>
+        </p:txBody>
+      </p:sp>
+      <p:sp>
+        <p:nvSpPr>
+          <p:cNvPr id="9" name="Rectangle 8"/>
+          <p:cNvSpPr/>
+          <p:nvPr/>
+        </p:nvSpPr>
+        <p:spPr>
+          <a:xfrm>
+            <a:off x="640080" y="3630168"/>
+            <a:ext cx="54864" cy="1371600"/>
+          </a:xfrm>
+          <a:prstGeom prst="rect">
+            <a:avLst/>
+          </a:prstGeom>
+          <a:solidFill>
+            <a:srgbClr val="0E7A4F"/>
+          </a:solidFill>
+          <a:ln>
+            <a:noFill/>
+          </a:ln>
+          <a:effectLst/>
+        </p:spPr>
+        <p:style>
+          <a:lnRef idx="1">
+            <a:schemeClr val="accent1"/>
+          </a:lnRef>
+          <a:fillRef idx="3">
+            <a:schemeClr val="accent1"/>
+          </a:fillRef>
+          <a:effectRef idx="2">
+            <a:schemeClr val="accent1"/>
+          </a:effectRef>
+          <a:fontRef idx="minor">
+            <a:schemeClr val="lt1"/>
+          </a:fontRef>
+        </p:style>
+        <p:txBody>
+          <a:bodyPr rtlCol="0" anchor="ctr"/>
+          <a:lstStyle/>
+          <a:p>
+            <a:pPr algn="ctr"/>
+          </a:p>
+        </p:txBody>
+      </p:sp>
+      <p:sp>
+        <p:nvSpPr>
+          <p:cNvPr id="10" name="TextBox 9"/>
+          <p:cNvSpPr txBox="1"/>
+          <p:nvPr/>
+        </p:nvSpPr>
+        <p:spPr>
+          <a:xfrm>
+            <a:off x="896112" y="3630168"/>
+            <a:ext cx="5029200" cy="329184"/>
+          </a:xfrm>
+          <a:prstGeom prst="rect">
+            <a:avLst/>
+          </a:prstGeom>
+          <a:noFill/>
+        </p:spPr>
+        <p:txBody>
+          <a:bodyPr wrap="square" anchor="t" lIns="0" rIns="0" tIns="0" bIns="0">
+            <a:spAutoFit/>
+          </a:bodyPr>
+          <a:lstStyle/>
+          <a:p>
+            <a:pPr algn="l"/>
+            <a:r>
+              <a:rPr sz="1550" b="1">
+                <a:solidFill>
+                  <a:srgbClr val="0E7A4F"/>
+                </a:solidFill>
+                <a:latin typeface="微软雅黑"/>
+                <a:ea typeface="微软雅黑"/>
+                <a:cs typeface="微软雅黑"/>
+              </a:rPr>
+              <a:t>能力扩展（开放，只做加法）</a:t>
+            </a:r>
+          </a:p>
+        </p:txBody>
+      </p:sp>
+      <p:sp>
+        <p:nvSpPr>
+          <p:cNvPr id="11" name="TextBox 10"/>
+          <p:cNvSpPr txBox="1"/>
+          <p:nvPr/>
+        </p:nvSpPr>
+        <p:spPr>
+          <a:xfrm>
+            <a:off x="896112" y="3995928"/>
+            <a:ext cx="5029200" cy="914400"/>
+          </a:xfrm>
+          <a:prstGeom prst="rect">
+            <a:avLst/>
+          </a:prstGeom>
+          <a:noFill/>
+        </p:spPr>
+        <p:txBody>
+          <a:bodyPr wrap="square" anchor="t" lIns="0" rIns="0" tIns="0" bIns="0">
+            <a:spAutoFit/>
+          </a:bodyPr>
+          <a:lstStyle/>
+          <a:p>
+            <a:pPr algn="l">
+              <a:lnSpc>
+                <a:spcPct val="125000"/>
+              </a:lnSpc>
+            </a:pPr>
+            <a:r>
+              <a:rPr sz="1250" b="0">
+                <a:solidFill>
+                  <a:srgbClr val="1A2332"/>
+                </a:solidFill>
+                <a:latin typeface="微软雅黑"/>
+                <a:ea typeface="微软雅黑"/>
+                <a:cs typeface="微软雅黑"/>
+              </a:rPr>
+              <a:t>补充识别 · 扩展解析 · 工作流模板 · 导出格式 · 审批提示</a:t>
+            </a:r>
+          </a:p>
+        </p:txBody>
+      </p:sp>
+      <p:sp>
+        <p:nvSpPr>
+          <p:cNvPr id="12" name="TextBox 11"/>
+          <p:cNvSpPr txBox="1"/>
+          <p:nvPr/>
+        </p:nvSpPr>
+        <p:spPr>
+          <a:xfrm>
+            <a:off x="640080" y="5257800"/>
+            <a:ext cx="5394960" cy="1005840"/>
+          </a:xfrm>
+          <a:prstGeom prst="rect">
+            <a:avLst/>
+          </a:prstGeom>
+          <a:noFill/>
+        </p:spPr>
+        <p:txBody>
+          <a:bodyPr wrap="square" anchor="t" lIns="0" rIns="0" tIns="0" bIns="0">
+            <a:spAutoFit/>
+          </a:bodyPr>
+          <a:lstStyle/>
+          <a:p>
+            <a:pPr algn="l">
+              <a:lnSpc>
+                <a:spcPct val="130000"/>
+              </a:lnSpc>
+            </a:pPr>
+            <a:r>
+              <a:rPr sz="1250" b="0">
+                <a:solidFill>
+                  <a:srgbClr val="6B7A72"/>
+                </a:solidFill>
+                <a:latin typeface="微软雅黑"/>
+                <a:ea typeface="微软雅黑"/>
+                <a:cs typeface="微软雅黑"/>
+              </a:rPr>
+              <a:t>为什么这么切：判定权一旦可插拔，等于把「安全」交给任意第三方代码；
+而只增不减的能力（多识别一类实体、多解析一种格式）插件化，
+既能保持内核精简，又让系统可以持续长大。</a:t>
+            </a:r>
+          </a:p>
+        </p:txBody>
+      </p:sp>
+      <p:sp>
+        <p:nvSpPr>
+          <p:cNvPr id="13" name="TextBox 12"/>
+          <p:cNvSpPr txBox="1"/>
+          <p:nvPr/>
+        </p:nvSpPr>
+        <p:spPr>
+          <a:xfrm>
+            <a:off x="6172200" y="1600200"/>
+            <a:ext cx="5394960" cy="320040"/>
+          </a:xfrm>
+          <a:prstGeom prst="rect">
+            <a:avLst/>
+          </a:prstGeom>
+          <a:noFill/>
+        </p:spPr>
+        <p:txBody>
+          <a:bodyPr wrap="square" anchor="t" lIns="0" rIns="0" tIns="0" bIns="0">
+            <a:spAutoFit/>
+          </a:bodyPr>
+          <a:lstStyle/>
+          <a:p>
+            <a:pPr algn="l"/>
+            <a:r>
+              <a:rPr sz="1350" b="1">
+                <a:solidFill>
+                  <a:srgbClr val="0E7A4F"/>
+                </a:solidFill>
+                <a:latin typeface="微软雅黑"/>
+                <a:ea typeface="微软雅黑"/>
+                <a:cs typeface="微软雅黑"/>
+              </a:rPr>
+              <a:t>「只能做加法」落在代码里的五条约束</a:t>
+            </a:r>
+          </a:p>
+        </p:txBody>
+      </p:sp>
+      <p:sp>
+        <p:nvSpPr>
+          <p:cNvPr id="14" name="Oval 13"/>
+          <p:cNvSpPr/>
+          <p:nvPr/>
+        </p:nvSpPr>
+        <p:spPr>
+          <a:xfrm>
+            <a:off x="6172200" y="2057400"/>
+            <a:ext cx="310896" cy="310896"/>
+          </a:xfrm>
+          <a:prstGeom prst="ellipse">
+            <a:avLst/>
+          </a:prstGeom>
+          <a:solidFill>
+            <a:srgbClr val="0E7A4F"/>
+          </a:solidFill>
+          <a:ln>
+            <a:noFill/>
+          </a:ln>
+          <a:effectLst/>
+        </p:spPr>
+        <p:style>
+          <a:lnRef idx="1">
+            <a:schemeClr val="accent1"/>
+          </a:lnRef>
+          <a:fillRef idx="3">
+            <a:schemeClr val="accent1"/>
+          </a:fillRef>
+          <a:effectRef idx="2">
+            <a:schemeClr val="accent1"/>
+          </a:effectRef>
+          <a:fontRef idx="minor">
+            <a:schemeClr val="lt1"/>
+          </a:fontRef>
+        </p:style>
+        <p:txBody>
+          <a:bodyPr rtlCol="0" anchor="ctr"/>
+          <a:lstStyle/>
+          <a:p>
+            <a:pPr algn="ctr"/>
+          </a:p>
+        </p:txBody>
+      </p:sp>
+      <p:sp>
+        <p:nvSpPr>
+          <p:cNvPr id="15" name="TextBox 14"/>
+          <p:cNvSpPr txBox="1"/>
+          <p:nvPr/>
+        </p:nvSpPr>
+        <p:spPr>
+          <a:xfrm>
+            <a:off x="6172200" y="2057400"/>
+            <a:ext cx="310896" cy="310896"/>
+          </a:xfrm>
+          <a:prstGeom prst="rect">
+            <a:avLst/>
+          </a:prstGeom>
+          <a:noFill/>
+        </p:spPr>
+        <p:txBody>
+          <a:bodyPr wrap="square" anchor="ctr" lIns="0" rIns="0" tIns="0" bIns="0">
+            <a:spAutoFit/>
+          </a:bodyPr>
+          <a:lstStyle/>
+          <a:p>
+            <a:pPr algn="ctr"/>
+            <a:r>
+              <a:rPr sz="1100" b="1">
+                <a:solidFill>
+                  <a:srgbClr val="FFFFFF"/>
+                </a:solidFill>
+                <a:latin typeface="微软雅黑"/>
+                <a:ea typeface="微软雅黑"/>
+                <a:cs typeface="微软雅黑"/>
+              </a:rPr>
+              <a:t>1</a:t>
+            </a:r>
+          </a:p>
+        </p:txBody>
+      </p:sp>
+      <p:sp>
+        <p:nvSpPr>
+          <p:cNvPr id="16" name="TextBox 15"/>
+          <p:cNvSpPr txBox="1"/>
+          <p:nvPr/>
+        </p:nvSpPr>
+        <p:spPr>
+          <a:xfrm>
+            <a:off x="6629400" y="2039112"/>
+            <a:ext cx="4937760" cy="310896"/>
+          </a:xfrm>
+          <a:prstGeom prst="rect">
+            <a:avLst/>
+          </a:prstGeom>
+          <a:noFill/>
+        </p:spPr>
+        <p:txBody>
+          <a:bodyPr wrap="square" anchor="t" lIns="0" rIns="0" tIns="0" bIns="0">
+            <a:spAutoFit/>
+          </a:bodyPr>
+          <a:lstStyle/>
+          <a:p>
+            <a:pPr algn="l"/>
+            <a:r>
+              <a:rPr sz="1450" b="1">
+                <a:solidFill>
+                  <a:srgbClr val="1A2332"/>
+                </a:solidFill>
+                <a:latin typeface="微软雅黑"/>
+                <a:ea typeface="微软雅黑"/>
+                <a:cs typeface="微软雅黑"/>
+              </a:rPr>
+              <a:t>识别只增不减</a:t>
+            </a:r>
+          </a:p>
+        </p:txBody>
+      </p:sp>
+      <p:sp>
+        <p:nvSpPr>
+          <p:cNvPr id="17" name="TextBox 16"/>
+          <p:cNvSpPr txBox="1"/>
+          <p:nvPr/>
+        </p:nvSpPr>
+        <p:spPr>
+          <a:xfrm>
+            <a:off x="6629400" y="2386584"/>
+            <a:ext cx="4937760" cy="603504"/>
+          </a:xfrm>
+          <a:prstGeom prst="rect">
+            <a:avLst/>
+          </a:prstGeom>
+          <a:noFill/>
+        </p:spPr>
+        <p:txBody>
+          <a:bodyPr wrap="square" anchor="t" lIns="0" rIns="0" tIns="0" bIns="0">
+            <a:spAutoFit/>
+          </a:bodyPr>
+          <a:lstStyle/>
+          <a:p>
+            <a:pPr algn="l">
+              <a:lnSpc>
+                <a:spcPct val="120000"/>
+              </a:lnSpc>
+            </a:pPr>
+            <a:r>
+              <a:rPr sz="1200" b="0">
+                <a:solidFill>
+                  <a:srgbClr val="6B7A72"/>
+                </a:solidFill>
+                <a:latin typeface="微软雅黑"/>
+                <a:ea typeface="微软雅黑"/>
+                <a:cs typeface="微软雅黑"/>
+              </a:rPr>
+              <a:t>追加区间由内核复核（越界/超长/重叠丢弃），无「免于脱敏」入口</a:t>
+            </a:r>
+          </a:p>
+        </p:txBody>
+      </p:sp>
+      <p:sp>
+        <p:nvSpPr>
+          <p:cNvPr id="18" name="Oval 17"/>
+          <p:cNvSpPr/>
+          <p:nvPr/>
+        </p:nvSpPr>
+        <p:spPr>
+          <a:xfrm>
+            <a:off x="6172200" y="2990088"/>
+            <a:ext cx="310896" cy="310896"/>
+          </a:xfrm>
+          <a:prstGeom prst="ellipse">
+            <a:avLst/>
+          </a:prstGeom>
+          <a:solidFill>
+            <a:srgbClr val="0E7A4F"/>
+          </a:solidFill>
+          <a:ln>
+            <a:noFill/>
+          </a:ln>
+          <a:effectLst/>
+        </p:spPr>
+        <p:style>
+          <a:lnRef idx="1">
+            <a:schemeClr val="accent1"/>
+          </a:lnRef>
+          <a:fillRef idx="3">
+            <a:schemeClr val="accent1"/>
+          </a:fillRef>
+          <a:effectRef idx="2">
+            <a:schemeClr val="accent1"/>
+          </a:effectRef>
+          <a:fontRef idx="minor">
+            <a:schemeClr val="lt1"/>
+          </a:fontRef>
+        </p:style>
+        <p:txBody>
+          <a:bodyPr rtlCol="0" anchor="ctr"/>
+          <a:lstStyle/>
+          <a:p>
+            <a:pPr algn="ctr"/>
+          </a:p>
+        </p:txBody>
+      </p:sp>
+      <p:sp>
+        <p:nvSpPr>
+          <p:cNvPr id="19" name="TextBox 18"/>
+          <p:cNvSpPr txBox="1"/>
+          <p:nvPr/>
+        </p:nvSpPr>
+        <p:spPr>
+          <a:xfrm>
+            <a:off x="6172200" y="2990088"/>
+            <a:ext cx="310896" cy="310896"/>
+          </a:xfrm>
+          <a:prstGeom prst="rect">
+            <a:avLst/>
+          </a:prstGeom>
+          <a:noFill/>
+        </p:spPr>
+        <p:txBody>
+          <a:bodyPr wrap="square" anchor="ctr" lIns="0" rIns="0" tIns="0" bIns="0">
+            <a:spAutoFit/>
+          </a:bodyPr>
+          <a:lstStyle/>
+          <a:p>
+            <a:pPr algn="ctr"/>
+            <a:r>
+              <a:rPr sz="1100" b="1">
+                <a:solidFill>
+                  <a:srgbClr val="FFFFFF"/>
+                </a:solidFill>
+                <a:latin typeface="微软雅黑"/>
+                <a:ea typeface="微软雅黑"/>
+                <a:cs typeface="微软雅黑"/>
+              </a:rPr>
+              <a:t>2</a:t>
+            </a:r>
+          </a:p>
+        </p:txBody>
+      </p:sp>
+      <p:sp>
+        <p:nvSpPr>
+          <p:cNvPr id="20" name="TextBox 19"/>
+          <p:cNvSpPr txBox="1"/>
+          <p:nvPr/>
+        </p:nvSpPr>
+        <p:spPr>
+          <a:xfrm>
+            <a:off x="6629400" y="2971800"/>
+            <a:ext cx="4937760" cy="310896"/>
+          </a:xfrm>
+          <a:prstGeom prst="rect">
+            <a:avLst/>
+          </a:prstGeom>
+          <a:noFill/>
+        </p:spPr>
+        <p:txBody>
+          <a:bodyPr wrap="square" anchor="t" lIns="0" rIns="0" tIns="0" bIns="0">
+            <a:spAutoFit/>
+          </a:bodyPr>
+          <a:lstStyle/>
+          <a:p>
+            <a:pPr algn="l"/>
+            <a:r>
+              <a:rPr sz="1450" b="1">
+                <a:solidFill>
+                  <a:srgbClr val="1A2332"/>
+                </a:solidFill>
+                <a:latin typeface="微软雅黑"/>
+                <a:ea typeface="微软雅黑"/>
+                <a:cs typeface="微软雅黑"/>
+              </a:rPr>
+              <a:t>模板不降审批</a:t>
+            </a:r>
+          </a:p>
+        </p:txBody>
+      </p:sp>
+      <p:sp>
+        <p:nvSpPr>
+          <p:cNvPr id="21" name="TextBox 20"/>
+          <p:cNvSpPr txBox="1"/>
+          <p:nvPr/>
+        </p:nvSpPr>
+        <p:spPr>
+          <a:xfrm>
+            <a:off x="6629400" y="3319272"/>
+            <a:ext cx="4937760" cy="603504"/>
+          </a:xfrm>
+          <a:prstGeom prst="rect">
+            <a:avLst/>
+          </a:prstGeom>
+          <a:noFill/>
+        </p:spPr>
+        <p:txBody>
+          <a:bodyPr wrap="square" anchor="t" lIns="0" rIns="0" tIns="0" bIns="0">
+            <a:spAutoFit/>
+          </a:bodyPr>
+          <a:lstStyle/>
+          <a:p>
+            <a:pPr algn="l">
+              <a:lnSpc>
+                <a:spcPct val="120000"/>
+              </a:lnSpc>
+            </a:pPr>
+            <a:r>
+              <a:rPr sz="1200" b="0">
+                <a:solidFill>
+                  <a:srgbClr val="6B7A72"/>
+                </a:solidFill>
+                <a:latin typeface="微软雅黑"/>
+                <a:ea typeface="微软雅黑"/>
+                <a:cs typeface="微软雅黑"/>
+              </a:rPr>
+              <a:t>高危步骤（写盘/删除/执行/导出）强制人工审批，声明 auto 也被纠正</a:t>
+            </a:r>
+          </a:p>
+        </p:txBody>
+      </p:sp>
+      <p:sp>
+        <p:nvSpPr>
+          <p:cNvPr id="22" name="Oval 21"/>
+          <p:cNvSpPr/>
+          <p:nvPr/>
+        </p:nvSpPr>
+        <p:spPr>
+          <a:xfrm>
+            <a:off x="6172200" y="3922776"/>
+            <a:ext cx="310896" cy="310896"/>
+          </a:xfrm>
+          <a:prstGeom prst="ellipse">
+            <a:avLst/>
+          </a:prstGeom>
+          <a:solidFill>
+            <a:srgbClr val="0E7A4F"/>
+          </a:solidFill>
+          <a:ln>
+            <a:noFill/>
+          </a:ln>
+          <a:effectLst/>
+        </p:spPr>
+        <p:style>
+          <a:lnRef idx="1">
+            <a:schemeClr val="accent1"/>
+          </a:lnRef>
+          <a:fillRef idx="3">
+            <a:schemeClr val="accent1"/>
+          </a:fillRef>
+          <a:effectRef idx="2">
+            <a:schemeClr val="accent1"/>
+          </a:effectRef>
+          <a:fontRef idx="minor">
+            <a:schemeClr val="lt1"/>
+          </a:fontRef>
+        </p:style>
+        <p:txBody>
+          <a:bodyPr rtlCol="0" anchor="ctr"/>
+          <a:lstStyle/>
+          <a:p>
+            <a:pPr algn="ctr"/>
+          </a:p>
+        </p:txBody>
+      </p:sp>
+      <p:sp>
+        <p:nvSpPr>
+          <p:cNvPr id="23" name="TextBox 22"/>
+          <p:cNvSpPr txBox="1"/>
+          <p:nvPr/>
+        </p:nvSpPr>
+        <p:spPr>
+          <a:xfrm>
+            <a:off x="6172200" y="3922776"/>
+            <a:ext cx="310896" cy="310896"/>
+          </a:xfrm>
+          <a:prstGeom prst="rect">
+            <a:avLst/>
+          </a:prstGeom>
+          <a:noFill/>
+        </p:spPr>
+        <p:txBody>
+          <a:bodyPr wrap="square" anchor="ctr" lIns="0" rIns="0" tIns="0" bIns="0">
+            <a:spAutoFit/>
+          </a:bodyPr>
+          <a:lstStyle/>
+          <a:p>
+            <a:pPr algn="ctr"/>
+            <a:r>
+              <a:rPr sz="1100" b="1">
+                <a:solidFill>
+                  <a:srgbClr val="FFFFFF"/>
+                </a:solidFill>
+                <a:latin typeface="微软雅黑"/>
+                <a:ea typeface="微软雅黑"/>
+                <a:cs typeface="微软雅黑"/>
+              </a:rPr>
+              <a:t>3</a:t>
+            </a:r>
+          </a:p>
+        </p:txBody>
+      </p:sp>
+      <p:sp>
+        <p:nvSpPr>
+          <p:cNvPr id="24" name="TextBox 23"/>
+          <p:cNvSpPr txBox="1"/>
+          <p:nvPr/>
+        </p:nvSpPr>
+        <p:spPr>
+          <a:xfrm>
+            <a:off x="6629400" y="3904488"/>
+            <a:ext cx="4937760" cy="310896"/>
+          </a:xfrm>
+          <a:prstGeom prst="rect">
+            <a:avLst/>
+          </a:prstGeom>
+          <a:noFill/>
+        </p:spPr>
+        <p:txBody>
+          <a:bodyPr wrap="square" anchor="t" lIns="0" rIns="0" tIns="0" bIns="0">
+            <a:spAutoFit/>
+          </a:bodyPr>
+          <a:lstStyle/>
+          <a:p>
+            <a:pPr algn="l"/>
+            <a:r>
+              <a:rPr sz="1450" b="1">
+                <a:solidFill>
+                  <a:srgbClr val="1A2332"/>
+                </a:solidFill>
+                <a:latin typeface="微软雅黑"/>
+                <a:ea typeface="微软雅黑"/>
+                <a:cs typeface="微软雅黑"/>
+              </a:rPr>
+              <a:t>内核兜底不可顶替</a:t>
+            </a:r>
+          </a:p>
+        </p:txBody>
+      </p:sp>
+      <p:sp>
+        <p:nvSpPr>
+          <p:cNvPr id="25" name="TextBox 24"/>
+          <p:cNvSpPr txBox="1"/>
+          <p:nvPr/>
+        </p:nvSpPr>
+        <p:spPr>
+          <a:xfrm>
+            <a:off x="6629400" y="4251960"/>
+            <a:ext cx="4937760" cy="603504"/>
+          </a:xfrm>
+          <a:prstGeom prst="rect">
+            <a:avLst/>
+          </a:prstGeom>
+          <a:noFill/>
+        </p:spPr>
+        <p:txBody>
+          <a:bodyPr wrap="square" anchor="t" lIns="0" rIns="0" tIns="0" bIns="0">
+            <a:spAutoFit/>
+          </a:bodyPr>
+          <a:lstStyle/>
+          <a:p>
+            <a:pPr algn="l">
+              <a:lnSpc>
+                <a:spcPct val="120000"/>
+              </a:lnSpc>
+            </a:pPr>
+            <a:r>
+              <a:rPr sz="1200" b="0">
+                <a:solidFill>
+                  <a:srgbClr val="6B7A72"/>
+                </a:solidFill>
+                <a:latin typeface="微软雅黑"/>
+                <a:ea typeface="微软雅黑"/>
+                <a:cs typeface="微软雅黑"/>
+              </a:rPr>
+              <a:t>导出格式名保留、附件解析内核原生格式优先</a:t>
+            </a:r>
+          </a:p>
+        </p:txBody>
+      </p:sp>
+      <p:sp>
+        <p:nvSpPr>
+          <p:cNvPr id="26" name="Oval 25"/>
+          <p:cNvSpPr/>
+          <p:nvPr/>
+        </p:nvSpPr>
+        <p:spPr>
+          <a:xfrm>
+            <a:off x="6172200" y="4855464"/>
+            <a:ext cx="310896" cy="310896"/>
+          </a:xfrm>
+          <a:prstGeom prst="ellipse">
+            <a:avLst/>
+          </a:prstGeom>
+          <a:solidFill>
+            <a:srgbClr val="0E7A4F"/>
+          </a:solidFill>
+          <a:ln>
+            <a:noFill/>
+          </a:ln>
+          <a:effectLst/>
+        </p:spPr>
+        <p:style>
+          <a:lnRef idx="1">
+            <a:schemeClr val="accent1"/>
+          </a:lnRef>
+          <a:fillRef idx="3">
+            <a:schemeClr val="accent1"/>
+          </a:fillRef>
+          <a:effectRef idx="2">
+            <a:schemeClr val="accent1"/>
+          </a:effectRef>
+          <a:fontRef idx="minor">
+            <a:schemeClr val="lt1"/>
+          </a:fontRef>
+        </p:style>
+        <p:txBody>
+          <a:bodyPr rtlCol="0" anchor="ctr"/>
+          <a:lstStyle/>
+          <a:p>
+            <a:pPr algn="ctr"/>
+          </a:p>
+        </p:txBody>
+      </p:sp>
+      <p:sp>
+        <p:nvSpPr>
+          <p:cNvPr id="27" name="TextBox 26"/>
+          <p:cNvSpPr txBox="1"/>
+          <p:nvPr/>
+        </p:nvSpPr>
+        <p:spPr>
+          <a:xfrm>
+            <a:off x="6172200" y="4855464"/>
+            <a:ext cx="310896" cy="310896"/>
+          </a:xfrm>
+          <a:prstGeom prst="rect">
+            <a:avLst/>
+          </a:prstGeom>
+          <a:noFill/>
+        </p:spPr>
+        <p:txBody>
+          <a:bodyPr wrap="square" anchor="ctr" lIns="0" rIns="0" tIns="0" bIns="0">
+            <a:spAutoFit/>
+          </a:bodyPr>
+          <a:lstStyle/>
+          <a:p>
+            <a:pPr algn="ctr"/>
+            <a:r>
+              <a:rPr sz="1100" b="1">
+                <a:solidFill>
+                  <a:srgbClr val="FFFFFF"/>
+                </a:solidFill>
+                <a:latin typeface="微软雅黑"/>
+                <a:ea typeface="微软雅黑"/>
+                <a:cs typeface="微软雅黑"/>
+              </a:rPr>
+              <a:t>4</a:t>
+            </a:r>
+          </a:p>
+        </p:txBody>
+      </p:sp>
+      <p:sp>
+        <p:nvSpPr>
+          <p:cNvPr id="28" name="TextBox 27"/>
+          <p:cNvSpPr txBox="1"/>
+          <p:nvPr/>
+        </p:nvSpPr>
+        <p:spPr>
+          <a:xfrm>
+            <a:off x="6629400" y="4837176"/>
+            <a:ext cx="4937760" cy="310896"/>
+          </a:xfrm>
+          <a:prstGeom prst="rect">
+            <a:avLst/>
+          </a:prstGeom>
+          <a:noFill/>
+        </p:spPr>
+        <p:txBody>
+          <a:bodyPr wrap="square" anchor="t" lIns="0" rIns="0" tIns="0" bIns="0">
+            <a:spAutoFit/>
+          </a:bodyPr>
+          <a:lstStyle/>
+          <a:p>
+            <a:pPr algn="l"/>
+            <a:r>
+              <a:rPr sz="1450" b="1">
+                <a:solidFill>
+                  <a:srgbClr val="1A2332"/>
+                </a:solidFill>
+                <a:latin typeface="微软雅黑"/>
+                <a:ea typeface="微软雅黑"/>
+                <a:cs typeface="微软雅黑"/>
+              </a:rPr>
+              <a:t>能力跟着开关走</a:t>
+            </a:r>
+          </a:p>
+        </p:txBody>
+      </p:sp>
+      <p:sp>
+        <p:nvSpPr>
+          <p:cNvPr id="29" name="TextBox 28"/>
+          <p:cNvSpPr txBox="1"/>
+          <p:nvPr/>
+        </p:nvSpPr>
+        <p:spPr>
+          <a:xfrm>
+            <a:off x="6629400" y="5184648"/>
+            <a:ext cx="4937760" cy="603504"/>
+          </a:xfrm>
+          <a:prstGeom prst="rect">
+            <a:avLst/>
+          </a:prstGeom>
+          <a:noFill/>
+        </p:spPr>
+        <p:txBody>
+          <a:bodyPr wrap="square" anchor="t" lIns="0" rIns="0" tIns="0" bIns="0">
+            <a:spAutoFit/>
+          </a:bodyPr>
+          <a:lstStyle/>
+          <a:p>
+            <a:pPr algn="l">
+              <a:lnSpc>
+                <a:spcPct val="120000"/>
+              </a:lnSpc>
+            </a:pPr>
+            <a:r>
+              <a:rPr sz="1200" b="0">
+                <a:solidFill>
+                  <a:srgbClr val="6B7A72"/>
+                </a:solidFill>
+                <a:latin typeface="微软雅黑"/>
+                <a:ea typeface="微软雅黑"/>
+                <a:cs typeface="微软雅黑"/>
+              </a:rPr>
+              <a:t>停用即注销模板、摘除识别器，「关了还在跑」不允许</a:t>
+            </a:r>
+          </a:p>
+        </p:txBody>
+      </p:sp>
+      <p:sp>
+        <p:nvSpPr>
+          <p:cNvPr id="30" name="Oval 29"/>
+          <p:cNvSpPr/>
+          <p:nvPr/>
+        </p:nvSpPr>
+        <p:spPr>
+          <a:xfrm>
+            <a:off x="6172200" y="5788152"/>
+            <a:ext cx="310896" cy="310896"/>
+          </a:xfrm>
+          <a:prstGeom prst="ellipse">
+            <a:avLst/>
+          </a:prstGeom>
+          <a:solidFill>
+            <a:srgbClr val="0E7A4F"/>
+          </a:solidFill>
+          <a:ln>
+            <a:noFill/>
+          </a:ln>
+          <a:effectLst/>
+        </p:spPr>
+        <p:style>
+          <a:lnRef idx="1">
+            <a:schemeClr val="accent1"/>
+          </a:lnRef>
+          <a:fillRef idx="3">
+            <a:schemeClr val="accent1"/>
+          </a:fillRef>
+          <a:effectRef idx="2">
+            <a:schemeClr val="accent1"/>
+          </a:effectRef>
+          <a:fontRef idx="minor">
+            <a:schemeClr val="lt1"/>
+          </a:fontRef>
+        </p:style>
+        <p:txBody>
+          <a:bodyPr rtlCol="0" anchor="ctr"/>
+          <a:lstStyle/>
+          <a:p>
+            <a:pPr algn="ctr"/>
+          </a:p>
+        </p:txBody>
+      </p:sp>
+      <p:sp>
+        <p:nvSpPr>
+          <p:cNvPr id="31" name="TextBox 30"/>
+          <p:cNvSpPr txBox="1"/>
+          <p:nvPr/>
+        </p:nvSpPr>
+        <p:spPr>
+          <a:xfrm>
+            <a:off x="6172200" y="5788152"/>
+            <a:ext cx="310896" cy="310896"/>
+          </a:xfrm>
+          <a:prstGeom prst="rect">
+            <a:avLst/>
+          </a:prstGeom>
+          <a:noFill/>
+        </p:spPr>
+        <p:txBody>
+          <a:bodyPr wrap="square" anchor="ctr" lIns="0" rIns="0" tIns="0" bIns="0">
+            <a:spAutoFit/>
+          </a:bodyPr>
+          <a:lstStyle/>
+          <a:p>
+            <a:pPr algn="ctr"/>
+            <a:r>
+              <a:rPr sz="1100" b="1">
+                <a:solidFill>
+                  <a:srgbClr val="FFFFFF"/>
+                </a:solidFill>
+                <a:latin typeface="微软雅黑"/>
+                <a:ea typeface="微软雅黑"/>
+                <a:cs typeface="微软雅黑"/>
+              </a:rPr>
+              <a:t>5</a:t>
+            </a:r>
+          </a:p>
+        </p:txBody>
+      </p:sp>
+      <p:sp>
+        <p:nvSpPr>
+          <p:cNvPr id="32" name="TextBox 31"/>
+          <p:cNvSpPr txBox="1"/>
+          <p:nvPr/>
+        </p:nvSpPr>
+        <p:spPr>
+          <a:xfrm>
+            <a:off x="6629400" y="5769864"/>
+            <a:ext cx="4937760" cy="310896"/>
+          </a:xfrm>
+          <a:prstGeom prst="rect">
+            <a:avLst/>
+          </a:prstGeom>
+          <a:noFill/>
+        </p:spPr>
+        <p:txBody>
+          <a:bodyPr wrap="square" anchor="t" lIns="0" rIns="0" tIns="0" bIns="0">
+            <a:spAutoFit/>
+          </a:bodyPr>
+          <a:lstStyle/>
+          <a:p>
+            <a:pPr algn="l"/>
+            <a:r>
+              <a:rPr sz="1450" b="1">
+                <a:solidFill>
+                  <a:srgbClr val="1A2332"/>
+                </a:solidFill>
+                <a:latin typeface="微软雅黑"/>
+                <a:ea typeface="微软雅黑"/>
+                <a:cs typeface="微软雅黑"/>
+              </a:rPr>
+              <a:t>不允许静默失效</a:t>
+            </a:r>
+          </a:p>
+        </p:txBody>
+      </p:sp>
+      <p:sp>
+        <p:nvSpPr>
+          <p:cNvPr id="33" name="TextBox 32"/>
+          <p:cNvSpPr txBox="1"/>
+          <p:nvPr/>
+        </p:nvSpPr>
+        <p:spPr>
+          <a:xfrm>
+            <a:off x="6629400" y="6117336"/>
+            <a:ext cx="4937760" cy="603504"/>
+          </a:xfrm>
+          <a:prstGeom prst="rect">
+            <a:avLst/>
+          </a:prstGeom>
+          <a:noFill/>
+        </p:spPr>
+        <p:txBody>
+          <a:bodyPr wrap="square" anchor="t" lIns="0" rIns="0" tIns="0" bIns="0">
+            <a:spAutoFit/>
+          </a:bodyPr>
+          <a:lstStyle/>
+          <a:p>
+            <a:pPr algn="l">
+              <a:lnSpc>
+                <a:spcPct val="120000"/>
+              </a:lnSpc>
+            </a:pPr>
+            <a:r>
+              <a:rPr sz="1200" b="0">
+                <a:solidFill>
+                  <a:srgbClr val="6B7A72"/>
+                </a:solidFill>
+                <a:latin typeface="微软雅黑"/>
+                <a:ea typeface="微软雅黑"/>
+                <a:cs typeface="微软雅黑"/>
+              </a:rPr>
+              <a:t>钩子函数缺失记为错误 + 界面插件自检 + 读不到配置要告警</a:t>
+            </a:r>
+          </a:p>
+        </p:txBody>
+      </p:sp>
+      <p:sp>
+        <p:nvSpPr>
+          <p:cNvPr id="34" name="TextBox 33"/>
+          <p:cNvSpPr txBox="1"/>
+          <p:nvPr/>
+        </p:nvSpPr>
+        <p:spPr>
+          <a:xfrm>
+            <a:off x="6172200" y="6766560"/>
+            <a:ext cx="5394960" cy="365760"/>
+          </a:xfrm>
+          <a:prstGeom prst="rect">
+            <a:avLst/>
+          </a:prstGeom>
+          <a:noFill/>
+        </p:spPr>
+        <p:txBody>
+          <a:bodyPr wrap="square" anchor="t" lIns="0" rIns="0" tIns="0" bIns="0">
+            <a:spAutoFit/>
+          </a:bodyPr>
+          <a:lstStyle/>
+          <a:p>
+            <a:pPr algn="l"/>
+            <a:r>
+              <a:rPr sz="1250" b="1">
+                <a:solidFill>
+                  <a:srgbClr val="0E7A4F"/>
+                </a:solidFill>
+                <a:latin typeface="微软雅黑"/>
+                <a:ea typeface="微软雅黑"/>
+                <a:cs typeface="微软雅黑"/>
+              </a:rPr>
+              <a:t>内置 5 个插件（默认关闭，按需启用；启停与配置改动均写审计）</a:t>
+            </a:r>
+          </a:p>
+        </p:txBody>
+      </p:sp>
+      <p:sp>
+        <p:nvSpPr>
+          <p:cNvPr id="35" name="TextBox 34"/>
+          <p:cNvSpPr txBox="1"/>
+          <p:nvPr/>
+        </p:nvSpPr>
+        <p:spPr>
+          <a:xfrm>
+            <a:off x="11185855" y="6291072"/>
+            <a:ext cx="548640" cy="320040"/>
+          </a:xfrm>
+          <a:prstGeom prst="rect">
+            <a:avLst/>
+          </a:prstGeom>
+          <a:noFill/>
+        </p:spPr>
+        <p:txBody>
+          <a:bodyPr wrap="square" anchor="t" lIns="0" rIns="0" tIns="0" bIns="0">
+            <a:spAutoFit/>
+          </a:bodyPr>
+          <a:lstStyle/>
+          <a:p>
+            <a:pPr algn="r"/>
+            <a:r>
+              <a:rPr sz="1100" b="0">
+                <a:solidFill>
+                  <a:srgbClr val="6B7A72"/>
+                </a:solidFill>
+                <a:latin typeface="微软雅黑"/>
+                <a:ea typeface="微软雅黑"/>
+                <a:cs typeface="微软雅黑"/>
+              </a:rPr>
+              <a:t>16</a:t>
+            </a:r>
+          </a:p>
+        </p:txBody>
+      </p:sp>
+    </p:spTree>
+  </p:cSld>
+  <p:clrMapOvr>
+    <a:masterClrMapping/>
+  </p:clrMapOvr>
+</p:sld>
+</file>
+
+<file path=ppt/slides/slide17.xml><?xml version="1.0" encoding="utf-8"?>
+<p:sld xmlns:a="http://schemas.openxmlformats.org/drawingml/2006/main" xmlns:p="http://schemas.openxmlformats.org/presentationml/2006/main" xmlns:r="http://schemas.openxmlformats.org/officeDocument/2006/relationships">
+  <p:cSld>
+    <p:spTree>
+      <p:nvGrpSpPr>
+        <p:cNvPr id="1" name=""/>
+        <p:cNvGrpSpPr/>
+        <p:nvPr/>
+      </p:nvGrpSpPr>
+      <p:grpSpPr/>
+      <p:sp>
+        <p:nvSpPr>
+          <p:cNvPr id="2" name="Rectangle 1"/>
+          <p:cNvSpPr/>
+          <p:nvPr/>
+        </p:nvSpPr>
+        <p:spPr>
+          <a:xfrm>
+            <a:off x="0" y="0"/>
+            <a:ext cx="12191695" cy="6858000"/>
+          </a:xfrm>
+          <a:prstGeom prst="rect">
+            <a:avLst/>
+          </a:prstGeom>
+          <a:solidFill>
+            <a:srgbClr val="F4F7F5"/>
+          </a:solidFill>
+          <a:ln>
+            <a:noFill/>
+          </a:ln>
+          <a:effectLst/>
+        </p:spPr>
+        <p:style>
+          <a:lnRef idx="1">
+            <a:schemeClr val="accent1"/>
+          </a:lnRef>
+          <a:fillRef idx="3">
+            <a:schemeClr val="accent1"/>
+          </a:fillRef>
+          <a:effectRef idx="2">
+            <a:schemeClr val="accent1"/>
+          </a:effectRef>
+          <a:fontRef idx="minor">
+            <a:schemeClr val="lt1"/>
+          </a:fontRef>
+        </p:style>
+        <p:txBody>
+          <a:bodyPr rtlCol="0" anchor="ctr"/>
+          <a:lstStyle/>
+          <a:p>
+            <a:pPr algn="ctr"/>
+          </a:p>
+        </p:txBody>
+      </p:sp>
+      <p:sp>
+        <p:nvSpPr>
+          <p:cNvPr id="3" name="TextBox 2"/>
+          <p:cNvSpPr txBox="1"/>
+          <p:nvPr/>
+        </p:nvSpPr>
+        <p:spPr>
+          <a:xfrm>
+            <a:off x="640080" y="502920"/>
+            <a:ext cx="7315200" cy="274320"/>
+          </a:xfrm>
+          <a:prstGeom prst="rect">
+            <a:avLst/>
+          </a:prstGeom>
+          <a:noFill/>
+        </p:spPr>
+        <p:txBody>
+          <a:bodyPr wrap="square" anchor="t" lIns="0" rIns="0" tIns="0" bIns="0">
+            <a:spAutoFit/>
+          </a:bodyPr>
+          <a:lstStyle/>
+          <a:p>
+            <a:pPr algn="l"/>
+            <a:r>
+              <a:rPr sz="1300" b="1">
+                <a:solidFill>
+                  <a:srgbClr val="0E7A4F"/>
+                </a:solidFill>
+                <a:latin typeface="微软雅黑"/>
+                <a:ea typeface="微软雅黑"/>
+                <a:cs typeface="微软雅黑"/>
+              </a:rPr>
               <a:t>功能实测</a:t>
             </a:r>
           </a:p>
@@ -9199,7 +10566,7 @@
                 <a:ea typeface="微软雅黑"/>
                 <a:cs typeface="微软雅黑"/>
               </a:rPr>
-              <a:t>16</a:t>
+              <a:t>17</a:t>
             </a:r>
           </a:p>
         </p:txBody>
@@ -9212,7 +10579,7 @@
 </p:sld>
 </file>
 
-<file path=ppt/slides/slide17.xml><?xml version="1.0" encoding="utf-8"?>
+<file path=ppt/slides/slide18.xml><?xml version="1.0" encoding="utf-8"?>
 <p:sld xmlns:a="http://schemas.openxmlformats.org/drawingml/2006/main" xmlns:p="http://schemas.openxmlformats.org/presentationml/2006/main" xmlns:r="http://schemas.openxmlformats.org/officeDocument/2006/relationships">
   <p:cSld>
     <p:spTree>
@@ -10725,1480 +12092,6 @@
                 <a:ea typeface="微软雅黑"/>
                 <a:cs typeface="微软雅黑"/>
               </a:rPr>
-              <a:t>17</a:t>
-            </a:r>
-          </a:p>
-        </p:txBody>
-      </p:sp>
-    </p:spTree>
-  </p:cSld>
-  <p:clrMapOvr>
-    <a:masterClrMapping/>
-  </p:clrMapOvr>
-</p:sld>
-</file>
-
-<file path=ppt/slides/slide18.xml><?xml version="1.0" encoding="utf-8"?>
-<p:sld xmlns:a="http://schemas.openxmlformats.org/drawingml/2006/main" xmlns:p="http://schemas.openxmlformats.org/presentationml/2006/main" xmlns:r="http://schemas.openxmlformats.org/officeDocument/2006/relationships">
-  <p:cSld>
-    <p:spTree>
-      <p:nvGrpSpPr>
-        <p:cNvPr id="1" name=""/>
-        <p:cNvGrpSpPr/>
-        <p:nvPr/>
-      </p:nvGrpSpPr>
-      <p:grpSpPr/>
-      <p:sp>
-        <p:nvSpPr>
-          <p:cNvPr id="2" name="Rectangle 1"/>
-          <p:cNvSpPr/>
-          <p:nvPr/>
-        </p:nvSpPr>
-        <p:spPr>
-          <a:xfrm>
-            <a:off x="0" y="0"/>
-            <a:ext cx="12191695" cy="6858000"/>
-          </a:xfrm>
-          <a:prstGeom prst="rect">
-            <a:avLst/>
-          </a:prstGeom>
-          <a:solidFill>
-            <a:srgbClr val="F4F7F5"/>
-          </a:solidFill>
-          <a:ln>
-            <a:noFill/>
-          </a:ln>
-          <a:effectLst/>
-        </p:spPr>
-        <p:style>
-          <a:lnRef idx="1">
-            <a:schemeClr val="accent1"/>
-          </a:lnRef>
-          <a:fillRef idx="3">
-            <a:schemeClr val="accent1"/>
-          </a:fillRef>
-          <a:effectRef idx="2">
-            <a:schemeClr val="accent1"/>
-          </a:effectRef>
-          <a:fontRef idx="minor">
-            <a:schemeClr val="lt1"/>
-          </a:fontRef>
-        </p:style>
-        <p:txBody>
-          <a:bodyPr rtlCol="0" anchor="ctr"/>
-          <a:lstStyle/>
-          <a:p>
-            <a:pPr algn="ctr"/>
-          </a:p>
-        </p:txBody>
-      </p:sp>
-      <p:sp>
-        <p:nvSpPr>
-          <p:cNvPr id="3" name="TextBox 2"/>
-          <p:cNvSpPr txBox="1"/>
-          <p:nvPr/>
-        </p:nvSpPr>
-        <p:spPr>
-          <a:xfrm>
-            <a:off x="640080" y="502920"/>
-            <a:ext cx="7315200" cy="274320"/>
-          </a:xfrm>
-          <a:prstGeom prst="rect">
-            <a:avLst/>
-          </a:prstGeom>
-          <a:noFill/>
-        </p:spPr>
-        <p:txBody>
-          <a:bodyPr wrap="square" anchor="t" lIns="0" rIns="0" tIns="0" bIns="0">
-            <a:spAutoFit/>
-          </a:bodyPr>
-          <a:lstStyle/>
-          <a:p>
-            <a:pPr algn="l"/>
-            <a:r>
-              <a:rPr sz="1300" b="1">
-                <a:solidFill>
-                  <a:srgbClr val="0E7A4F"/>
-                </a:solidFill>
-                <a:latin typeface="微软雅黑"/>
-                <a:ea typeface="微软雅黑"/>
-                <a:cs typeface="微软雅黑"/>
-              </a:rPr>
-              <a:t>质量与交付</a:t>
-            </a:r>
-          </a:p>
-        </p:txBody>
-      </p:sp>
-      <p:sp>
-        <p:nvSpPr>
-          <p:cNvPr id="4" name="TextBox 3"/>
-          <p:cNvSpPr txBox="1"/>
-          <p:nvPr/>
-        </p:nvSpPr>
-        <p:spPr>
-          <a:xfrm>
-            <a:off x="640080" y="822960"/>
-            <a:ext cx="10911535" cy="731520"/>
-          </a:xfrm>
-          <a:prstGeom prst="rect">
-            <a:avLst/>
-          </a:prstGeom>
-          <a:noFill/>
-        </p:spPr>
-        <p:txBody>
-          <a:bodyPr wrap="square" anchor="t" lIns="0" rIns="0" tIns="0" bIns="0">
-            <a:spAutoFit/>
-          </a:bodyPr>
-          <a:lstStyle/>
-          <a:p>
-            <a:pPr algn="l"/>
-            <a:r>
-              <a:rPr sz="3000" b="1">
-                <a:solidFill>
-                  <a:srgbClr val="1A2332"/>
-                </a:solidFill>
-                <a:latin typeface="微软雅黑"/>
-                <a:ea typeface="微软雅黑"/>
-                <a:cs typeface="微软雅黑"/>
-              </a:rPr>
-              <a:t>全量回归通过 · 免安装单文件 exe 就绪</a:t>
-            </a:r>
-          </a:p>
-        </p:txBody>
-      </p:sp>
-      <p:sp>
-        <p:nvSpPr>
-          <p:cNvPr id="5" name="TextBox 4"/>
-          <p:cNvSpPr txBox="1"/>
-          <p:nvPr/>
-        </p:nvSpPr>
-        <p:spPr>
-          <a:xfrm>
-            <a:off x="640080" y="1572768"/>
-            <a:ext cx="5669280" cy="502920"/>
-          </a:xfrm>
-          <a:prstGeom prst="rect">
-            <a:avLst/>
-          </a:prstGeom>
-          <a:noFill/>
-        </p:spPr>
-        <p:txBody>
-          <a:bodyPr wrap="square" anchor="t" lIns="0" rIns="0" tIns="0" bIns="0">
-            <a:spAutoFit/>
-          </a:bodyPr>
-          <a:lstStyle/>
-          <a:p>
-            <a:pPr algn="l"/>
-            <a:r>
-              <a:rPr sz="1450" b="1">
-                <a:solidFill>
-                  <a:srgbClr val="0E7A4F"/>
-                </a:solidFill>
-                <a:latin typeface="微软雅黑"/>
-                <a:ea typeface="微软雅黑"/>
-                <a:cs typeface="微软雅黑"/>
-              </a:rPr>
-              <a:t>8 个测试套件 · 全部通过（含攻防评测 9 项实验）</a:t>
-            </a:r>
-          </a:p>
-        </p:txBody>
-      </p:sp>
-      <p:sp>
-        <p:nvSpPr>
-          <p:cNvPr id="6" name="Rounded Rectangle 5"/>
-          <p:cNvSpPr/>
-          <p:nvPr/>
-        </p:nvSpPr>
-        <p:spPr>
-          <a:xfrm>
-            <a:off x="640080" y="2103120"/>
-            <a:ext cx="5486400" cy="603504"/>
-          </a:xfrm>
-          <a:prstGeom prst="roundRect">
-            <a:avLst>
-              <a:gd name="adj" fmla="val 10000"/>
-            </a:avLst>
-          </a:prstGeom>
-          <a:solidFill>
-            <a:srgbClr val="FFFFFF"/>
-          </a:solidFill>
-          <a:ln>
-            <a:noFill/>
-          </a:ln>
-          <a:effectLst/>
-        </p:spPr>
-        <p:style>
-          <a:lnRef idx="1">
-            <a:schemeClr val="accent1"/>
-          </a:lnRef>
-          <a:fillRef idx="3">
-            <a:schemeClr val="accent1"/>
-          </a:fillRef>
-          <a:effectRef idx="2">
-            <a:schemeClr val="accent1"/>
-          </a:effectRef>
-          <a:fontRef idx="minor">
-            <a:schemeClr val="lt1"/>
-          </a:fontRef>
-        </p:style>
-        <p:txBody>
-          <a:bodyPr rtlCol="0" anchor="ctr"/>
-          <a:lstStyle/>
-          <a:p>
-            <a:pPr algn="ctr"/>
-          </a:p>
-        </p:txBody>
-      </p:sp>
-      <p:sp>
-        <p:nvSpPr>
-          <p:cNvPr id="7" name="TextBox 6"/>
-          <p:cNvSpPr txBox="1"/>
-          <p:nvPr/>
-        </p:nvSpPr>
-        <p:spPr>
-          <a:xfrm>
-            <a:off x="914400" y="2103120"/>
-            <a:ext cx="2194560" cy="603504"/>
-          </a:xfrm>
-          <a:prstGeom prst="rect">
-            <a:avLst/>
-          </a:prstGeom>
-          <a:noFill/>
-        </p:spPr>
-        <p:txBody>
-          <a:bodyPr wrap="square" anchor="ctr" lIns="0" rIns="0" tIns="0" bIns="0">
-            <a:spAutoFit/>
-          </a:bodyPr>
-          <a:lstStyle/>
-          <a:p>
-            <a:pPr algn="l"/>
-            <a:r>
-              <a:rPr sz="1400" b="1">
-                <a:solidFill>
-                  <a:srgbClr val="1A2332"/>
-                </a:solidFill>
-                <a:latin typeface="微软雅黑"/>
-                <a:ea typeface="微软雅黑"/>
-                <a:cs typeface="微软雅黑"/>
-              </a:rPr>
-              <a:t>隐私引擎</a:t>
-            </a:r>
-          </a:p>
-        </p:txBody>
-      </p:sp>
-      <p:sp>
-        <p:nvSpPr>
-          <p:cNvPr id="8" name="TextBox 7"/>
-          <p:cNvSpPr txBox="1"/>
-          <p:nvPr/>
-        </p:nvSpPr>
-        <p:spPr>
-          <a:xfrm>
-            <a:off x="3154680" y="2103120"/>
-            <a:ext cx="2468880" cy="603504"/>
-          </a:xfrm>
-          <a:prstGeom prst="rect">
-            <a:avLst/>
-          </a:prstGeom>
-          <a:noFill/>
-        </p:spPr>
-        <p:txBody>
-          <a:bodyPr wrap="square" anchor="ctr" lIns="0" rIns="0" tIns="0" bIns="0">
-            <a:spAutoFit/>
-          </a:bodyPr>
-          <a:lstStyle/>
-          <a:p>
-            <a:pPr algn="l"/>
-            <a:r>
-              <a:rPr sz="1150" b="0">
-                <a:solidFill>
-                  <a:srgbClr val="6B7A72"/>
-                </a:solidFill>
-                <a:latin typeface="微软雅黑"/>
-                <a:ea typeface="微软雅黑"/>
-                <a:cs typeface="微软雅黑"/>
-              </a:rPr>
-              <a:t>实体/脱敏/还原/nonce/strict</a:t>
-            </a:r>
-          </a:p>
-        </p:txBody>
-      </p:sp>
-      <p:sp>
-        <p:nvSpPr>
-          <p:cNvPr id="9" name="TextBox 8"/>
-          <p:cNvSpPr txBox="1"/>
-          <p:nvPr/>
-        </p:nvSpPr>
-        <p:spPr>
-          <a:xfrm>
-            <a:off x="5577840" y="2103120"/>
-            <a:ext cx="457200" cy="603504"/>
-          </a:xfrm>
-          <a:prstGeom prst="rect">
-            <a:avLst/>
-          </a:prstGeom>
-          <a:noFill/>
-        </p:spPr>
-        <p:txBody>
-          <a:bodyPr wrap="square" anchor="ctr" lIns="0" rIns="0" tIns="0" bIns="0">
-            <a:spAutoFit/>
-          </a:bodyPr>
-          <a:lstStyle/>
-          <a:p>
-            <a:pPr algn="l"/>
-            <a:r>
-              <a:rPr sz="1800" b="1">
-                <a:solidFill>
-                  <a:srgbClr val="0E7A4F"/>
-                </a:solidFill>
-                <a:latin typeface="微软雅黑"/>
-                <a:ea typeface="微软雅黑"/>
-                <a:cs typeface="微软雅黑"/>
-              </a:rPr>
-              <a:t>✓</a:t>
-            </a:r>
-          </a:p>
-        </p:txBody>
-      </p:sp>
-      <p:sp>
-        <p:nvSpPr>
-          <p:cNvPr id="10" name="Rounded Rectangle 9"/>
-          <p:cNvSpPr/>
-          <p:nvPr/>
-        </p:nvSpPr>
-        <p:spPr>
-          <a:xfrm>
-            <a:off x="640080" y="2788920"/>
-            <a:ext cx="5486400" cy="603504"/>
-          </a:xfrm>
-          <a:prstGeom prst="roundRect">
-            <a:avLst>
-              <a:gd name="adj" fmla="val 10000"/>
-            </a:avLst>
-          </a:prstGeom>
-          <a:solidFill>
-            <a:srgbClr val="FFFFFF"/>
-          </a:solidFill>
-          <a:ln>
-            <a:noFill/>
-          </a:ln>
-          <a:effectLst/>
-        </p:spPr>
-        <p:style>
-          <a:lnRef idx="1">
-            <a:schemeClr val="accent1"/>
-          </a:lnRef>
-          <a:fillRef idx="3">
-            <a:schemeClr val="accent1"/>
-          </a:fillRef>
-          <a:effectRef idx="2">
-            <a:schemeClr val="accent1"/>
-          </a:effectRef>
-          <a:fontRef idx="minor">
-            <a:schemeClr val="lt1"/>
-          </a:fontRef>
-        </p:style>
-        <p:txBody>
-          <a:bodyPr rtlCol="0" anchor="ctr"/>
-          <a:lstStyle/>
-          <a:p>
-            <a:pPr algn="ctr"/>
-          </a:p>
-        </p:txBody>
-      </p:sp>
-      <p:sp>
-        <p:nvSpPr>
-          <p:cNvPr id="11" name="TextBox 10"/>
-          <p:cNvSpPr txBox="1"/>
-          <p:nvPr/>
-        </p:nvSpPr>
-        <p:spPr>
-          <a:xfrm>
-            <a:off x="914400" y="2788920"/>
-            <a:ext cx="2194560" cy="603504"/>
-          </a:xfrm>
-          <a:prstGeom prst="rect">
-            <a:avLst/>
-          </a:prstGeom>
-          <a:noFill/>
-        </p:spPr>
-        <p:txBody>
-          <a:bodyPr wrap="square" anchor="ctr" lIns="0" rIns="0" tIns="0" bIns="0">
-            <a:spAutoFit/>
-          </a:bodyPr>
-          <a:lstStyle/>
-          <a:p>
-            <a:pPr algn="l"/>
-            <a:r>
-              <a:rPr sz="1400" b="1">
-                <a:solidFill>
-                  <a:srgbClr val="1A2332"/>
-                </a:solidFill>
-                <a:latin typeface="微软雅黑"/>
-                <a:ea typeface="微软雅黑"/>
-                <a:cs typeface="微软雅黑"/>
-              </a:rPr>
-              <a:t>审计黑匣子</a:t>
-            </a:r>
-          </a:p>
-        </p:txBody>
-      </p:sp>
-      <p:sp>
-        <p:nvSpPr>
-          <p:cNvPr id="12" name="TextBox 11"/>
-          <p:cNvSpPr txBox="1"/>
-          <p:nvPr/>
-        </p:nvSpPr>
-        <p:spPr>
-          <a:xfrm>
-            <a:off x="3154680" y="2788920"/>
-            <a:ext cx="2468880" cy="603504"/>
-          </a:xfrm>
-          <a:prstGeom prst="rect">
-            <a:avLst/>
-          </a:prstGeom>
-          <a:noFill/>
-        </p:spPr>
-        <p:txBody>
-          <a:bodyPr wrap="square" anchor="ctr" lIns="0" rIns="0" tIns="0" bIns="0">
-            <a:spAutoFit/>
-          </a:bodyPr>
-          <a:lstStyle/>
-          <a:p>
-            <a:pPr algn="l"/>
-            <a:r>
-              <a:rPr sz="1150" b="0">
-                <a:solidFill>
-                  <a:srgbClr val="6B7A72"/>
-                </a:solidFill>
-                <a:latin typeface="微软雅黑"/>
-                <a:ea typeface="微软雅黑"/>
-                <a:cs typeface="微软雅黑"/>
-              </a:rPr>
-              <a:t>哈希链/防篡改/一致性 14/14</a:t>
-            </a:r>
-          </a:p>
-        </p:txBody>
-      </p:sp>
-      <p:sp>
-        <p:nvSpPr>
-          <p:cNvPr id="13" name="TextBox 12"/>
-          <p:cNvSpPr txBox="1"/>
-          <p:nvPr/>
-        </p:nvSpPr>
-        <p:spPr>
-          <a:xfrm>
-            <a:off x="5577840" y="2788920"/>
-            <a:ext cx="457200" cy="603504"/>
-          </a:xfrm>
-          <a:prstGeom prst="rect">
-            <a:avLst/>
-          </a:prstGeom>
-          <a:noFill/>
-        </p:spPr>
-        <p:txBody>
-          <a:bodyPr wrap="square" anchor="ctr" lIns="0" rIns="0" tIns="0" bIns="0">
-            <a:spAutoFit/>
-          </a:bodyPr>
-          <a:lstStyle/>
-          <a:p>
-            <a:pPr algn="l"/>
-            <a:r>
-              <a:rPr sz="1800" b="1">
-                <a:solidFill>
-                  <a:srgbClr val="0E7A4F"/>
-                </a:solidFill>
-                <a:latin typeface="微软雅黑"/>
-                <a:ea typeface="微软雅黑"/>
-                <a:cs typeface="微软雅黑"/>
-              </a:rPr>
-              <a:t>✓</a:t>
-            </a:r>
-          </a:p>
-        </p:txBody>
-      </p:sp>
-      <p:sp>
-        <p:nvSpPr>
-          <p:cNvPr id="14" name="Rounded Rectangle 13"/>
-          <p:cNvSpPr/>
-          <p:nvPr/>
-        </p:nvSpPr>
-        <p:spPr>
-          <a:xfrm>
-            <a:off x="640080" y="3474720"/>
-            <a:ext cx="5486400" cy="603504"/>
-          </a:xfrm>
-          <a:prstGeom prst="roundRect">
-            <a:avLst>
-              <a:gd name="adj" fmla="val 10000"/>
-            </a:avLst>
-          </a:prstGeom>
-          <a:solidFill>
-            <a:srgbClr val="FFFFFF"/>
-          </a:solidFill>
-          <a:ln>
-            <a:noFill/>
-          </a:ln>
-          <a:effectLst/>
-        </p:spPr>
-        <p:style>
-          <a:lnRef idx="1">
-            <a:schemeClr val="accent1"/>
-          </a:lnRef>
-          <a:fillRef idx="3">
-            <a:schemeClr val="accent1"/>
-          </a:fillRef>
-          <a:effectRef idx="2">
-            <a:schemeClr val="accent1"/>
-          </a:effectRef>
-          <a:fontRef idx="minor">
-            <a:schemeClr val="lt1"/>
-          </a:fontRef>
-        </p:style>
-        <p:txBody>
-          <a:bodyPr rtlCol="0" anchor="ctr"/>
-          <a:lstStyle/>
-          <a:p>
-            <a:pPr algn="ctr"/>
-          </a:p>
-        </p:txBody>
-      </p:sp>
-      <p:sp>
-        <p:nvSpPr>
-          <p:cNvPr id="15" name="TextBox 14"/>
-          <p:cNvSpPr txBox="1"/>
-          <p:nvPr/>
-        </p:nvSpPr>
-        <p:spPr>
-          <a:xfrm>
-            <a:off x="914400" y="3474720"/>
-            <a:ext cx="2194560" cy="603504"/>
-          </a:xfrm>
-          <a:prstGeom prst="rect">
-            <a:avLst/>
-          </a:prstGeom>
-          <a:noFill/>
-        </p:spPr>
-        <p:txBody>
-          <a:bodyPr wrap="square" anchor="ctr" lIns="0" rIns="0" tIns="0" bIns="0">
-            <a:spAutoFit/>
-          </a:bodyPr>
-          <a:lstStyle/>
-          <a:p>
-            <a:pPr algn="l"/>
-            <a:r>
-              <a:rPr sz="1400" b="1">
-                <a:solidFill>
-                  <a:srgbClr val="1A2332"/>
-                </a:solidFill>
-                <a:latin typeface="微软雅黑"/>
-                <a:ea typeface="微软雅黑"/>
-                <a:cs typeface="微软雅黑"/>
-              </a:rPr>
-              <a:t>记忆管理</a:t>
-            </a:r>
-          </a:p>
-        </p:txBody>
-      </p:sp>
-      <p:sp>
-        <p:nvSpPr>
-          <p:cNvPr id="16" name="TextBox 15"/>
-          <p:cNvSpPr txBox="1"/>
-          <p:nvPr/>
-        </p:nvSpPr>
-        <p:spPr>
-          <a:xfrm>
-            <a:off x="3154680" y="3474720"/>
-            <a:ext cx="2468880" cy="603504"/>
-          </a:xfrm>
-          <a:prstGeom prst="rect">
-            <a:avLst/>
-          </a:prstGeom>
-          <a:noFill/>
-        </p:spPr>
-        <p:txBody>
-          <a:bodyPr wrap="square" anchor="ctr" lIns="0" rIns="0" tIns="0" bIns="0">
-            <a:spAutoFit/>
-          </a:bodyPr>
-          <a:lstStyle/>
-          <a:p>
-            <a:pPr algn="l"/>
-            <a:r>
-              <a:rPr sz="1150" b="0">
-                <a:solidFill>
-                  <a:srgbClr val="6B7A72"/>
-                </a:solidFill>
-                <a:latin typeface="微软雅黑"/>
-                <a:ea typeface="微软雅黑"/>
-                <a:cs typeface="微软雅黑"/>
-              </a:rPr>
-              <a:t>摘要/跨轮还原/序列化 6/6</a:t>
-            </a:r>
-          </a:p>
-        </p:txBody>
-      </p:sp>
-      <p:sp>
-        <p:nvSpPr>
-          <p:cNvPr id="17" name="TextBox 16"/>
-          <p:cNvSpPr txBox="1"/>
-          <p:nvPr/>
-        </p:nvSpPr>
-        <p:spPr>
-          <a:xfrm>
-            <a:off x="5577840" y="3474720"/>
-            <a:ext cx="457200" cy="603504"/>
-          </a:xfrm>
-          <a:prstGeom prst="rect">
-            <a:avLst/>
-          </a:prstGeom>
-          <a:noFill/>
-        </p:spPr>
-        <p:txBody>
-          <a:bodyPr wrap="square" anchor="ctr" lIns="0" rIns="0" tIns="0" bIns="0">
-            <a:spAutoFit/>
-          </a:bodyPr>
-          <a:lstStyle/>
-          <a:p>
-            <a:pPr algn="l"/>
-            <a:r>
-              <a:rPr sz="1800" b="1">
-                <a:solidFill>
-                  <a:srgbClr val="0E7A4F"/>
-                </a:solidFill>
-                <a:latin typeface="微软雅黑"/>
-                <a:ea typeface="微软雅黑"/>
-                <a:cs typeface="微软雅黑"/>
-              </a:rPr>
-              <a:t>✓</a:t>
-            </a:r>
-          </a:p>
-        </p:txBody>
-      </p:sp>
-      <p:sp>
-        <p:nvSpPr>
-          <p:cNvPr id="18" name="Rounded Rectangle 17"/>
-          <p:cNvSpPr/>
-          <p:nvPr/>
-        </p:nvSpPr>
-        <p:spPr>
-          <a:xfrm>
-            <a:off x="640080" y="4160520"/>
-            <a:ext cx="5486400" cy="603504"/>
-          </a:xfrm>
-          <a:prstGeom prst="roundRect">
-            <a:avLst>
-              <a:gd name="adj" fmla="val 10000"/>
-            </a:avLst>
-          </a:prstGeom>
-          <a:solidFill>
-            <a:srgbClr val="FFFFFF"/>
-          </a:solidFill>
-          <a:ln>
-            <a:noFill/>
-          </a:ln>
-          <a:effectLst/>
-        </p:spPr>
-        <p:style>
-          <a:lnRef idx="1">
-            <a:schemeClr val="accent1"/>
-          </a:lnRef>
-          <a:fillRef idx="3">
-            <a:schemeClr val="accent1"/>
-          </a:fillRef>
-          <a:effectRef idx="2">
-            <a:schemeClr val="accent1"/>
-          </a:effectRef>
-          <a:fontRef idx="minor">
-            <a:schemeClr val="lt1"/>
-          </a:fontRef>
-        </p:style>
-        <p:txBody>
-          <a:bodyPr rtlCol="0" anchor="ctr"/>
-          <a:lstStyle/>
-          <a:p>
-            <a:pPr algn="ctr"/>
-          </a:p>
-        </p:txBody>
-      </p:sp>
-      <p:sp>
-        <p:nvSpPr>
-          <p:cNvPr id="19" name="TextBox 18"/>
-          <p:cNvSpPr txBox="1"/>
-          <p:nvPr/>
-        </p:nvSpPr>
-        <p:spPr>
-          <a:xfrm>
-            <a:off x="914400" y="4160520"/>
-            <a:ext cx="2194560" cy="603504"/>
-          </a:xfrm>
-          <a:prstGeom prst="rect">
-            <a:avLst/>
-          </a:prstGeom>
-          <a:noFill/>
-        </p:spPr>
-        <p:txBody>
-          <a:bodyPr wrap="square" anchor="ctr" lIns="0" rIns="0" tIns="0" bIns="0">
-            <a:spAutoFit/>
-          </a:bodyPr>
-          <a:lstStyle/>
-          <a:p>
-            <a:pPr algn="l"/>
-            <a:r>
-              <a:rPr sz="1400" b="1">
-                <a:solidFill>
-                  <a:srgbClr val="1A2332"/>
-                </a:solidFill>
-                <a:latin typeface="微软雅黑"/>
-                <a:ea typeface="微软雅黑"/>
-                <a:cs typeface="微软雅黑"/>
-              </a:rPr>
-              <a:t>工作流 + 知识库</a:t>
-            </a:r>
-          </a:p>
-        </p:txBody>
-      </p:sp>
-      <p:sp>
-        <p:nvSpPr>
-          <p:cNvPr id="20" name="TextBox 19"/>
-          <p:cNvSpPr txBox="1"/>
-          <p:nvPr/>
-        </p:nvSpPr>
-        <p:spPr>
-          <a:xfrm>
-            <a:off x="3154680" y="4160520"/>
-            <a:ext cx="2468880" cy="603504"/>
-          </a:xfrm>
-          <a:prstGeom prst="rect">
-            <a:avLst/>
-          </a:prstGeom>
-          <a:noFill/>
-        </p:spPr>
-        <p:txBody>
-          <a:bodyPr wrap="square" anchor="ctr" lIns="0" rIns="0" tIns="0" bIns="0">
-            <a:spAutoFit/>
-          </a:bodyPr>
-          <a:lstStyle/>
-          <a:p>
-            <a:pPr algn="l"/>
-            <a:r>
-              <a:rPr sz="1150" b="0">
-                <a:solidFill>
-                  <a:srgbClr val="6B7A72"/>
-                </a:solidFill>
-                <a:latin typeface="微软雅黑"/>
-                <a:ea typeface="微软雅黑"/>
-                <a:cs typeface="微软雅黑"/>
-              </a:rPr>
-              <a:t>执行/审批链/导出；入库检索零明文</a:t>
-            </a:r>
-          </a:p>
-        </p:txBody>
-      </p:sp>
-      <p:sp>
-        <p:nvSpPr>
-          <p:cNvPr id="21" name="TextBox 20"/>
-          <p:cNvSpPr txBox="1"/>
-          <p:nvPr/>
-        </p:nvSpPr>
-        <p:spPr>
-          <a:xfrm>
-            <a:off x="5577840" y="4160520"/>
-            <a:ext cx="457200" cy="603504"/>
-          </a:xfrm>
-          <a:prstGeom prst="rect">
-            <a:avLst/>
-          </a:prstGeom>
-          <a:noFill/>
-        </p:spPr>
-        <p:txBody>
-          <a:bodyPr wrap="square" anchor="ctr" lIns="0" rIns="0" tIns="0" bIns="0">
-            <a:spAutoFit/>
-          </a:bodyPr>
-          <a:lstStyle/>
-          <a:p>
-            <a:pPr algn="l"/>
-            <a:r>
-              <a:rPr sz="1800" b="1">
-                <a:solidFill>
-                  <a:srgbClr val="0E7A4F"/>
-                </a:solidFill>
-                <a:latin typeface="微软雅黑"/>
-                <a:ea typeface="微软雅黑"/>
-                <a:cs typeface="微软雅黑"/>
-              </a:rPr>
-              <a:t>✓</a:t>
-            </a:r>
-          </a:p>
-        </p:txBody>
-      </p:sp>
-      <p:sp>
-        <p:nvSpPr>
-          <p:cNvPr id="22" name="Rounded Rectangle 21"/>
-          <p:cNvSpPr/>
-          <p:nvPr/>
-        </p:nvSpPr>
-        <p:spPr>
-          <a:xfrm>
-            <a:off x="640080" y="4846320"/>
-            <a:ext cx="5486400" cy="603504"/>
-          </a:xfrm>
-          <a:prstGeom prst="roundRect">
-            <a:avLst>
-              <a:gd name="adj" fmla="val 10000"/>
-            </a:avLst>
-          </a:prstGeom>
-          <a:solidFill>
-            <a:srgbClr val="FFFFFF"/>
-          </a:solidFill>
-          <a:ln>
-            <a:noFill/>
-          </a:ln>
-          <a:effectLst/>
-        </p:spPr>
-        <p:style>
-          <a:lnRef idx="1">
-            <a:schemeClr val="accent1"/>
-          </a:lnRef>
-          <a:fillRef idx="3">
-            <a:schemeClr val="accent1"/>
-          </a:fillRef>
-          <a:effectRef idx="2">
-            <a:schemeClr val="accent1"/>
-          </a:effectRef>
-          <a:fontRef idx="minor">
-            <a:schemeClr val="lt1"/>
-          </a:fontRef>
-        </p:style>
-        <p:txBody>
-          <a:bodyPr rtlCol="0" anchor="ctr"/>
-          <a:lstStyle/>
-          <a:p>
-            <a:pPr algn="ctr"/>
-          </a:p>
-        </p:txBody>
-      </p:sp>
-      <p:sp>
-        <p:nvSpPr>
-          <p:cNvPr id="23" name="TextBox 22"/>
-          <p:cNvSpPr txBox="1"/>
-          <p:nvPr/>
-        </p:nvSpPr>
-        <p:spPr>
-          <a:xfrm>
-            <a:off x="914400" y="4846320"/>
-            <a:ext cx="2194560" cy="603504"/>
-          </a:xfrm>
-          <a:prstGeom prst="rect">
-            <a:avLst/>
-          </a:prstGeom>
-          <a:noFill/>
-        </p:spPr>
-        <p:txBody>
-          <a:bodyPr wrap="square" anchor="ctr" lIns="0" rIns="0" tIns="0" bIns="0">
-            <a:spAutoFit/>
-          </a:bodyPr>
-          <a:lstStyle/>
-          <a:p>
-            <a:pPr algn="l"/>
-            <a:r>
-              <a:rPr sz="1400" b="1">
-                <a:solidFill>
-                  <a:srgbClr val="1A2332"/>
-                </a:solidFill>
-                <a:latin typeface="微软雅黑"/>
-                <a:ea typeface="微软雅黑"/>
-                <a:cs typeface="微软雅黑"/>
-              </a:rPr>
-              <a:t>白名单（新增）</a:t>
-            </a:r>
-          </a:p>
-        </p:txBody>
-      </p:sp>
-      <p:sp>
-        <p:nvSpPr>
-          <p:cNvPr id="24" name="TextBox 23"/>
-          <p:cNvSpPr txBox="1"/>
-          <p:nvPr/>
-        </p:nvSpPr>
-        <p:spPr>
-          <a:xfrm>
-            <a:off x="3154680" y="4846320"/>
-            <a:ext cx="2468880" cy="603504"/>
-          </a:xfrm>
-          <a:prstGeom prst="rect">
-            <a:avLst/>
-          </a:prstGeom>
-          <a:noFill/>
-        </p:spPr>
-        <p:txBody>
-          <a:bodyPr wrap="square" anchor="ctr" lIns="0" rIns="0" tIns="0" bIns="0">
-            <a:spAutoFit/>
-          </a:bodyPr>
-          <a:lstStyle/>
-          <a:p>
-            <a:pPr algn="l"/>
-            <a:r>
-              <a:rPr sz="1150" b="0">
-                <a:solidFill>
-                  <a:srgbClr val="6B7A72"/>
-                </a:solidFill>
-                <a:latin typeface="微软雅黑"/>
-                <a:ea typeface="微软雅黑"/>
-                <a:cs typeface="微软雅黑"/>
-              </a:rPr>
-              <a:t>16 项高危入口全拦截</a:t>
-            </a:r>
-          </a:p>
-        </p:txBody>
-      </p:sp>
-      <p:sp>
-        <p:nvSpPr>
-          <p:cNvPr id="25" name="TextBox 24"/>
-          <p:cNvSpPr txBox="1"/>
-          <p:nvPr/>
-        </p:nvSpPr>
-        <p:spPr>
-          <a:xfrm>
-            <a:off x="5577840" y="4846320"/>
-            <a:ext cx="457200" cy="603504"/>
-          </a:xfrm>
-          <a:prstGeom prst="rect">
-            <a:avLst/>
-          </a:prstGeom>
-          <a:noFill/>
-        </p:spPr>
-        <p:txBody>
-          <a:bodyPr wrap="square" anchor="ctr" lIns="0" rIns="0" tIns="0" bIns="0">
-            <a:spAutoFit/>
-          </a:bodyPr>
-          <a:lstStyle/>
-          <a:p>
-            <a:pPr algn="l"/>
-            <a:r>
-              <a:rPr sz="1800" b="1">
-                <a:solidFill>
-                  <a:srgbClr val="0E7A4F"/>
-                </a:solidFill>
-                <a:latin typeface="微软雅黑"/>
-                <a:ea typeface="微软雅黑"/>
-                <a:cs typeface="微软雅黑"/>
-              </a:rPr>
-              <a:t>✓</a:t>
-            </a:r>
-          </a:p>
-        </p:txBody>
-      </p:sp>
-      <p:sp>
-        <p:nvSpPr>
-          <p:cNvPr id="26" name="Rounded Rectangle 25"/>
-          <p:cNvSpPr/>
-          <p:nvPr/>
-        </p:nvSpPr>
-        <p:spPr>
-          <a:xfrm>
-            <a:off x="640080" y="5532120"/>
-            <a:ext cx="5486400" cy="603504"/>
-          </a:xfrm>
-          <a:prstGeom prst="roundRect">
-            <a:avLst>
-              <a:gd name="adj" fmla="val 10000"/>
-            </a:avLst>
-          </a:prstGeom>
-          <a:solidFill>
-            <a:srgbClr val="FFFFFF"/>
-          </a:solidFill>
-          <a:ln>
-            <a:noFill/>
-          </a:ln>
-          <a:effectLst/>
-        </p:spPr>
-        <p:style>
-          <a:lnRef idx="1">
-            <a:schemeClr val="accent1"/>
-          </a:lnRef>
-          <a:fillRef idx="3">
-            <a:schemeClr val="accent1"/>
-          </a:fillRef>
-          <a:effectRef idx="2">
-            <a:schemeClr val="accent1"/>
-          </a:effectRef>
-          <a:fontRef idx="minor">
-            <a:schemeClr val="lt1"/>
-          </a:fontRef>
-        </p:style>
-        <p:txBody>
-          <a:bodyPr rtlCol="0" anchor="ctr"/>
-          <a:lstStyle/>
-          <a:p>
-            <a:pPr algn="ctr"/>
-          </a:p>
-        </p:txBody>
-      </p:sp>
-      <p:sp>
-        <p:nvSpPr>
-          <p:cNvPr id="27" name="TextBox 26"/>
-          <p:cNvSpPr txBox="1"/>
-          <p:nvPr/>
-        </p:nvSpPr>
-        <p:spPr>
-          <a:xfrm>
-            <a:off x="914400" y="5532120"/>
-            <a:ext cx="2194560" cy="603504"/>
-          </a:xfrm>
-          <a:prstGeom prst="rect">
-            <a:avLst/>
-          </a:prstGeom>
-          <a:noFill/>
-        </p:spPr>
-        <p:txBody>
-          <a:bodyPr wrap="square" anchor="ctr" lIns="0" rIns="0" tIns="0" bIns="0">
-            <a:spAutoFit/>
-          </a:bodyPr>
-          <a:lstStyle/>
-          <a:p>
-            <a:pPr algn="l"/>
-            <a:r>
-              <a:rPr sz="1400" b="1">
-                <a:solidFill>
-                  <a:srgbClr val="1A2332"/>
-                </a:solidFill>
-                <a:latin typeface="微软雅黑"/>
-                <a:ea typeface="微软雅黑"/>
-                <a:cs typeface="微软雅黑"/>
-              </a:rPr>
-              <a:t>取消 + 回归（新增）</a:t>
-            </a:r>
-          </a:p>
-        </p:txBody>
-      </p:sp>
-      <p:sp>
-        <p:nvSpPr>
-          <p:cNvPr id="28" name="TextBox 27"/>
-          <p:cNvSpPr txBox="1"/>
-          <p:nvPr/>
-        </p:nvSpPr>
-        <p:spPr>
-          <a:xfrm>
-            <a:off x="3154680" y="5532120"/>
-            <a:ext cx="2468880" cy="603504"/>
-          </a:xfrm>
-          <a:prstGeom prst="rect">
-            <a:avLst/>
-          </a:prstGeom>
-          <a:noFill/>
-        </p:spPr>
-        <p:txBody>
-          <a:bodyPr wrap="square" anchor="ctr" lIns="0" rIns="0" tIns="0" bIns="0">
-            <a:spAutoFit/>
-          </a:bodyPr>
-          <a:lstStyle/>
-          <a:p>
-            <a:pPr algn="l"/>
-            <a:r>
-              <a:rPr sz="1150" b="0">
-                <a:solidFill>
-                  <a:srgbClr val="6B7A72"/>
-                </a:solidFill>
-                <a:latin typeface="微软雅黑"/>
-                <a:ea typeface="微软雅黑"/>
-                <a:cs typeface="微软雅黑"/>
-              </a:rPr>
-              <a:t>取消 0.33s 返回；泄露 0 / 误伤 0</a:t>
-            </a:r>
-          </a:p>
-        </p:txBody>
-      </p:sp>
-      <p:sp>
-        <p:nvSpPr>
-          <p:cNvPr id="29" name="TextBox 28"/>
-          <p:cNvSpPr txBox="1"/>
-          <p:nvPr/>
-        </p:nvSpPr>
-        <p:spPr>
-          <a:xfrm>
-            <a:off x="5577840" y="5532120"/>
-            <a:ext cx="457200" cy="603504"/>
-          </a:xfrm>
-          <a:prstGeom prst="rect">
-            <a:avLst/>
-          </a:prstGeom>
-          <a:noFill/>
-        </p:spPr>
-        <p:txBody>
-          <a:bodyPr wrap="square" anchor="ctr" lIns="0" rIns="0" tIns="0" bIns="0">
-            <a:spAutoFit/>
-          </a:bodyPr>
-          <a:lstStyle/>
-          <a:p>
-            <a:pPr algn="l"/>
-            <a:r>
-              <a:rPr sz="1800" b="1">
-                <a:solidFill>
-                  <a:srgbClr val="0E7A4F"/>
-                </a:solidFill>
-                <a:latin typeface="微软雅黑"/>
-                <a:ea typeface="微软雅黑"/>
-                <a:cs typeface="微软雅黑"/>
-              </a:rPr>
-              <a:t>✓</a:t>
-            </a:r>
-          </a:p>
-        </p:txBody>
-      </p:sp>
-      <p:sp>
-        <p:nvSpPr>
-          <p:cNvPr id="30" name="Rounded Rectangle 29"/>
-          <p:cNvSpPr/>
-          <p:nvPr/>
-        </p:nvSpPr>
-        <p:spPr>
-          <a:xfrm>
-            <a:off x="6537960" y="1737360"/>
-            <a:ext cx="4983480" cy="4206240"/>
-          </a:xfrm>
-          <a:prstGeom prst="roundRect">
-            <a:avLst>
-              <a:gd name="adj" fmla="val 5000"/>
-            </a:avLst>
-          </a:prstGeom>
-          <a:solidFill>
-            <a:srgbClr val="0A5C3B"/>
-          </a:solidFill>
-          <a:ln>
-            <a:noFill/>
-          </a:ln>
-          <a:effectLst/>
-          <a:effectLst>
-            <a:outerShdw blurRad="101600" dist="25400" dir="5400000" rotWithShape="0">
-              <a:srgbClr val="0B2A1E">
-                <a:alpha val="14000"/>
-              </a:srgbClr>
-            </a:outerShdw>
-          </a:effectLst>
-        </p:spPr>
-        <p:style>
-          <a:lnRef idx="1">
-            <a:schemeClr val="accent1"/>
-          </a:lnRef>
-          <a:fillRef idx="3">
-            <a:schemeClr val="accent1"/>
-          </a:fillRef>
-          <a:effectRef idx="2">
-            <a:schemeClr val="accent1"/>
-          </a:effectRef>
-          <a:fontRef idx="minor">
-            <a:schemeClr val="lt1"/>
-          </a:fontRef>
-        </p:style>
-        <p:txBody>
-          <a:bodyPr rtlCol="0" anchor="ctr"/>
-          <a:lstStyle/>
-          <a:p>
-            <a:pPr algn="ctr"/>
-          </a:p>
-        </p:txBody>
-      </p:sp>
-      <p:sp>
-        <p:nvSpPr>
-          <p:cNvPr id="31" name="TextBox 30"/>
-          <p:cNvSpPr txBox="1"/>
-          <p:nvPr/>
-        </p:nvSpPr>
-        <p:spPr>
-          <a:xfrm>
-            <a:off x="6812280" y="2057400"/>
-            <a:ext cx="4434840" cy="914400"/>
-          </a:xfrm>
-          <a:prstGeom prst="rect">
-            <a:avLst/>
-          </a:prstGeom>
-          <a:noFill/>
-        </p:spPr>
-        <p:txBody>
-          <a:bodyPr wrap="square" anchor="ctr" lIns="0" rIns="0" tIns="0" bIns="0">
-            <a:spAutoFit/>
-          </a:bodyPr>
-          <a:lstStyle/>
-          <a:p>
-            <a:pPr algn="ctr"/>
-            <a:r>
-              <a:rPr sz="5200" b="1">
-                <a:solidFill>
-                  <a:srgbClr val="FFFFFF"/>
-                </a:solidFill>
-                <a:latin typeface="微软雅黑"/>
-                <a:ea typeface="微软雅黑"/>
-                <a:cs typeface="微软雅黑"/>
-              </a:rPr>
-              <a:t>1 个 exe</a:t>
-            </a:r>
-          </a:p>
-        </p:txBody>
-      </p:sp>
-      <p:sp>
-        <p:nvSpPr>
-          <p:cNvPr id="32" name="TextBox 31"/>
-          <p:cNvSpPr txBox="1"/>
-          <p:nvPr/>
-        </p:nvSpPr>
-        <p:spPr>
-          <a:xfrm>
-            <a:off x="6812280" y="3063240"/>
-            <a:ext cx="4434840" cy="457200"/>
-          </a:xfrm>
-          <a:prstGeom prst="rect">
-            <a:avLst/>
-          </a:prstGeom>
-          <a:noFill/>
-        </p:spPr>
-        <p:txBody>
-          <a:bodyPr wrap="square" anchor="t" lIns="0" rIns="0" tIns="0" bIns="0">
-            <a:spAutoFit/>
-          </a:bodyPr>
-          <a:lstStyle/>
-          <a:p>
-            <a:pPr algn="ctr"/>
-            <a:r>
-              <a:rPr sz="1500" b="1">
-                <a:solidFill>
-                  <a:srgbClr val="8FD3B4"/>
-                </a:solidFill>
-                <a:latin typeface="微软雅黑"/>
-                <a:ea typeface="微软雅黑"/>
-                <a:cs typeface="微软雅黑"/>
-              </a:rPr>
-              <a:t>免安装 · 双击即用 · 无需脚本</a:t>
-            </a:r>
-          </a:p>
-        </p:txBody>
-      </p:sp>
-      <p:sp>
-        <p:nvSpPr>
-          <p:cNvPr id="33" name="Rectangle 32"/>
-          <p:cNvSpPr/>
-          <p:nvPr/>
-        </p:nvSpPr>
-        <p:spPr>
-          <a:xfrm>
-            <a:off x="6949440" y="3611880"/>
-            <a:ext cx="4160520" cy="18288"/>
-          </a:xfrm>
-          <a:prstGeom prst="rect">
-            <a:avLst/>
-          </a:prstGeom>
-          <a:solidFill>
-            <a:srgbClr val="2E6B50"/>
-          </a:solidFill>
-          <a:ln>
-            <a:noFill/>
-          </a:ln>
-          <a:effectLst/>
-        </p:spPr>
-        <p:style>
-          <a:lnRef idx="1">
-            <a:schemeClr val="accent1"/>
-          </a:lnRef>
-          <a:fillRef idx="3">
-            <a:schemeClr val="accent1"/>
-          </a:fillRef>
-          <a:effectRef idx="2">
-            <a:schemeClr val="accent1"/>
-          </a:effectRef>
-          <a:fontRef idx="minor">
-            <a:schemeClr val="lt1"/>
-          </a:fontRef>
-        </p:style>
-        <p:txBody>
-          <a:bodyPr rtlCol="0" anchor="ctr"/>
-          <a:lstStyle/>
-          <a:p>
-            <a:pPr algn="ctr"/>
-          </a:p>
-        </p:txBody>
-      </p:sp>
-      <p:sp>
-        <p:nvSpPr>
-          <p:cNvPr id="34" name="TextBox 33"/>
-          <p:cNvSpPr txBox="1"/>
-          <p:nvPr/>
-        </p:nvSpPr>
-        <p:spPr>
-          <a:xfrm>
-            <a:off x="6812280" y="3794760"/>
-            <a:ext cx="4434840" cy="2011680"/>
-          </a:xfrm>
-          <a:prstGeom prst="rect">
-            <a:avLst/>
-          </a:prstGeom>
-          <a:noFill/>
-        </p:spPr>
-        <p:txBody>
-          <a:bodyPr wrap="square" anchor="t" lIns="0" rIns="0" tIns="0" bIns="0">
-            <a:spAutoFit/>
-          </a:bodyPr>
-          <a:lstStyle/>
-          <a:p>
-            <a:pPr algn="l">
-              <a:lnSpc>
-                <a:spcPct val="110000"/>
-              </a:lnSpc>
-              <a:spcAft>
-                <a:spcPts val="800"/>
-              </a:spcAft>
-            </a:pPr>
-            <a:r>
-              <a:rPr sz="1300" b="1">
-                <a:solidFill>
-                  <a:srgbClr val="F0B45C"/>
-                </a:solidFill>
-                <a:latin typeface="微软雅黑"/>
-                <a:ea typeface="微软雅黑"/>
-                <a:cs typeface="微软雅黑"/>
-              </a:rPr>
-              <a:t>▪  </a:t>
-            </a:r>
-            <a:r>
-              <a:rPr sz="1300" b="0">
-                <a:solidFill>
-                  <a:srgbClr val="EAF5EF"/>
-                </a:solidFill>
-                <a:latin typeface="微软雅黑"/>
-                <a:ea typeface="微软雅黑"/>
-                <a:cs typeface="微软雅黑"/>
-              </a:rPr>
-              <a:t>PySide6 + LangChain 全依赖自包含（PyInstaller onefile）</a:t>
-            </a:r>
-          </a:p>
-          <a:p>
-            <a:pPr algn="l">
-              <a:lnSpc>
-                <a:spcPct val="110000"/>
-              </a:lnSpc>
-              <a:spcAft>
-                <a:spcPts val="800"/>
-              </a:spcAft>
-            </a:pPr>
-            <a:r>
-              <a:rPr sz="1300" b="1">
-                <a:solidFill>
-                  <a:srgbClr val="F0B45C"/>
-                </a:solidFill>
-                <a:latin typeface="微软雅黑"/>
-                <a:ea typeface="微软雅黑"/>
-                <a:cs typeface="微软雅黑"/>
-              </a:rPr>
-              <a:t>▪  </a:t>
-            </a:r>
-            <a:r>
-              <a:rPr sz="1300" b="0">
-                <a:solidFill>
-                  <a:srgbClr val="EAF5EF"/>
-                </a:solidFill>
-                <a:latin typeface="微软雅黑"/>
-                <a:ea typeface="微软雅黑"/>
-                <a:cs typeface="微软雅黑"/>
-              </a:rPr>
-              <a:t>单文件双击即用，无需安装与脚本</a:t>
-            </a:r>
-          </a:p>
-          <a:p>
-            <a:pPr algn="l">
-              <a:lnSpc>
-                <a:spcPct val="110000"/>
-              </a:lnSpc>
-              <a:spcAft>
-                <a:spcPts val="800"/>
-              </a:spcAft>
-            </a:pPr>
-            <a:r>
-              <a:rPr sz="1300" b="1">
-                <a:solidFill>
-                  <a:srgbClr val="F0B45C"/>
-                </a:solidFill>
-                <a:latin typeface="微软雅黑"/>
-                <a:ea typeface="微软雅黑"/>
-                <a:cs typeface="微软雅黑"/>
-              </a:rPr>
-              <a:t>▪  </a:t>
-            </a:r>
-            <a:r>
-              <a:rPr sz="1300" b="0">
-                <a:solidFill>
-                  <a:srgbClr val="EAF5EF"/>
-                </a:solidFill>
-                <a:latin typeface="微软雅黑"/>
-                <a:ea typeface="微软雅黑"/>
-                <a:cs typeface="微软雅黑"/>
-              </a:rPr>
-              <a:t>配置/会话/审计/向量库写在 exe 同目录，删文件即卸载</a:t>
-            </a:r>
-          </a:p>
-          <a:p>
-            <a:pPr algn="l">
-              <a:lnSpc>
-                <a:spcPct val="110000"/>
-              </a:lnSpc>
-              <a:spcAft>
-                <a:spcPts val="800"/>
-              </a:spcAft>
-            </a:pPr>
-            <a:r>
-              <a:rPr sz="1300" b="1">
-                <a:solidFill>
-                  <a:srgbClr val="F0B45C"/>
-                </a:solidFill>
-                <a:latin typeface="微软雅黑"/>
-                <a:ea typeface="微软雅黑"/>
-                <a:cs typeface="微软雅黑"/>
-              </a:rPr>
-              <a:t>▪  </a:t>
-            </a:r>
-            <a:r>
-              <a:rPr sz="1300" b="0">
-                <a:solidFill>
-                  <a:srgbClr val="EAF5EF"/>
-                </a:solidFill>
-                <a:latin typeface="微软雅黑"/>
-                <a:ea typeface="微软雅黑"/>
-                <a:cs typeface="微软雅黑"/>
-              </a:rPr>
-              <a:t>随附《使用说明》：本地/云端算力两步接入</a:t>
-            </a:r>
-          </a:p>
-        </p:txBody>
-      </p:sp>
-      <p:sp>
-        <p:nvSpPr>
-          <p:cNvPr id="35" name="TextBox 34"/>
-          <p:cNvSpPr txBox="1"/>
-          <p:nvPr/>
-        </p:nvSpPr>
-        <p:spPr>
-          <a:xfrm>
-            <a:off x="11185855" y="6291072"/>
-            <a:ext cx="548640" cy="320040"/>
-          </a:xfrm>
-          <a:prstGeom prst="rect">
-            <a:avLst/>
-          </a:prstGeom>
-          <a:noFill/>
-        </p:spPr>
-        <p:txBody>
-          <a:bodyPr wrap="square" anchor="t" lIns="0" rIns="0" tIns="0" bIns="0">
-            <a:spAutoFit/>
-          </a:bodyPr>
-          <a:lstStyle/>
-          <a:p>
-            <a:pPr algn="r"/>
-            <a:r>
-              <a:rPr sz="1100" b="0">
-                <a:solidFill>
-                  <a:srgbClr val="6B7A72"/>
-                </a:solidFill>
-                <a:latin typeface="微软雅黑"/>
-                <a:ea typeface="微软雅黑"/>
-                <a:cs typeface="微软雅黑"/>
-              </a:rPr>
               <a:t>18</a:t>
             </a:r>
           </a:p>
@@ -12237,7 +12130,7 @@
             <a:avLst/>
           </a:prstGeom>
           <a:solidFill>
-            <a:srgbClr val="0B3D2E"/>
+            <a:srgbClr val="F4F7F5"/>
           </a:solidFill>
           <a:ln>
             <a:noFill/>
@@ -12274,8 +12167,45 @@
         </p:nvSpPr>
         <p:spPr>
           <a:xfrm>
+            <a:off x="640080" y="502920"/>
+            <a:ext cx="7315200" cy="274320"/>
+          </a:xfrm>
+          <a:prstGeom prst="rect">
+            <a:avLst/>
+          </a:prstGeom>
+          <a:noFill/>
+        </p:spPr>
+        <p:txBody>
+          <a:bodyPr wrap="square" anchor="t" lIns="0" rIns="0" tIns="0" bIns="0">
+            <a:spAutoFit/>
+          </a:bodyPr>
+          <a:lstStyle/>
+          <a:p>
+            <a:pPr algn="l"/>
+            <a:r>
+              <a:rPr sz="1300" b="1">
+                <a:solidFill>
+                  <a:srgbClr val="0E7A4F"/>
+                </a:solidFill>
+                <a:latin typeface="微软雅黑"/>
+                <a:ea typeface="微软雅黑"/>
+                <a:cs typeface="微软雅黑"/>
+              </a:rPr>
+              <a:t>质量与交付</a:t>
+            </a:r>
+          </a:p>
+        </p:txBody>
+      </p:sp>
+      <p:sp>
+        <p:nvSpPr>
+          <p:cNvPr id="4" name="TextBox 3"/>
+          <p:cNvSpPr txBox="1"/>
+          <p:nvPr/>
+        </p:nvSpPr>
+        <p:spPr>
+          <a:xfrm>
             <a:off x="640080" y="822960"/>
-            <a:ext cx="10911535" cy="365760"/>
+            <a:ext cx="10911535" cy="731520"/>
           </a:xfrm>
           <a:prstGeom prst="rect">
             <a:avLst/>
@@ -12290,436 +12220,1135 @@
           <a:p>
             <a:pPr algn="l"/>
             <a:r>
+              <a:rPr sz="3000" b="1">
+                <a:solidFill>
+                  <a:srgbClr val="1A2332"/>
+                </a:solidFill>
+                <a:latin typeface="微软雅黑"/>
+                <a:ea typeface="微软雅黑"/>
+                <a:cs typeface="微软雅黑"/>
+              </a:rPr>
+              <a:t>全量回归通过 · 免安装单文件 exe 就绪</a:t>
+            </a:r>
+          </a:p>
+        </p:txBody>
+      </p:sp>
+      <p:sp>
+        <p:nvSpPr>
+          <p:cNvPr id="5" name="TextBox 4"/>
+          <p:cNvSpPr txBox="1"/>
+          <p:nvPr/>
+        </p:nvSpPr>
+        <p:spPr>
+          <a:xfrm>
+            <a:off x="640080" y="1572768"/>
+            <a:ext cx="5669280" cy="502920"/>
+          </a:xfrm>
+          <a:prstGeom prst="rect">
+            <a:avLst/>
+          </a:prstGeom>
+          <a:noFill/>
+        </p:spPr>
+        <p:txBody>
+          <a:bodyPr wrap="square" anchor="t" lIns="0" rIns="0" tIns="0" bIns="0">
+            <a:spAutoFit/>
+          </a:bodyPr>
+          <a:lstStyle/>
+          <a:p>
+            <a:pPr algn="l"/>
+            <a:r>
+              <a:rPr sz="1450" b="1">
+                <a:solidFill>
+                  <a:srgbClr val="0E7A4F"/>
+                </a:solidFill>
+                <a:latin typeface="微软雅黑"/>
+                <a:ea typeface="微软雅黑"/>
+                <a:cs typeface="微软雅黑"/>
+              </a:rPr>
+              <a:t>8 个测试套件 · 全部通过（含攻防评测 9 项实验）</a:t>
+            </a:r>
+          </a:p>
+        </p:txBody>
+      </p:sp>
+      <p:sp>
+        <p:nvSpPr>
+          <p:cNvPr id="6" name="Rounded Rectangle 5"/>
+          <p:cNvSpPr/>
+          <p:nvPr/>
+        </p:nvSpPr>
+        <p:spPr>
+          <a:xfrm>
+            <a:off x="640080" y="2103120"/>
+            <a:ext cx="5486400" cy="603504"/>
+          </a:xfrm>
+          <a:prstGeom prst="roundRect">
+            <a:avLst>
+              <a:gd name="adj" fmla="val 10000"/>
+            </a:avLst>
+          </a:prstGeom>
+          <a:solidFill>
+            <a:srgbClr val="FFFFFF"/>
+          </a:solidFill>
+          <a:ln>
+            <a:noFill/>
+          </a:ln>
+          <a:effectLst/>
+        </p:spPr>
+        <p:style>
+          <a:lnRef idx="1">
+            <a:schemeClr val="accent1"/>
+          </a:lnRef>
+          <a:fillRef idx="3">
+            <a:schemeClr val="accent1"/>
+          </a:fillRef>
+          <a:effectRef idx="2">
+            <a:schemeClr val="accent1"/>
+          </a:effectRef>
+          <a:fontRef idx="minor">
+            <a:schemeClr val="lt1"/>
+          </a:fontRef>
+        </p:style>
+        <p:txBody>
+          <a:bodyPr rtlCol="0" anchor="ctr"/>
+          <a:lstStyle/>
+          <a:p>
+            <a:pPr algn="ctr"/>
+          </a:p>
+        </p:txBody>
+      </p:sp>
+      <p:sp>
+        <p:nvSpPr>
+          <p:cNvPr id="7" name="TextBox 6"/>
+          <p:cNvSpPr txBox="1"/>
+          <p:nvPr/>
+        </p:nvSpPr>
+        <p:spPr>
+          <a:xfrm>
+            <a:off x="914400" y="2103120"/>
+            <a:ext cx="2194560" cy="603504"/>
+          </a:xfrm>
+          <a:prstGeom prst="rect">
+            <a:avLst/>
+          </a:prstGeom>
+          <a:noFill/>
+        </p:spPr>
+        <p:txBody>
+          <a:bodyPr wrap="square" anchor="ctr" lIns="0" rIns="0" tIns="0" bIns="0">
+            <a:spAutoFit/>
+          </a:bodyPr>
+          <a:lstStyle/>
+          <a:p>
+            <a:pPr algn="l"/>
+            <a:r>
               <a:rPr sz="1400" b="1">
                 <a:solidFill>
+                  <a:srgbClr val="1A2332"/>
+                </a:solidFill>
+                <a:latin typeface="微软雅黑"/>
+                <a:ea typeface="微软雅黑"/>
+                <a:cs typeface="微软雅黑"/>
+              </a:rPr>
+              <a:t>隐私引擎</a:t>
+            </a:r>
+          </a:p>
+        </p:txBody>
+      </p:sp>
+      <p:sp>
+        <p:nvSpPr>
+          <p:cNvPr id="8" name="TextBox 7"/>
+          <p:cNvSpPr txBox="1"/>
+          <p:nvPr/>
+        </p:nvSpPr>
+        <p:spPr>
+          <a:xfrm>
+            <a:off x="3154680" y="2103120"/>
+            <a:ext cx="2468880" cy="603504"/>
+          </a:xfrm>
+          <a:prstGeom prst="rect">
+            <a:avLst/>
+          </a:prstGeom>
+          <a:noFill/>
+        </p:spPr>
+        <p:txBody>
+          <a:bodyPr wrap="square" anchor="ctr" lIns="0" rIns="0" tIns="0" bIns="0">
+            <a:spAutoFit/>
+          </a:bodyPr>
+          <a:lstStyle/>
+          <a:p>
+            <a:pPr algn="l"/>
+            <a:r>
+              <a:rPr sz="1150" b="0">
+                <a:solidFill>
+                  <a:srgbClr val="6B7A72"/>
+                </a:solidFill>
+                <a:latin typeface="微软雅黑"/>
+                <a:ea typeface="微软雅黑"/>
+                <a:cs typeface="微软雅黑"/>
+              </a:rPr>
+              <a:t>实体/脱敏/还原/nonce/strict</a:t>
+            </a:r>
+          </a:p>
+        </p:txBody>
+      </p:sp>
+      <p:sp>
+        <p:nvSpPr>
+          <p:cNvPr id="9" name="TextBox 8"/>
+          <p:cNvSpPr txBox="1"/>
+          <p:nvPr/>
+        </p:nvSpPr>
+        <p:spPr>
+          <a:xfrm>
+            <a:off x="5577840" y="2103120"/>
+            <a:ext cx="457200" cy="603504"/>
+          </a:xfrm>
+          <a:prstGeom prst="rect">
+            <a:avLst/>
+          </a:prstGeom>
+          <a:noFill/>
+        </p:spPr>
+        <p:txBody>
+          <a:bodyPr wrap="square" anchor="ctr" lIns="0" rIns="0" tIns="0" bIns="0">
+            <a:spAutoFit/>
+          </a:bodyPr>
+          <a:lstStyle/>
+          <a:p>
+            <a:pPr algn="l"/>
+            <a:r>
+              <a:rPr sz="1800" b="1">
+                <a:solidFill>
+                  <a:srgbClr val="0E7A4F"/>
+                </a:solidFill>
+                <a:latin typeface="微软雅黑"/>
+                <a:ea typeface="微软雅黑"/>
+                <a:cs typeface="微软雅黑"/>
+              </a:rPr>
+              <a:t>✓</a:t>
+            </a:r>
+          </a:p>
+        </p:txBody>
+      </p:sp>
+      <p:sp>
+        <p:nvSpPr>
+          <p:cNvPr id="10" name="Rounded Rectangle 9"/>
+          <p:cNvSpPr/>
+          <p:nvPr/>
+        </p:nvSpPr>
+        <p:spPr>
+          <a:xfrm>
+            <a:off x="640080" y="2788920"/>
+            <a:ext cx="5486400" cy="603504"/>
+          </a:xfrm>
+          <a:prstGeom prst="roundRect">
+            <a:avLst>
+              <a:gd name="adj" fmla="val 10000"/>
+            </a:avLst>
+          </a:prstGeom>
+          <a:solidFill>
+            <a:srgbClr val="FFFFFF"/>
+          </a:solidFill>
+          <a:ln>
+            <a:noFill/>
+          </a:ln>
+          <a:effectLst/>
+        </p:spPr>
+        <p:style>
+          <a:lnRef idx="1">
+            <a:schemeClr val="accent1"/>
+          </a:lnRef>
+          <a:fillRef idx="3">
+            <a:schemeClr val="accent1"/>
+          </a:fillRef>
+          <a:effectRef idx="2">
+            <a:schemeClr val="accent1"/>
+          </a:effectRef>
+          <a:fontRef idx="minor">
+            <a:schemeClr val="lt1"/>
+          </a:fontRef>
+        </p:style>
+        <p:txBody>
+          <a:bodyPr rtlCol="0" anchor="ctr"/>
+          <a:lstStyle/>
+          <a:p>
+            <a:pPr algn="ctr"/>
+          </a:p>
+        </p:txBody>
+      </p:sp>
+      <p:sp>
+        <p:nvSpPr>
+          <p:cNvPr id="11" name="TextBox 10"/>
+          <p:cNvSpPr txBox="1"/>
+          <p:nvPr/>
+        </p:nvSpPr>
+        <p:spPr>
+          <a:xfrm>
+            <a:off x="914400" y="2788920"/>
+            <a:ext cx="2194560" cy="603504"/>
+          </a:xfrm>
+          <a:prstGeom prst="rect">
+            <a:avLst/>
+          </a:prstGeom>
+          <a:noFill/>
+        </p:spPr>
+        <p:txBody>
+          <a:bodyPr wrap="square" anchor="ctr" lIns="0" rIns="0" tIns="0" bIns="0">
+            <a:spAutoFit/>
+          </a:bodyPr>
+          <a:lstStyle/>
+          <a:p>
+            <a:pPr algn="l"/>
+            <a:r>
+              <a:rPr sz="1400" b="1">
+                <a:solidFill>
+                  <a:srgbClr val="1A2332"/>
+                </a:solidFill>
+                <a:latin typeface="微软雅黑"/>
+                <a:ea typeface="微软雅黑"/>
+                <a:cs typeface="微软雅黑"/>
+              </a:rPr>
+              <a:t>审计黑匣子</a:t>
+            </a:r>
+          </a:p>
+        </p:txBody>
+      </p:sp>
+      <p:sp>
+        <p:nvSpPr>
+          <p:cNvPr id="12" name="TextBox 11"/>
+          <p:cNvSpPr txBox="1"/>
+          <p:nvPr/>
+        </p:nvSpPr>
+        <p:spPr>
+          <a:xfrm>
+            <a:off x="3154680" y="2788920"/>
+            <a:ext cx="2468880" cy="603504"/>
+          </a:xfrm>
+          <a:prstGeom prst="rect">
+            <a:avLst/>
+          </a:prstGeom>
+          <a:noFill/>
+        </p:spPr>
+        <p:txBody>
+          <a:bodyPr wrap="square" anchor="ctr" lIns="0" rIns="0" tIns="0" bIns="0">
+            <a:spAutoFit/>
+          </a:bodyPr>
+          <a:lstStyle/>
+          <a:p>
+            <a:pPr algn="l"/>
+            <a:r>
+              <a:rPr sz="1150" b="0">
+                <a:solidFill>
+                  <a:srgbClr val="6B7A72"/>
+                </a:solidFill>
+                <a:latin typeface="微软雅黑"/>
+                <a:ea typeface="微软雅黑"/>
+                <a:cs typeface="微软雅黑"/>
+              </a:rPr>
+              <a:t>哈希链/防篡改/一致性 14/14</a:t>
+            </a:r>
+          </a:p>
+        </p:txBody>
+      </p:sp>
+      <p:sp>
+        <p:nvSpPr>
+          <p:cNvPr id="13" name="TextBox 12"/>
+          <p:cNvSpPr txBox="1"/>
+          <p:nvPr/>
+        </p:nvSpPr>
+        <p:spPr>
+          <a:xfrm>
+            <a:off x="5577840" y="2788920"/>
+            <a:ext cx="457200" cy="603504"/>
+          </a:xfrm>
+          <a:prstGeom prst="rect">
+            <a:avLst/>
+          </a:prstGeom>
+          <a:noFill/>
+        </p:spPr>
+        <p:txBody>
+          <a:bodyPr wrap="square" anchor="ctr" lIns="0" rIns="0" tIns="0" bIns="0">
+            <a:spAutoFit/>
+          </a:bodyPr>
+          <a:lstStyle/>
+          <a:p>
+            <a:pPr algn="l"/>
+            <a:r>
+              <a:rPr sz="1800" b="1">
+                <a:solidFill>
+                  <a:srgbClr val="0E7A4F"/>
+                </a:solidFill>
+                <a:latin typeface="微软雅黑"/>
+                <a:ea typeface="微软雅黑"/>
+                <a:cs typeface="微软雅黑"/>
+              </a:rPr>
+              <a:t>✓</a:t>
+            </a:r>
+          </a:p>
+        </p:txBody>
+      </p:sp>
+      <p:sp>
+        <p:nvSpPr>
+          <p:cNvPr id="14" name="Rounded Rectangle 13"/>
+          <p:cNvSpPr/>
+          <p:nvPr/>
+        </p:nvSpPr>
+        <p:spPr>
+          <a:xfrm>
+            <a:off x="640080" y="3474720"/>
+            <a:ext cx="5486400" cy="603504"/>
+          </a:xfrm>
+          <a:prstGeom prst="roundRect">
+            <a:avLst>
+              <a:gd name="adj" fmla="val 10000"/>
+            </a:avLst>
+          </a:prstGeom>
+          <a:solidFill>
+            <a:srgbClr val="FFFFFF"/>
+          </a:solidFill>
+          <a:ln>
+            <a:noFill/>
+          </a:ln>
+          <a:effectLst/>
+        </p:spPr>
+        <p:style>
+          <a:lnRef idx="1">
+            <a:schemeClr val="accent1"/>
+          </a:lnRef>
+          <a:fillRef idx="3">
+            <a:schemeClr val="accent1"/>
+          </a:fillRef>
+          <a:effectRef idx="2">
+            <a:schemeClr val="accent1"/>
+          </a:effectRef>
+          <a:fontRef idx="minor">
+            <a:schemeClr val="lt1"/>
+          </a:fontRef>
+        </p:style>
+        <p:txBody>
+          <a:bodyPr rtlCol="0" anchor="ctr"/>
+          <a:lstStyle/>
+          <a:p>
+            <a:pPr algn="ctr"/>
+          </a:p>
+        </p:txBody>
+      </p:sp>
+      <p:sp>
+        <p:nvSpPr>
+          <p:cNvPr id="15" name="TextBox 14"/>
+          <p:cNvSpPr txBox="1"/>
+          <p:nvPr/>
+        </p:nvSpPr>
+        <p:spPr>
+          <a:xfrm>
+            <a:off x="914400" y="3474720"/>
+            <a:ext cx="2194560" cy="603504"/>
+          </a:xfrm>
+          <a:prstGeom prst="rect">
+            <a:avLst/>
+          </a:prstGeom>
+          <a:noFill/>
+        </p:spPr>
+        <p:txBody>
+          <a:bodyPr wrap="square" anchor="ctr" lIns="0" rIns="0" tIns="0" bIns="0">
+            <a:spAutoFit/>
+          </a:bodyPr>
+          <a:lstStyle/>
+          <a:p>
+            <a:pPr algn="l"/>
+            <a:r>
+              <a:rPr sz="1400" b="1">
+                <a:solidFill>
+                  <a:srgbClr val="1A2332"/>
+                </a:solidFill>
+                <a:latin typeface="微软雅黑"/>
+                <a:ea typeface="微软雅黑"/>
+                <a:cs typeface="微软雅黑"/>
+              </a:rPr>
+              <a:t>记忆管理</a:t>
+            </a:r>
+          </a:p>
+        </p:txBody>
+      </p:sp>
+      <p:sp>
+        <p:nvSpPr>
+          <p:cNvPr id="16" name="TextBox 15"/>
+          <p:cNvSpPr txBox="1"/>
+          <p:nvPr/>
+        </p:nvSpPr>
+        <p:spPr>
+          <a:xfrm>
+            <a:off x="3154680" y="3474720"/>
+            <a:ext cx="2468880" cy="603504"/>
+          </a:xfrm>
+          <a:prstGeom prst="rect">
+            <a:avLst/>
+          </a:prstGeom>
+          <a:noFill/>
+        </p:spPr>
+        <p:txBody>
+          <a:bodyPr wrap="square" anchor="ctr" lIns="0" rIns="0" tIns="0" bIns="0">
+            <a:spAutoFit/>
+          </a:bodyPr>
+          <a:lstStyle/>
+          <a:p>
+            <a:pPr algn="l"/>
+            <a:r>
+              <a:rPr sz="1150" b="0">
+                <a:solidFill>
+                  <a:srgbClr val="6B7A72"/>
+                </a:solidFill>
+                <a:latin typeface="微软雅黑"/>
+                <a:ea typeface="微软雅黑"/>
+                <a:cs typeface="微软雅黑"/>
+              </a:rPr>
+              <a:t>摘要/跨轮还原/序列化 6/6</a:t>
+            </a:r>
+          </a:p>
+        </p:txBody>
+      </p:sp>
+      <p:sp>
+        <p:nvSpPr>
+          <p:cNvPr id="17" name="TextBox 16"/>
+          <p:cNvSpPr txBox="1"/>
+          <p:nvPr/>
+        </p:nvSpPr>
+        <p:spPr>
+          <a:xfrm>
+            <a:off x="5577840" y="3474720"/>
+            <a:ext cx="457200" cy="603504"/>
+          </a:xfrm>
+          <a:prstGeom prst="rect">
+            <a:avLst/>
+          </a:prstGeom>
+          <a:noFill/>
+        </p:spPr>
+        <p:txBody>
+          <a:bodyPr wrap="square" anchor="ctr" lIns="0" rIns="0" tIns="0" bIns="0">
+            <a:spAutoFit/>
+          </a:bodyPr>
+          <a:lstStyle/>
+          <a:p>
+            <a:pPr algn="l"/>
+            <a:r>
+              <a:rPr sz="1800" b="1">
+                <a:solidFill>
+                  <a:srgbClr val="0E7A4F"/>
+                </a:solidFill>
+                <a:latin typeface="微软雅黑"/>
+                <a:ea typeface="微软雅黑"/>
+                <a:cs typeface="微软雅黑"/>
+              </a:rPr>
+              <a:t>✓</a:t>
+            </a:r>
+          </a:p>
+        </p:txBody>
+      </p:sp>
+      <p:sp>
+        <p:nvSpPr>
+          <p:cNvPr id="18" name="Rounded Rectangle 17"/>
+          <p:cNvSpPr/>
+          <p:nvPr/>
+        </p:nvSpPr>
+        <p:spPr>
+          <a:xfrm>
+            <a:off x="640080" y="4160520"/>
+            <a:ext cx="5486400" cy="603504"/>
+          </a:xfrm>
+          <a:prstGeom prst="roundRect">
+            <a:avLst>
+              <a:gd name="adj" fmla="val 10000"/>
+            </a:avLst>
+          </a:prstGeom>
+          <a:solidFill>
+            <a:srgbClr val="FFFFFF"/>
+          </a:solidFill>
+          <a:ln>
+            <a:noFill/>
+          </a:ln>
+          <a:effectLst/>
+        </p:spPr>
+        <p:style>
+          <a:lnRef idx="1">
+            <a:schemeClr val="accent1"/>
+          </a:lnRef>
+          <a:fillRef idx="3">
+            <a:schemeClr val="accent1"/>
+          </a:fillRef>
+          <a:effectRef idx="2">
+            <a:schemeClr val="accent1"/>
+          </a:effectRef>
+          <a:fontRef idx="minor">
+            <a:schemeClr val="lt1"/>
+          </a:fontRef>
+        </p:style>
+        <p:txBody>
+          <a:bodyPr rtlCol="0" anchor="ctr"/>
+          <a:lstStyle/>
+          <a:p>
+            <a:pPr algn="ctr"/>
+          </a:p>
+        </p:txBody>
+      </p:sp>
+      <p:sp>
+        <p:nvSpPr>
+          <p:cNvPr id="19" name="TextBox 18"/>
+          <p:cNvSpPr txBox="1"/>
+          <p:nvPr/>
+        </p:nvSpPr>
+        <p:spPr>
+          <a:xfrm>
+            <a:off x="914400" y="4160520"/>
+            <a:ext cx="2194560" cy="603504"/>
+          </a:xfrm>
+          <a:prstGeom prst="rect">
+            <a:avLst/>
+          </a:prstGeom>
+          <a:noFill/>
+        </p:spPr>
+        <p:txBody>
+          <a:bodyPr wrap="square" anchor="ctr" lIns="0" rIns="0" tIns="0" bIns="0">
+            <a:spAutoFit/>
+          </a:bodyPr>
+          <a:lstStyle/>
+          <a:p>
+            <a:pPr algn="l"/>
+            <a:r>
+              <a:rPr sz="1400" b="1">
+                <a:solidFill>
+                  <a:srgbClr val="1A2332"/>
+                </a:solidFill>
+                <a:latin typeface="微软雅黑"/>
+                <a:ea typeface="微软雅黑"/>
+                <a:cs typeface="微软雅黑"/>
+              </a:rPr>
+              <a:t>工作流 + 知识库</a:t>
+            </a:r>
+          </a:p>
+        </p:txBody>
+      </p:sp>
+      <p:sp>
+        <p:nvSpPr>
+          <p:cNvPr id="20" name="TextBox 19"/>
+          <p:cNvSpPr txBox="1"/>
+          <p:nvPr/>
+        </p:nvSpPr>
+        <p:spPr>
+          <a:xfrm>
+            <a:off x="3154680" y="4160520"/>
+            <a:ext cx="2468880" cy="603504"/>
+          </a:xfrm>
+          <a:prstGeom prst="rect">
+            <a:avLst/>
+          </a:prstGeom>
+          <a:noFill/>
+        </p:spPr>
+        <p:txBody>
+          <a:bodyPr wrap="square" anchor="ctr" lIns="0" rIns="0" tIns="0" bIns="0">
+            <a:spAutoFit/>
+          </a:bodyPr>
+          <a:lstStyle/>
+          <a:p>
+            <a:pPr algn="l"/>
+            <a:r>
+              <a:rPr sz="1150" b="0">
+                <a:solidFill>
+                  <a:srgbClr val="6B7A72"/>
+                </a:solidFill>
+                <a:latin typeface="微软雅黑"/>
+                <a:ea typeface="微软雅黑"/>
+                <a:cs typeface="微软雅黑"/>
+              </a:rPr>
+              <a:t>执行/审批链/导出；入库检索零明文</a:t>
+            </a:r>
+          </a:p>
+        </p:txBody>
+      </p:sp>
+      <p:sp>
+        <p:nvSpPr>
+          <p:cNvPr id="21" name="TextBox 20"/>
+          <p:cNvSpPr txBox="1"/>
+          <p:nvPr/>
+        </p:nvSpPr>
+        <p:spPr>
+          <a:xfrm>
+            <a:off x="5577840" y="4160520"/>
+            <a:ext cx="457200" cy="603504"/>
+          </a:xfrm>
+          <a:prstGeom prst="rect">
+            <a:avLst/>
+          </a:prstGeom>
+          <a:noFill/>
+        </p:spPr>
+        <p:txBody>
+          <a:bodyPr wrap="square" anchor="ctr" lIns="0" rIns="0" tIns="0" bIns="0">
+            <a:spAutoFit/>
+          </a:bodyPr>
+          <a:lstStyle/>
+          <a:p>
+            <a:pPr algn="l"/>
+            <a:r>
+              <a:rPr sz="1800" b="1">
+                <a:solidFill>
+                  <a:srgbClr val="0E7A4F"/>
+                </a:solidFill>
+                <a:latin typeface="微软雅黑"/>
+                <a:ea typeface="微软雅黑"/>
+                <a:cs typeface="微软雅黑"/>
+              </a:rPr>
+              <a:t>✓</a:t>
+            </a:r>
+          </a:p>
+        </p:txBody>
+      </p:sp>
+      <p:sp>
+        <p:nvSpPr>
+          <p:cNvPr id="22" name="Rounded Rectangle 21"/>
+          <p:cNvSpPr/>
+          <p:nvPr/>
+        </p:nvSpPr>
+        <p:spPr>
+          <a:xfrm>
+            <a:off x="640080" y="4846320"/>
+            <a:ext cx="5486400" cy="603504"/>
+          </a:xfrm>
+          <a:prstGeom prst="roundRect">
+            <a:avLst>
+              <a:gd name="adj" fmla="val 10000"/>
+            </a:avLst>
+          </a:prstGeom>
+          <a:solidFill>
+            <a:srgbClr val="FFFFFF"/>
+          </a:solidFill>
+          <a:ln>
+            <a:noFill/>
+          </a:ln>
+          <a:effectLst/>
+        </p:spPr>
+        <p:style>
+          <a:lnRef idx="1">
+            <a:schemeClr val="accent1"/>
+          </a:lnRef>
+          <a:fillRef idx="3">
+            <a:schemeClr val="accent1"/>
+          </a:fillRef>
+          <a:effectRef idx="2">
+            <a:schemeClr val="accent1"/>
+          </a:effectRef>
+          <a:fontRef idx="minor">
+            <a:schemeClr val="lt1"/>
+          </a:fontRef>
+        </p:style>
+        <p:txBody>
+          <a:bodyPr rtlCol="0" anchor="ctr"/>
+          <a:lstStyle/>
+          <a:p>
+            <a:pPr algn="ctr"/>
+          </a:p>
+        </p:txBody>
+      </p:sp>
+      <p:sp>
+        <p:nvSpPr>
+          <p:cNvPr id="23" name="TextBox 22"/>
+          <p:cNvSpPr txBox="1"/>
+          <p:nvPr/>
+        </p:nvSpPr>
+        <p:spPr>
+          <a:xfrm>
+            <a:off x="914400" y="4846320"/>
+            <a:ext cx="2194560" cy="603504"/>
+          </a:xfrm>
+          <a:prstGeom prst="rect">
+            <a:avLst/>
+          </a:prstGeom>
+          <a:noFill/>
+        </p:spPr>
+        <p:txBody>
+          <a:bodyPr wrap="square" anchor="ctr" lIns="0" rIns="0" tIns="0" bIns="0">
+            <a:spAutoFit/>
+          </a:bodyPr>
+          <a:lstStyle/>
+          <a:p>
+            <a:pPr algn="l"/>
+            <a:r>
+              <a:rPr sz="1400" b="1">
+                <a:solidFill>
+                  <a:srgbClr val="1A2332"/>
+                </a:solidFill>
+                <a:latin typeface="微软雅黑"/>
+                <a:ea typeface="微软雅黑"/>
+                <a:cs typeface="微软雅黑"/>
+              </a:rPr>
+              <a:t>白名单（新增）</a:t>
+            </a:r>
+          </a:p>
+        </p:txBody>
+      </p:sp>
+      <p:sp>
+        <p:nvSpPr>
+          <p:cNvPr id="24" name="TextBox 23"/>
+          <p:cNvSpPr txBox="1"/>
+          <p:nvPr/>
+        </p:nvSpPr>
+        <p:spPr>
+          <a:xfrm>
+            <a:off x="3154680" y="4846320"/>
+            <a:ext cx="2468880" cy="603504"/>
+          </a:xfrm>
+          <a:prstGeom prst="rect">
+            <a:avLst/>
+          </a:prstGeom>
+          <a:noFill/>
+        </p:spPr>
+        <p:txBody>
+          <a:bodyPr wrap="square" anchor="ctr" lIns="0" rIns="0" tIns="0" bIns="0">
+            <a:spAutoFit/>
+          </a:bodyPr>
+          <a:lstStyle/>
+          <a:p>
+            <a:pPr algn="l"/>
+            <a:r>
+              <a:rPr sz="1150" b="0">
+                <a:solidFill>
+                  <a:srgbClr val="6B7A72"/>
+                </a:solidFill>
+                <a:latin typeface="微软雅黑"/>
+                <a:ea typeface="微软雅黑"/>
+                <a:cs typeface="微软雅黑"/>
+              </a:rPr>
+              <a:t>16 项高危入口全拦截</a:t>
+            </a:r>
+          </a:p>
+        </p:txBody>
+      </p:sp>
+      <p:sp>
+        <p:nvSpPr>
+          <p:cNvPr id="25" name="TextBox 24"/>
+          <p:cNvSpPr txBox="1"/>
+          <p:nvPr/>
+        </p:nvSpPr>
+        <p:spPr>
+          <a:xfrm>
+            <a:off x="5577840" y="4846320"/>
+            <a:ext cx="457200" cy="603504"/>
+          </a:xfrm>
+          <a:prstGeom prst="rect">
+            <a:avLst/>
+          </a:prstGeom>
+          <a:noFill/>
+        </p:spPr>
+        <p:txBody>
+          <a:bodyPr wrap="square" anchor="ctr" lIns="0" rIns="0" tIns="0" bIns="0">
+            <a:spAutoFit/>
+          </a:bodyPr>
+          <a:lstStyle/>
+          <a:p>
+            <a:pPr algn="l"/>
+            <a:r>
+              <a:rPr sz="1800" b="1">
+                <a:solidFill>
+                  <a:srgbClr val="0E7A4F"/>
+                </a:solidFill>
+                <a:latin typeface="微软雅黑"/>
+                <a:ea typeface="微软雅黑"/>
+                <a:cs typeface="微软雅黑"/>
+              </a:rPr>
+              <a:t>✓</a:t>
+            </a:r>
+          </a:p>
+        </p:txBody>
+      </p:sp>
+      <p:sp>
+        <p:nvSpPr>
+          <p:cNvPr id="26" name="Rounded Rectangle 25"/>
+          <p:cNvSpPr/>
+          <p:nvPr/>
+        </p:nvSpPr>
+        <p:spPr>
+          <a:xfrm>
+            <a:off x="640080" y="5532120"/>
+            <a:ext cx="5486400" cy="603504"/>
+          </a:xfrm>
+          <a:prstGeom prst="roundRect">
+            <a:avLst>
+              <a:gd name="adj" fmla="val 10000"/>
+            </a:avLst>
+          </a:prstGeom>
+          <a:solidFill>
+            <a:srgbClr val="FFFFFF"/>
+          </a:solidFill>
+          <a:ln>
+            <a:noFill/>
+          </a:ln>
+          <a:effectLst/>
+        </p:spPr>
+        <p:style>
+          <a:lnRef idx="1">
+            <a:schemeClr val="accent1"/>
+          </a:lnRef>
+          <a:fillRef idx="3">
+            <a:schemeClr val="accent1"/>
+          </a:fillRef>
+          <a:effectRef idx="2">
+            <a:schemeClr val="accent1"/>
+          </a:effectRef>
+          <a:fontRef idx="minor">
+            <a:schemeClr val="lt1"/>
+          </a:fontRef>
+        </p:style>
+        <p:txBody>
+          <a:bodyPr rtlCol="0" anchor="ctr"/>
+          <a:lstStyle/>
+          <a:p>
+            <a:pPr algn="ctr"/>
+          </a:p>
+        </p:txBody>
+      </p:sp>
+      <p:sp>
+        <p:nvSpPr>
+          <p:cNvPr id="27" name="TextBox 26"/>
+          <p:cNvSpPr txBox="1"/>
+          <p:nvPr/>
+        </p:nvSpPr>
+        <p:spPr>
+          <a:xfrm>
+            <a:off x="914400" y="5532120"/>
+            <a:ext cx="2194560" cy="603504"/>
+          </a:xfrm>
+          <a:prstGeom prst="rect">
+            <a:avLst/>
+          </a:prstGeom>
+          <a:noFill/>
+        </p:spPr>
+        <p:txBody>
+          <a:bodyPr wrap="square" anchor="ctr" lIns="0" rIns="0" tIns="0" bIns="0">
+            <a:spAutoFit/>
+          </a:bodyPr>
+          <a:lstStyle/>
+          <a:p>
+            <a:pPr algn="l"/>
+            <a:r>
+              <a:rPr sz="1400" b="1">
+                <a:solidFill>
+                  <a:srgbClr val="1A2332"/>
+                </a:solidFill>
+                <a:latin typeface="微软雅黑"/>
+                <a:ea typeface="微软雅黑"/>
+                <a:cs typeface="微软雅黑"/>
+              </a:rPr>
+              <a:t>取消 + 回归（新增）</a:t>
+            </a:r>
+          </a:p>
+        </p:txBody>
+      </p:sp>
+      <p:sp>
+        <p:nvSpPr>
+          <p:cNvPr id="28" name="TextBox 27"/>
+          <p:cNvSpPr txBox="1"/>
+          <p:nvPr/>
+        </p:nvSpPr>
+        <p:spPr>
+          <a:xfrm>
+            <a:off x="3154680" y="5532120"/>
+            <a:ext cx="2468880" cy="603504"/>
+          </a:xfrm>
+          <a:prstGeom prst="rect">
+            <a:avLst/>
+          </a:prstGeom>
+          <a:noFill/>
+        </p:spPr>
+        <p:txBody>
+          <a:bodyPr wrap="square" anchor="ctr" lIns="0" rIns="0" tIns="0" bIns="0">
+            <a:spAutoFit/>
+          </a:bodyPr>
+          <a:lstStyle/>
+          <a:p>
+            <a:pPr algn="l"/>
+            <a:r>
+              <a:rPr sz="1150" b="0">
+                <a:solidFill>
+                  <a:srgbClr val="6B7A72"/>
+                </a:solidFill>
+                <a:latin typeface="微软雅黑"/>
+                <a:ea typeface="微软雅黑"/>
+                <a:cs typeface="微软雅黑"/>
+              </a:rPr>
+              <a:t>取消 0.33s 返回；泄露 0 / 误伤 0</a:t>
+            </a:r>
+          </a:p>
+        </p:txBody>
+      </p:sp>
+      <p:sp>
+        <p:nvSpPr>
+          <p:cNvPr id="29" name="TextBox 28"/>
+          <p:cNvSpPr txBox="1"/>
+          <p:nvPr/>
+        </p:nvSpPr>
+        <p:spPr>
+          <a:xfrm>
+            <a:off x="5577840" y="5532120"/>
+            <a:ext cx="457200" cy="603504"/>
+          </a:xfrm>
+          <a:prstGeom prst="rect">
+            <a:avLst/>
+          </a:prstGeom>
+          <a:noFill/>
+        </p:spPr>
+        <p:txBody>
+          <a:bodyPr wrap="square" anchor="ctr" lIns="0" rIns="0" tIns="0" bIns="0">
+            <a:spAutoFit/>
+          </a:bodyPr>
+          <a:lstStyle/>
+          <a:p>
+            <a:pPr algn="l"/>
+            <a:r>
+              <a:rPr sz="1800" b="1">
+                <a:solidFill>
+                  <a:srgbClr val="0E7A4F"/>
+                </a:solidFill>
+                <a:latin typeface="微软雅黑"/>
+                <a:ea typeface="微软雅黑"/>
+                <a:cs typeface="微软雅黑"/>
+              </a:rPr>
+              <a:t>✓</a:t>
+            </a:r>
+          </a:p>
+        </p:txBody>
+      </p:sp>
+      <p:sp>
+        <p:nvSpPr>
+          <p:cNvPr id="30" name="Rounded Rectangle 29"/>
+          <p:cNvSpPr/>
+          <p:nvPr/>
+        </p:nvSpPr>
+        <p:spPr>
+          <a:xfrm>
+            <a:off x="6537960" y="1737360"/>
+            <a:ext cx="4983480" cy="4206240"/>
+          </a:xfrm>
+          <a:prstGeom prst="roundRect">
+            <a:avLst>
+              <a:gd name="adj" fmla="val 5000"/>
+            </a:avLst>
+          </a:prstGeom>
+          <a:solidFill>
+            <a:srgbClr val="0A5C3B"/>
+          </a:solidFill>
+          <a:ln>
+            <a:noFill/>
+          </a:ln>
+          <a:effectLst/>
+          <a:effectLst>
+            <a:outerShdw blurRad="101600" dist="25400" dir="5400000" rotWithShape="0">
+              <a:srgbClr val="0B2A1E">
+                <a:alpha val="14000"/>
+              </a:srgbClr>
+            </a:outerShdw>
+          </a:effectLst>
+        </p:spPr>
+        <p:style>
+          <a:lnRef idx="1">
+            <a:schemeClr val="accent1"/>
+          </a:lnRef>
+          <a:fillRef idx="3">
+            <a:schemeClr val="accent1"/>
+          </a:fillRef>
+          <a:effectRef idx="2">
+            <a:schemeClr val="accent1"/>
+          </a:effectRef>
+          <a:fontRef idx="minor">
+            <a:schemeClr val="lt1"/>
+          </a:fontRef>
+        </p:style>
+        <p:txBody>
+          <a:bodyPr rtlCol="0" anchor="ctr"/>
+          <a:lstStyle/>
+          <a:p>
+            <a:pPr algn="ctr"/>
+          </a:p>
+        </p:txBody>
+      </p:sp>
+      <p:sp>
+        <p:nvSpPr>
+          <p:cNvPr id="31" name="TextBox 30"/>
+          <p:cNvSpPr txBox="1"/>
+          <p:nvPr/>
+        </p:nvSpPr>
+        <p:spPr>
+          <a:xfrm>
+            <a:off x="6812280" y="2057400"/>
+            <a:ext cx="4434840" cy="914400"/>
+          </a:xfrm>
+          <a:prstGeom prst="rect">
+            <a:avLst/>
+          </a:prstGeom>
+          <a:noFill/>
+        </p:spPr>
+        <p:txBody>
+          <a:bodyPr wrap="square" anchor="ctr" lIns="0" rIns="0" tIns="0" bIns="0">
+            <a:spAutoFit/>
+          </a:bodyPr>
+          <a:lstStyle/>
+          <a:p>
+            <a:pPr algn="ctr"/>
+            <a:r>
+              <a:rPr sz="5200" b="1">
+                <a:solidFill>
+                  <a:srgbClr val="FFFFFF"/>
+                </a:solidFill>
+                <a:latin typeface="微软雅黑"/>
+                <a:ea typeface="微软雅黑"/>
+                <a:cs typeface="微软雅黑"/>
+              </a:rPr>
+              <a:t>1 个 exe</a:t>
+            </a:r>
+          </a:p>
+        </p:txBody>
+      </p:sp>
+      <p:sp>
+        <p:nvSpPr>
+          <p:cNvPr id="32" name="TextBox 31"/>
+          <p:cNvSpPr txBox="1"/>
+          <p:nvPr/>
+        </p:nvSpPr>
+        <p:spPr>
+          <a:xfrm>
+            <a:off x="6812280" y="3063240"/>
+            <a:ext cx="4434840" cy="457200"/>
+          </a:xfrm>
+          <a:prstGeom prst="rect">
+            <a:avLst/>
+          </a:prstGeom>
+          <a:noFill/>
+        </p:spPr>
+        <p:txBody>
+          <a:bodyPr wrap="square" anchor="t" lIns="0" rIns="0" tIns="0" bIns="0">
+            <a:spAutoFit/>
+          </a:bodyPr>
+          <a:lstStyle/>
+          <a:p>
+            <a:pPr algn="ctr"/>
+            <a:r>
+              <a:rPr sz="1500" b="1">
+                <a:solidFill>
                   <a:srgbClr val="8FD3B4"/>
                 </a:solidFill>
                 <a:latin typeface="微软雅黑"/>
                 <a:ea typeface="微软雅黑"/>
                 <a:cs typeface="微软雅黑"/>
               </a:rPr>
-              <a:t>总结与展望</a:t>
-            </a:r>
-          </a:p>
-        </p:txBody>
-      </p:sp>
-      <p:sp>
-        <p:nvSpPr>
-          <p:cNvPr id="4" name="TextBox 3"/>
-          <p:cNvSpPr txBox="1"/>
-          <p:nvPr/>
-        </p:nvSpPr>
-        <p:spPr>
-          <a:xfrm>
-            <a:off x="640080" y="1280160"/>
-            <a:ext cx="10911535" cy="914400"/>
-          </a:xfrm>
-          <a:prstGeom prst="rect">
-            <a:avLst/>
-          </a:prstGeom>
-          <a:noFill/>
-        </p:spPr>
-        <p:txBody>
-          <a:bodyPr wrap="square" anchor="t" lIns="0" rIns="0" tIns="0" bIns="0">
-            <a:spAutoFit/>
-          </a:bodyPr>
-          <a:lstStyle/>
-          <a:p>
-            <a:pPr algn="l"/>
-            <a:r>
-              <a:rPr sz="3000" b="1">
-                <a:solidFill>
-                  <a:srgbClr val="FFFFFF"/>
-                </a:solidFill>
-                <a:latin typeface="微软雅黑"/>
-                <a:ea typeface="微软雅黑"/>
-                <a:cs typeface="微软雅黑"/>
-              </a:rPr>
-              <a:t>一套让大模型安全处理涉密办公数据的端到端方案</a:t>
-            </a:r>
-          </a:p>
-        </p:txBody>
-      </p:sp>
-      <p:sp>
-        <p:nvSpPr>
-          <p:cNvPr id="5" name="TextBox 4"/>
-          <p:cNvSpPr txBox="1"/>
-          <p:nvPr/>
-        </p:nvSpPr>
-        <p:spPr>
-          <a:xfrm>
-            <a:off x="640080" y="2514600"/>
-            <a:ext cx="1889699" cy="822960"/>
-          </a:xfrm>
-          <a:prstGeom prst="rect">
-            <a:avLst/>
-          </a:prstGeom>
-          <a:noFill/>
-        </p:spPr>
-        <p:txBody>
-          <a:bodyPr wrap="square" anchor="ctr" lIns="0" rIns="0" tIns="0" bIns="0">
-            <a:spAutoFit/>
-          </a:bodyPr>
-          <a:lstStyle/>
-          <a:p>
-            <a:pPr algn="ctr"/>
-            <a:r>
-              <a:rPr sz="3000" b="1">
-                <a:solidFill>
-                  <a:srgbClr val="7EE2A8"/>
-                </a:solidFill>
-                <a:latin typeface="微软雅黑"/>
-                <a:ea typeface="微软雅黑"/>
-                <a:cs typeface="微软雅黑"/>
-              </a:rPr>
-              <a:t>1.6万</a:t>
-            </a:r>
-          </a:p>
-        </p:txBody>
-      </p:sp>
-      <p:sp>
-        <p:nvSpPr>
-          <p:cNvPr id="6" name="TextBox 5"/>
-          <p:cNvSpPr txBox="1"/>
-          <p:nvPr/>
-        </p:nvSpPr>
-        <p:spPr>
-          <a:xfrm>
-            <a:off x="640080" y="3337560"/>
-            <a:ext cx="1889699" cy="365760"/>
-          </a:xfrm>
-          <a:prstGeom prst="rect">
-            <a:avLst/>
-          </a:prstGeom>
-          <a:noFill/>
-        </p:spPr>
-        <p:txBody>
-          <a:bodyPr wrap="square" anchor="t" lIns="0" rIns="0" tIns="0" bIns="0">
-            <a:spAutoFit/>
-          </a:bodyPr>
-          <a:lstStyle/>
-          <a:p>
-            <a:pPr algn="ctr"/>
-            <a:r>
-              <a:rPr sz="1300" b="0">
-                <a:solidFill>
-                  <a:srgbClr val="CFE8DA"/>
-                </a:solidFill>
-                <a:latin typeface="微软雅黑"/>
-                <a:ea typeface="微软雅黑"/>
-                <a:cs typeface="微软雅黑"/>
-              </a:rPr>
-              <a:t>行 Python</a:t>
-            </a:r>
-          </a:p>
-        </p:txBody>
-      </p:sp>
-      <p:sp>
-        <p:nvSpPr>
-          <p:cNvPr id="7" name="TextBox 6"/>
-          <p:cNvSpPr txBox="1"/>
-          <p:nvPr/>
-        </p:nvSpPr>
-        <p:spPr>
-          <a:xfrm>
-            <a:off x="2895539" y="2514600"/>
-            <a:ext cx="1889699" cy="822960"/>
-          </a:xfrm>
-          <a:prstGeom prst="rect">
-            <a:avLst/>
-          </a:prstGeom>
-          <a:noFill/>
-        </p:spPr>
-        <p:txBody>
-          <a:bodyPr wrap="square" anchor="ctr" lIns="0" rIns="0" tIns="0" bIns="0">
-            <a:spAutoFit/>
-          </a:bodyPr>
-          <a:lstStyle/>
-          <a:p>
-            <a:pPr algn="ctr"/>
-            <a:r>
-              <a:rPr sz="3000" b="1">
-                <a:solidFill>
-                  <a:srgbClr val="F0B45C"/>
-                </a:solidFill>
-                <a:latin typeface="微软雅黑"/>
-                <a:ea typeface="微软雅黑"/>
-                <a:cs typeface="微软雅黑"/>
-              </a:rPr>
-              <a:t>27</a:t>
-            </a:r>
-          </a:p>
-        </p:txBody>
-      </p:sp>
-      <p:sp>
-        <p:nvSpPr>
-          <p:cNvPr id="8" name="TextBox 7"/>
-          <p:cNvSpPr txBox="1"/>
-          <p:nvPr/>
-        </p:nvSpPr>
-        <p:spPr>
-          <a:xfrm>
-            <a:off x="2895539" y="3337560"/>
-            <a:ext cx="1889699" cy="365760"/>
-          </a:xfrm>
-          <a:prstGeom prst="rect">
-            <a:avLst/>
-          </a:prstGeom>
-          <a:noFill/>
-        </p:spPr>
-        <p:txBody>
-          <a:bodyPr wrap="square" anchor="t" lIns="0" rIns="0" tIns="0" bIns="0">
-            <a:spAutoFit/>
-          </a:bodyPr>
-          <a:lstStyle/>
-          <a:p>
-            <a:pPr algn="ctr"/>
-            <a:r>
-              <a:rPr sz="1300" b="0">
-                <a:solidFill>
-                  <a:srgbClr val="CFE8DA"/>
-                </a:solidFill>
-                <a:latin typeface="微软雅黑"/>
-                <a:ea typeface="微软雅黑"/>
-                <a:cs typeface="微软雅黑"/>
-              </a:rPr>
-              <a:t>类实体脱敏</a:t>
-            </a:r>
-          </a:p>
-        </p:txBody>
-      </p:sp>
-      <p:sp>
-        <p:nvSpPr>
-          <p:cNvPr id="9" name="TextBox 8"/>
-          <p:cNvSpPr txBox="1"/>
-          <p:nvPr/>
-        </p:nvSpPr>
-        <p:spPr>
-          <a:xfrm>
-            <a:off x="5150998" y="2514600"/>
-            <a:ext cx="1889699" cy="822960"/>
-          </a:xfrm>
-          <a:prstGeom prst="rect">
-            <a:avLst/>
-          </a:prstGeom>
-          <a:noFill/>
-        </p:spPr>
-        <p:txBody>
-          <a:bodyPr wrap="square" anchor="ctr" lIns="0" rIns="0" tIns="0" bIns="0">
-            <a:spAutoFit/>
-          </a:bodyPr>
-          <a:lstStyle/>
-          <a:p>
-            <a:pPr algn="ctr"/>
-            <a:r>
-              <a:rPr sz="3000" b="1">
-                <a:solidFill>
-                  <a:srgbClr val="7EE2A8"/>
-                </a:solidFill>
-                <a:latin typeface="微软雅黑"/>
-                <a:ea typeface="微软雅黑"/>
-                <a:cs typeface="微软雅黑"/>
-              </a:rPr>
-              <a:t>4</a:t>
-            </a:r>
-          </a:p>
-        </p:txBody>
-      </p:sp>
-      <p:sp>
-        <p:nvSpPr>
-          <p:cNvPr id="10" name="TextBox 9"/>
-          <p:cNvSpPr txBox="1"/>
-          <p:nvPr/>
-        </p:nvSpPr>
-        <p:spPr>
-          <a:xfrm>
-            <a:off x="5150998" y="3337560"/>
-            <a:ext cx="1889699" cy="365760"/>
-          </a:xfrm>
-          <a:prstGeom prst="rect">
-            <a:avLst/>
-          </a:prstGeom>
-          <a:noFill/>
-        </p:spPr>
-        <p:txBody>
-          <a:bodyPr wrap="square" anchor="t" lIns="0" rIns="0" tIns="0" bIns="0">
-            <a:spAutoFit/>
-          </a:bodyPr>
-          <a:lstStyle/>
-          <a:p>
-            <a:pPr algn="ctr"/>
-            <a:r>
-              <a:rPr sz="1300" b="0">
-                <a:solidFill>
-                  <a:srgbClr val="CFE8DA"/>
-                </a:solidFill>
-                <a:latin typeface="微软雅黑"/>
-                <a:ea typeface="微软雅黑"/>
-                <a:cs typeface="微软雅黑"/>
-              </a:rPr>
-              <a:t>层纵深防御</a:t>
-            </a:r>
-          </a:p>
-        </p:txBody>
-      </p:sp>
-      <p:sp>
-        <p:nvSpPr>
-          <p:cNvPr id="11" name="TextBox 10"/>
-          <p:cNvSpPr txBox="1"/>
-          <p:nvPr/>
-        </p:nvSpPr>
-        <p:spPr>
-          <a:xfrm>
-            <a:off x="7406457" y="2514600"/>
-            <a:ext cx="1889699" cy="822960"/>
-          </a:xfrm>
-          <a:prstGeom prst="rect">
-            <a:avLst/>
-          </a:prstGeom>
-          <a:noFill/>
-        </p:spPr>
-        <p:txBody>
-          <a:bodyPr wrap="square" anchor="ctr" lIns="0" rIns="0" tIns="0" bIns="0">
-            <a:spAutoFit/>
-          </a:bodyPr>
-          <a:lstStyle/>
-          <a:p>
-            <a:pPr algn="ctr"/>
-            <a:r>
-              <a:rPr sz="3000" b="1">
-                <a:solidFill>
-                  <a:srgbClr val="F0B45C"/>
-                </a:solidFill>
-                <a:latin typeface="微软雅黑"/>
-                <a:ea typeface="微软雅黑"/>
-                <a:cs typeface="微软雅黑"/>
-              </a:rPr>
-              <a:t>20+</a:t>
-            </a:r>
-          </a:p>
-        </p:txBody>
-      </p:sp>
-      <p:sp>
-        <p:nvSpPr>
-          <p:cNvPr id="12" name="TextBox 11"/>
-          <p:cNvSpPr txBox="1"/>
-          <p:nvPr/>
-        </p:nvSpPr>
-        <p:spPr>
-          <a:xfrm>
-            <a:off x="7406457" y="3337560"/>
-            <a:ext cx="1889699" cy="365760"/>
-          </a:xfrm>
-          <a:prstGeom prst="rect">
-            <a:avLst/>
-          </a:prstGeom>
-          <a:noFill/>
-        </p:spPr>
-        <p:txBody>
-          <a:bodyPr wrap="square" anchor="t" lIns="0" rIns="0" tIns="0" bIns="0">
-            <a:spAutoFit/>
-          </a:bodyPr>
-          <a:lstStyle/>
-          <a:p>
-            <a:pPr algn="ctr"/>
-            <a:r>
-              <a:rPr sz="1300" b="0">
-                <a:solidFill>
-                  <a:srgbClr val="CFE8DA"/>
-                </a:solidFill>
-                <a:latin typeface="微软雅黑"/>
-                <a:ea typeface="微软雅黑"/>
-                <a:cs typeface="微软雅黑"/>
-              </a:rPr>
-              <a:t>项安全修复</a:t>
-            </a:r>
-          </a:p>
-        </p:txBody>
-      </p:sp>
-      <p:sp>
-        <p:nvSpPr>
-          <p:cNvPr id="13" name="TextBox 12"/>
-          <p:cNvSpPr txBox="1"/>
-          <p:nvPr/>
-        </p:nvSpPr>
-        <p:spPr>
-          <a:xfrm>
-            <a:off x="9661916" y="2514600"/>
-            <a:ext cx="1889699" cy="822960"/>
-          </a:xfrm>
-          <a:prstGeom prst="rect">
-            <a:avLst/>
-          </a:prstGeom>
-          <a:noFill/>
-        </p:spPr>
-        <p:txBody>
-          <a:bodyPr wrap="square" anchor="ctr" lIns="0" rIns="0" tIns="0" bIns="0">
-            <a:spAutoFit/>
-          </a:bodyPr>
-          <a:lstStyle/>
-          <a:p>
-            <a:pPr algn="ctr"/>
-            <a:r>
-              <a:rPr sz="3000" b="1">
-                <a:solidFill>
-                  <a:srgbClr val="7EE2A8"/>
-                </a:solidFill>
-                <a:latin typeface="微软雅黑"/>
-                <a:ea typeface="微软雅黑"/>
-                <a:cs typeface="微软雅黑"/>
-              </a:rPr>
-              <a:t>8</a:t>
-            </a:r>
-          </a:p>
-        </p:txBody>
-      </p:sp>
-      <p:sp>
-        <p:nvSpPr>
-          <p:cNvPr id="14" name="TextBox 13"/>
-          <p:cNvSpPr txBox="1"/>
-          <p:nvPr/>
-        </p:nvSpPr>
-        <p:spPr>
-          <a:xfrm>
-            <a:off x="9661916" y="3337560"/>
-            <a:ext cx="1889699" cy="365760"/>
-          </a:xfrm>
-          <a:prstGeom prst="rect">
-            <a:avLst/>
-          </a:prstGeom>
-          <a:noFill/>
-        </p:spPr>
-        <p:txBody>
-          <a:bodyPr wrap="square" anchor="t" lIns="0" rIns="0" tIns="0" bIns="0">
-            <a:spAutoFit/>
-          </a:bodyPr>
-          <a:lstStyle/>
-          <a:p>
-            <a:pPr algn="ctr"/>
-            <a:r>
-              <a:rPr sz="1300" b="0">
-                <a:solidFill>
-                  <a:srgbClr val="CFE8DA"/>
-                </a:solidFill>
-                <a:latin typeface="微软雅黑"/>
-                <a:ea typeface="微软雅黑"/>
-                <a:cs typeface="微软雅黑"/>
-              </a:rPr>
-              <a:t>套件回归通过</a:t>
-            </a:r>
-          </a:p>
-        </p:txBody>
-      </p:sp>
-      <p:sp>
-        <p:nvSpPr>
-          <p:cNvPr id="15" name="Rectangle 14"/>
+              <a:t>免安装 · 双击即用 · 无需脚本</a:t>
+            </a:r>
+          </a:p>
+        </p:txBody>
+      </p:sp>
+      <p:sp>
+        <p:nvSpPr>
+          <p:cNvPr id="33" name="Rectangle 32"/>
           <p:cNvSpPr/>
           <p:nvPr/>
         </p:nvSpPr>
         <p:spPr>
           <a:xfrm>
-            <a:off x="640080" y="3977639"/>
-            <a:ext cx="10911535" cy="18288"/>
+            <a:off x="6949440" y="3611880"/>
+            <a:ext cx="4160520" cy="18288"/>
           </a:xfrm>
           <a:prstGeom prst="rect">
             <a:avLst/>
@@ -12756,14 +13385,14 @@
       </p:sp>
       <p:sp>
         <p:nvSpPr>
-          <p:cNvPr id="16" name="TextBox 15"/>
-          <p:cNvSpPr txBox="1"/>
-          <p:nvPr/>
-        </p:nvSpPr>
-        <p:spPr>
-          <a:xfrm>
-            <a:off x="640080" y="4251960"/>
-            <a:ext cx="5669280" cy="1828800"/>
+          <p:cNvPr id="34" name="TextBox 33"/>
+          <p:cNvSpPr txBox="1"/>
+          <p:nvPr/>
+        </p:nvSpPr>
+        <p:spPr>
+          <a:xfrm>
+            <a:off x="6812280" y="3794760"/>
+            <a:ext cx="4434840" cy="2011680"/>
           </a:xfrm>
           <a:prstGeom prst="rect">
             <a:avLst/>
@@ -12777,30 +13406,47 @@
           <a:lstStyle/>
           <a:p>
             <a:pPr algn="l">
+              <a:lnSpc>
+                <a:spcPct val="110000"/>
+              </a:lnSpc>
               <a:spcAft>
-                <a:spcPts val="600"/>
+                <a:spcPts val="800"/>
               </a:spcAft>
             </a:pPr>
             <a:r>
-              <a:rPr sz="1500" b="1">
-                <a:solidFill>
-                  <a:srgbClr val="7EE2A8"/>
-                </a:solidFill>
-                <a:latin typeface="微软雅黑"/>
-                <a:ea typeface="微软雅黑"/>
-                <a:cs typeface="微软雅黑"/>
-              </a:rPr>
-              <a:t>下一步</a:t>
+              <a:rPr sz="1300" b="1">
+                <a:solidFill>
+                  <a:srgbClr val="F0B45C"/>
+                </a:solidFill>
+                <a:latin typeface="微软雅黑"/>
+                <a:ea typeface="微软雅黑"/>
+                <a:cs typeface="微软雅黑"/>
+              </a:rPr>
+              <a:t>▪  </a:t>
+            </a:r>
+            <a:r>
+              <a:rPr sz="1300" b="0">
+                <a:solidFill>
+                  <a:srgbClr val="EAF5EF"/>
+                </a:solidFill>
+                <a:latin typeface="微软雅黑"/>
+                <a:ea typeface="微软雅黑"/>
+                <a:cs typeface="微软雅黑"/>
+              </a:rPr>
+              <a:t>PySide6 + LangChain 全依赖自包含（PyInstaller onefile）</a:t>
             </a:r>
           </a:p>
           <a:p>
             <a:pPr algn="l">
+              <a:lnSpc>
+                <a:spcPct val="110000"/>
+              </a:lnSpc>
               <a:spcAft>
-                <a:spcPts val="600"/>
+                <a:spcPts val="800"/>
               </a:spcAft>
             </a:pPr>
             <a:r>
-              <a:rPr sz="1350" b="1">
+              <a:rPr sz="1300" b="1">
                 <a:solidFill>
                   <a:srgbClr val="F0B45C"/>
                 </a:solidFill>
@@ -12808,10 +13454,10 @@
                 <a:ea typeface="微软雅黑"/>
                 <a:cs typeface="微软雅黑"/>
               </a:rPr>
-              <a:t>▸  </a:t>
-            </a:r>
-            <a:r>
-              <a:rPr sz="1350" b="0">
+              <a:t>▪  </a:t>
+            </a:r>
+            <a:r>
+              <a:rPr sz="1300" b="0">
                 <a:solidFill>
                   <a:srgbClr val="EAF5EF"/>
                 </a:solidFill>
@@ -12819,17 +13465,20 @@
                 <a:ea typeface="微软雅黑"/>
                 <a:cs typeface="微软雅黑"/>
               </a:rPr>
-              <a:t>工具调用结果二次核验，杜绝幻觉式假成功</a:t>
+              <a:t>单文件双击即用，无需安装与脚本</a:t>
             </a:r>
           </a:p>
           <a:p>
             <a:pPr algn="l">
+              <a:lnSpc>
+                <a:spcPct val="110000"/>
+              </a:lnSpc>
               <a:spcAft>
-                <a:spcPts val="600"/>
+                <a:spcPts val="800"/>
               </a:spcAft>
             </a:pPr>
             <a:r>
-              <a:rPr sz="1350" b="1">
+              <a:rPr sz="1300" b="1">
                 <a:solidFill>
                   <a:srgbClr val="F0B45C"/>
                 </a:solidFill>
@@ -12837,10 +13486,10 @@
                 <a:ea typeface="微软雅黑"/>
                 <a:cs typeface="微软雅黑"/>
               </a:rPr>
-              <a:t>▸  </a:t>
-            </a:r>
-            <a:r>
-              <a:rPr sz="1350" b="0">
+              <a:t>▪  </a:t>
+            </a:r>
+            <a:r>
+              <a:rPr sz="1300" b="0">
                 <a:solidFill>
                   <a:srgbClr val="EAF5EF"/>
                 </a:solidFill>
@@ -12848,17 +13497,20 @@
                 <a:ea typeface="微软雅黑"/>
                 <a:cs typeface="微软雅黑"/>
               </a:rPr>
-              <a:t>审计链头外部锚定，抵御整体重算哈希链</a:t>
+              <a:t>配置/会话/审计/向量库写在 exe 同目录，删文件即卸载</a:t>
             </a:r>
           </a:p>
           <a:p>
             <a:pPr algn="l">
+              <a:lnSpc>
+                <a:spcPct val="110000"/>
+              </a:lnSpc>
               <a:spcAft>
-                <a:spcPts val="600"/>
+                <a:spcPts val="800"/>
               </a:spcAft>
             </a:pPr>
             <a:r>
-              <a:rPr sz="1350" b="1">
+              <a:rPr sz="1300" b="1">
                 <a:solidFill>
                   <a:srgbClr val="F0B45C"/>
                 </a:solidFill>
@@ -12866,10 +13518,10 @@
                 <a:ea typeface="微软雅黑"/>
                 <a:cs typeface="微软雅黑"/>
               </a:rPr>
-              <a:t>▸  </a:t>
-            </a:r>
-            <a:r>
-              <a:rPr sz="1350" b="0">
+              <a:t>▪  </a:t>
+            </a:r>
+            <a:r>
+              <a:rPr sz="1300" b="0">
                 <a:solidFill>
                   <a:srgbClr val="EAF5EF"/>
                 </a:solidFill>
@@ -12877,124 +13529,44 @@
                 <a:ea typeface="微软雅黑"/>
                 <a:cs typeface="微软雅黑"/>
               </a:rPr>
-              <a:t>策略引擎规则可视化编辑</a:t>
-            </a:r>
-          </a:p>
-          <a:p>
-            <a:pPr algn="l">
-              <a:spcAft>
-                <a:spcPts val="600"/>
-              </a:spcAft>
-            </a:pPr>
-            <a:r>
-              <a:rPr sz="1350" b="1">
-                <a:solidFill>
-                  <a:srgbClr val="F0B45C"/>
-                </a:solidFill>
-                <a:latin typeface="微软雅黑"/>
-                <a:ea typeface="微软雅黑"/>
-                <a:cs typeface="微软雅黑"/>
-              </a:rPr>
-              <a:t>▸  </a:t>
-            </a:r>
-            <a:r>
-              <a:rPr sz="1350" b="0">
-                <a:solidFill>
-                  <a:srgbClr val="EAF5EF"/>
-                </a:solidFill>
-                <a:latin typeface="微软雅黑"/>
-                <a:ea typeface="微软雅黑"/>
-                <a:cs typeface="微软雅黑"/>
-              </a:rPr>
-              <a:t>CI 接入 bandit/semgrep 静态安全扫描</a:t>
-            </a:r>
-          </a:p>
-        </p:txBody>
-      </p:sp>
-      <p:sp>
-        <p:nvSpPr>
-          <p:cNvPr id="17" name="TextBox 16"/>
-          <p:cNvSpPr txBox="1"/>
-          <p:nvPr/>
-        </p:nvSpPr>
-        <p:spPr>
-          <a:xfrm>
-            <a:off x="6675120" y="4434840"/>
-            <a:ext cx="4846320" cy="1463040"/>
-          </a:xfrm>
-          <a:prstGeom prst="rect">
-            <a:avLst/>
-          </a:prstGeom>
-          <a:noFill/>
-        </p:spPr>
-        <p:txBody>
-          <a:bodyPr wrap="square" anchor="ctr" lIns="0" rIns="0" tIns="0" bIns="0">
+              <a:t>随附《使用说明》：本地/云端算力两步接入</a:t>
+            </a:r>
+          </a:p>
+        </p:txBody>
+      </p:sp>
+      <p:sp>
+        <p:nvSpPr>
+          <p:cNvPr id="35" name="TextBox 34"/>
+          <p:cNvSpPr txBox="1"/>
+          <p:nvPr/>
+        </p:nvSpPr>
+        <p:spPr>
+          <a:xfrm>
+            <a:off x="11185855" y="6291072"/>
+            <a:ext cx="548640" cy="320040"/>
+          </a:xfrm>
+          <a:prstGeom prst="rect">
+            <a:avLst/>
+          </a:prstGeom>
+          <a:noFill/>
+        </p:spPr>
+        <p:txBody>
+          <a:bodyPr wrap="square" anchor="t" lIns="0" rIns="0" tIns="0" bIns="0">
             <a:spAutoFit/>
           </a:bodyPr>
           <a:lstStyle/>
           <a:p>
             <a:pPr algn="r"/>
             <a:r>
-              <a:rPr sz="2400" b="1">
-                <a:solidFill>
-                  <a:srgbClr val="FFFFFF"/>
-                </a:solidFill>
-                <a:latin typeface="微软雅黑"/>
-                <a:ea typeface="微软雅黑"/>
-                <a:cs typeface="微软雅黑"/>
-              </a:rPr>
-              <a:t>让本地 AI</a:t>
-            </a:r>
-          </a:p>
-          <a:p>
-            <a:pPr algn="r"/>
-            <a:r>
-              <a:rPr sz="2400" b="1">
-                <a:solidFill>
-                  <a:srgbClr val="7EE2A8"/>
-                </a:solidFill>
-                <a:latin typeface="微软雅黑"/>
-                <a:ea typeface="微软雅黑"/>
-                <a:cs typeface="微软雅黑"/>
-              </a:rPr>
-              <a:t>更安全 · 更智能 · 更可控</a:t>
-            </a:r>
-          </a:p>
-        </p:txBody>
-      </p:sp>
-      <p:sp>
-        <p:nvSpPr>
-          <p:cNvPr id="18" name="TextBox 17"/>
-          <p:cNvSpPr txBox="1"/>
-          <p:nvPr/>
-        </p:nvSpPr>
-        <p:spPr>
-          <a:xfrm>
-            <a:off x="640080" y="6309360"/>
-            <a:ext cx="10911535" cy="365760"/>
-          </a:xfrm>
-          <a:prstGeom prst="rect">
-            <a:avLst/>
-          </a:prstGeom>
-          <a:noFill/>
-        </p:spPr>
-        <p:txBody>
-          <a:bodyPr wrap="square" anchor="t" lIns="0" rIns="0" tIns="0" bIns="0">
-            <a:spAutoFit/>
-          </a:bodyPr>
-          <a:lstStyle/>
-          <a:p>
-            <a:pPr algn="l"/>
-            <a:r>
               <a:rPr sz="1100" b="0">
                 <a:solidFill>
-                  <a:srgbClr val="6E9C86"/>
-                </a:solidFill>
-                <a:latin typeface="微软雅黑"/>
-                <a:ea typeface="微软雅黑"/>
-                <a:cs typeface="微软雅黑"/>
-              </a:rPr>
-              <a:t>隐盾安全智能体 · Yindun Team · 2026    |    技术报告 · 仅供学习研究</a:t>
+                  <a:srgbClr val="6B7A72"/>
+                </a:solidFill>
+                <a:latin typeface="微软雅黑"/>
+                <a:ea typeface="微软雅黑"/>
+                <a:cs typeface="微软雅黑"/>
+              </a:rPr>
+              <a:t>19</a:t>
             </a:r>
           </a:p>
         </p:txBody>
@@ -13687,6 +14259,801 @@
                 <a:cs typeface="微软雅黑"/>
               </a:rPr>
               <a:t>02</a:t>
+            </a:r>
+          </a:p>
+        </p:txBody>
+      </p:sp>
+    </p:spTree>
+  </p:cSld>
+  <p:clrMapOvr>
+    <a:masterClrMapping/>
+  </p:clrMapOvr>
+</p:sld>
+</file>
+
+<file path=ppt/slides/slide20.xml><?xml version="1.0" encoding="utf-8"?>
+<p:sld xmlns:a="http://schemas.openxmlformats.org/drawingml/2006/main" xmlns:p="http://schemas.openxmlformats.org/presentationml/2006/main" xmlns:r="http://schemas.openxmlformats.org/officeDocument/2006/relationships">
+  <p:cSld>
+    <p:spTree>
+      <p:nvGrpSpPr>
+        <p:cNvPr id="1" name=""/>
+        <p:cNvGrpSpPr/>
+        <p:nvPr/>
+      </p:nvGrpSpPr>
+      <p:grpSpPr/>
+      <p:sp>
+        <p:nvSpPr>
+          <p:cNvPr id="2" name="Rectangle 1"/>
+          <p:cNvSpPr/>
+          <p:nvPr/>
+        </p:nvSpPr>
+        <p:spPr>
+          <a:xfrm>
+            <a:off x="0" y="0"/>
+            <a:ext cx="12191695" cy="6858000"/>
+          </a:xfrm>
+          <a:prstGeom prst="rect">
+            <a:avLst/>
+          </a:prstGeom>
+          <a:solidFill>
+            <a:srgbClr val="0B3D2E"/>
+          </a:solidFill>
+          <a:ln>
+            <a:noFill/>
+          </a:ln>
+          <a:effectLst/>
+        </p:spPr>
+        <p:style>
+          <a:lnRef idx="1">
+            <a:schemeClr val="accent1"/>
+          </a:lnRef>
+          <a:fillRef idx="3">
+            <a:schemeClr val="accent1"/>
+          </a:fillRef>
+          <a:effectRef idx="2">
+            <a:schemeClr val="accent1"/>
+          </a:effectRef>
+          <a:fontRef idx="minor">
+            <a:schemeClr val="lt1"/>
+          </a:fontRef>
+        </p:style>
+        <p:txBody>
+          <a:bodyPr rtlCol="0" anchor="ctr"/>
+          <a:lstStyle/>
+          <a:p>
+            <a:pPr algn="ctr"/>
+          </a:p>
+        </p:txBody>
+      </p:sp>
+      <p:sp>
+        <p:nvSpPr>
+          <p:cNvPr id="3" name="TextBox 2"/>
+          <p:cNvSpPr txBox="1"/>
+          <p:nvPr/>
+        </p:nvSpPr>
+        <p:spPr>
+          <a:xfrm>
+            <a:off x="640080" y="822960"/>
+            <a:ext cx="10911535" cy="365760"/>
+          </a:xfrm>
+          <a:prstGeom prst="rect">
+            <a:avLst/>
+          </a:prstGeom>
+          <a:noFill/>
+        </p:spPr>
+        <p:txBody>
+          <a:bodyPr wrap="square" anchor="t" lIns="0" rIns="0" tIns="0" bIns="0">
+            <a:spAutoFit/>
+          </a:bodyPr>
+          <a:lstStyle/>
+          <a:p>
+            <a:pPr algn="l"/>
+            <a:r>
+              <a:rPr sz="1400" b="1">
+                <a:solidFill>
+                  <a:srgbClr val="8FD3B4"/>
+                </a:solidFill>
+                <a:latin typeface="微软雅黑"/>
+                <a:ea typeface="微软雅黑"/>
+                <a:cs typeface="微软雅黑"/>
+              </a:rPr>
+              <a:t>总结与展望</a:t>
+            </a:r>
+          </a:p>
+        </p:txBody>
+      </p:sp>
+      <p:sp>
+        <p:nvSpPr>
+          <p:cNvPr id="4" name="TextBox 3"/>
+          <p:cNvSpPr txBox="1"/>
+          <p:nvPr/>
+        </p:nvSpPr>
+        <p:spPr>
+          <a:xfrm>
+            <a:off x="640080" y="1280160"/>
+            <a:ext cx="10911535" cy="914400"/>
+          </a:xfrm>
+          <a:prstGeom prst="rect">
+            <a:avLst/>
+          </a:prstGeom>
+          <a:noFill/>
+        </p:spPr>
+        <p:txBody>
+          <a:bodyPr wrap="square" anchor="t" lIns="0" rIns="0" tIns="0" bIns="0">
+            <a:spAutoFit/>
+          </a:bodyPr>
+          <a:lstStyle/>
+          <a:p>
+            <a:pPr algn="l"/>
+            <a:r>
+              <a:rPr sz="3000" b="1">
+                <a:solidFill>
+                  <a:srgbClr val="FFFFFF"/>
+                </a:solidFill>
+                <a:latin typeface="微软雅黑"/>
+                <a:ea typeface="微软雅黑"/>
+                <a:cs typeface="微软雅黑"/>
+              </a:rPr>
+              <a:t>一套让大模型安全处理涉密办公数据的端到端方案</a:t>
+            </a:r>
+          </a:p>
+        </p:txBody>
+      </p:sp>
+      <p:sp>
+        <p:nvSpPr>
+          <p:cNvPr id="5" name="TextBox 4"/>
+          <p:cNvSpPr txBox="1"/>
+          <p:nvPr/>
+        </p:nvSpPr>
+        <p:spPr>
+          <a:xfrm>
+            <a:off x="640080" y="2514600"/>
+            <a:ext cx="1889699" cy="822960"/>
+          </a:xfrm>
+          <a:prstGeom prst="rect">
+            <a:avLst/>
+          </a:prstGeom>
+          <a:noFill/>
+        </p:spPr>
+        <p:txBody>
+          <a:bodyPr wrap="square" anchor="ctr" lIns="0" rIns="0" tIns="0" bIns="0">
+            <a:spAutoFit/>
+          </a:bodyPr>
+          <a:lstStyle/>
+          <a:p>
+            <a:pPr algn="ctr"/>
+            <a:r>
+              <a:rPr sz="3000" b="1">
+                <a:solidFill>
+                  <a:srgbClr val="7EE2A8"/>
+                </a:solidFill>
+                <a:latin typeface="微软雅黑"/>
+                <a:ea typeface="微软雅黑"/>
+                <a:cs typeface="微软雅黑"/>
+              </a:rPr>
+              <a:t>1.6万</a:t>
+            </a:r>
+          </a:p>
+        </p:txBody>
+      </p:sp>
+      <p:sp>
+        <p:nvSpPr>
+          <p:cNvPr id="6" name="TextBox 5"/>
+          <p:cNvSpPr txBox="1"/>
+          <p:nvPr/>
+        </p:nvSpPr>
+        <p:spPr>
+          <a:xfrm>
+            <a:off x="640080" y="3337560"/>
+            <a:ext cx="1889699" cy="365760"/>
+          </a:xfrm>
+          <a:prstGeom prst="rect">
+            <a:avLst/>
+          </a:prstGeom>
+          <a:noFill/>
+        </p:spPr>
+        <p:txBody>
+          <a:bodyPr wrap="square" anchor="t" lIns="0" rIns="0" tIns="0" bIns="0">
+            <a:spAutoFit/>
+          </a:bodyPr>
+          <a:lstStyle/>
+          <a:p>
+            <a:pPr algn="ctr"/>
+            <a:r>
+              <a:rPr sz="1300" b="0">
+                <a:solidFill>
+                  <a:srgbClr val="CFE8DA"/>
+                </a:solidFill>
+                <a:latin typeface="微软雅黑"/>
+                <a:ea typeface="微软雅黑"/>
+                <a:cs typeface="微软雅黑"/>
+              </a:rPr>
+              <a:t>行 Python</a:t>
+            </a:r>
+          </a:p>
+        </p:txBody>
+      </p:sp>
+      <p:sp>
+        <p:nvSpPr>
+          <p:cNvPr id="7" name="TextBox 6"/>
+          <p:cNvSpPr txBox="1"/>
+          <p:nvPr/>
+        </p:nvSpPr>
+        <p:spPr>
+          <a:xfrm>
+            <a:off x="2895539" y="2514600"/>
+            <a:ext cx="1889699" cy="822960"/>
+          </a:xfrm>
+          <a:prstGeom prst="rect">
+            <a:avLst/>
+          </a:prstGeom>
+          <a:noFill/>
+        </p:spPr>
+        <p:txBody>
+          <a:bodyPr wrap="square" anchor="ctr" lIns="0" rIns="0" tIns="0" bIns="0">
+            <a:spAutoFit/>
+          </a:bodyPr>
+          <a:lstStyle/>
+          <a:p>
+            <a:pPr algn="ctr"/>
+            <a:r>
+              <a:rPr sz="3000" b="1">
+                <a:solidFill>
+                  <a:srgbClr val="F0B45C"/>
+                </a:solidFill>
+                <a:latin typeface="微软雅黑"/>
+                <a:ea typeface="微软雅黑"/>
+                <a:cs typeface="微软雅黑"/>
+              </a:rPr>
+              <a:t>27</a:t>
+            </a:r>
+          </a:p>
+        </p:txBody>
+      </p:sp>
+      <p:sp>
+        <p:nvSpPr>
+          <p:cNvPr id="8" name="TextBox 7"/>
+          <p:cNvSpPr txBox="1"/>
+          <p:nvPr/>
+        </p:nvSpPr>
+        <p:spPr>
+          <a:xfrm>
+            <a:off x="2895539" y="3337560"/>
+            <a:ext cx="1889699" cy="365760"/>
+          </a:xfrm>
+          <a:prstGeom prst="rect">
+            <a:avLst/>
+          </a:prstGeom>
+          <a:noFill/>
+        </p:spPr>
+        <p:txBody>
+          <a:bodyPr wrap="square" anchor="t" lIns="0" rIns="0" tIns="0" bIns="0">
+            <a:spAutoFit/>
+          </a:bodyPr>
+          <a:lstStyle/>
+          <a:p>
+            <a:pPr algn="ctr"/>
+            <a:r>
+              <a:rPr sz="1300" b="0">
+                <a:solidFill>
+                  <a:srgbClr val="CFE8DA"/>
+                </a:solidFill>
+                <a:latin typeface="微软雅黑"/>
+                <a:ea typeface="微软雅黑"/>
+                <a:cs typeface="微软雅黑"/>
+              </a:rPr>
+              <a:t>类实体脱敏</a:t>
+            </a:r>
+          </a:p>
+        </p:txBody>
+      </p:sp>
+      <p:sp>
+        <p:nvSpPr>
+          <p:cNvPr id="9" name="TextBox 8"/>
+          <p:cNvSpPr txBox="1"/>
+          <p:nvPr/>
+        </p:nvSpPr>
+        <p:spPr>
+          <a:xfrm>
+            <a:off x="5150998" y="2514600"/>
+            <a:ext cx="1889699" cy="822960"/>
+          </a:xfrm>
+          <a:prstGeom prst="rect">
+            <a:avLst/>
+          </a:prstGeom>
+          <a:noFill/>
+        </p:spPr>
+        <p:txBody>
+          <a:bodyPr wrap="square" anchor="ctr" lIns="0" rIns="0" tIns="0" bIns="0">
+            <a:spAutoFit/>
+          </a:bodyPr>
+          <a:lstStyle/>
+          <a:p>
+            <a:pPr algn="ctr"/>
+            <a:r>
+              <a:rPr sz="3000" b="1">
+                <a:solidFill>
+                  <a:srgbClr val="7EE2A8"/>
+                </a:solidFill>
+                <a:latin typeface="微软雅黑"/>
+                <a:ea typeface="微软雅黑"/>
+                <a:cs typeface="微软雅黑"/>
+              </a:rPr>
+              <a:t>4</a:t>
+            </a:r>
+          </a:p>
+        </p:txBody>
+      </p:sp>
+      <p:sp>
+        <p:nvSpPr>
+          <p:cNvPr id="10" name="TextBox 9"/>
+          <p:cNvSpPr txBox="1"/>
+          <p:nvPr/>
+        </p:nvSpPr>
+        <p:spPr>
+          <a:xfrm>
+            <a:off x="5150998" y="3337560"/>
+            <a:ext cx="1889699" cy="365760"/>
+          </a:xfrm>
+          <a:prstGeom prst="rect">
+            <a:avLst/>
+          </a:prstGeom>
+          <a:noFill/>
+        </p:spPr>
+        <p:txBody>
+          <a:bodyPr wrap="square" anchor="t" lIns="0" rIns="0" tIns="0" bIns="0">
+            <a:spAutoFit/>
+          </a:bodyPr>
+          <a:lstStyle/>
+          <a:p>
+            <a:pPr algn="ctr"/>
+            <a:r>
+              <a:rPr sz="1300" b="0">
+                <a:solidFill>
+                  <a:srgbClr val="CFE8DA"/>
+                </a:solidFill>
+                <a:latin typeface="微软雅黑"/>
+                <a:ea typeface="微软雅黑"/>
+                <a:cs typeface="微软雅黑"/>
+              </a:rPr>
+              <a:t>层纵深防御</a:t>
+            </a:r>
+          </a:p>
+        </p:txBody>
+      </p:sp>
+      <p:sp>
+        <p:nvSpPr>
+          <p:cNvPr id="11" name="TextBox 10"/>
+          <p:cNvSpPr txBox="1"/>
+          <p:nvPr/>
+        </p:nvSpPr>
+        <p:spPr>
+          <a:xfrm>
+            <a:off x="7406457" y="2514600"/>
+            <a:ext cx="1889699" cy="822960"/>
+          </a:xfrm>
+          <a:prstGeom prst="rect">
+            <a:avLst/>
+          </a:prstGeom>
+          <a:noFill/>
+        </p:spPr>
+        <p:txBody>
+          <a:bodyPr wrap="square" anchor="ctr" lIns="0" rIns="0" tIns="0" bIns="0">
+            <a:spAutoFit/>
+          </a:bodyPr>
+          <a:lstStyle/>
+          <a:p>
+            <a:pPr algn="ctr"/>
+            <a:r>
+              <a:rPr sz="3000" b="1">
+                <a:solidFill>
+                  <a:srgbClr val="F0B45C"/>
+                </a:solidFill>
+                <a:latin typeface="微软雅黑"/>
+                <a:ea typeface="微软雅黑"/>
+                <a:cs typeface="微软雅黑"/>
+              </a:rPr>
+              <a:t>20+</a:t>
+            </a:r>
+          </a:p>
+        </p:txBody>
+      </p:sp>
+      <p:sp>
+        <p:nvSpPr>
+          <p:cNvPr id="12" name="TextBox 11"/>
+          <p:cNvSpPr txBox="1"/>
+          <p:nvPr/>
+        </p:nvSpPr>
+        <p:spPr>
+          <a:xfrm>
+            <a:off x="7406457" y="3337560"/>
+            <a:ext cx="1889699" cy="365760"/>
+          </a:xfrm>
+          <a:prstGeom prst="rect">
+            <a:avLst/>
+          </a:prstGeom>
+          <a:noFill/>
+        </p:spPr>
+        <p:txBody>
+          <a:bodyPr wrap="square" anchor="t" lIns="0" rIns="0" tIns="0" bIns="0">
+            <a:spAutoFit/>
+          </a:bodyPr>
+          <a:lstStyle/>
+          <a:p>
+            <a:pPr algn="ctr"/>
+            <a:r>
+              <a:rPr sz="1300" b="0">
+                <a:solidFill>
+                  <a:srgbClr val="CFE8DA"/>
+                </a:solidFill>
+                <a:latin typeface="微软雅黑"/>
+                <a:ea typeface="微软雅黑"/>
+                <a:cs typeface="微软雅黑"/>
+              </a:rPr>
+              <a:t>项安全修复</a:t>
+            </a:r>
+          </a:p>
+        </p:txBody>
+      </p:sp>
+      <p:sp>
+        <p:nvSpPr>
+          <p:cNvPr id="13" name="TextBox 12"/>
+          <p:cNvSpPr txBox="1"/>
+          <p:nvPr/>
+        </p:nvSpPr>
+        <p:spPr>
+          <a:xfrm>
+            <a:off x="9661916" y="2514600"/>
+            <a:ext cx="1889699" cy="822960"/>
+          </a:xfrm>
+          <a:prstGeom prst="rect">
+            <a:avLst/>
+          </a:prstGeom>
+          <a:noFill/>
+        </p:spPr>
+        <p:txBody>
+          <a:bodyPr wrap="square" anchor="ctr" lIns="0" rIns="0" tIns="0" bIns="0">
+            <a:spAutoFit/>
+          </a:bodyPr>
+          <a:lstStyle/>
+          <a:p>
+            <a:pPr algn="ctr"/>
+            <a:r>
+              <a:rPr sz="3000" b="1">
+                <a:solidFill>
+                  <a:srgbClr val="7EE2A8"/>
+                </a:solidFill>
+                <a:latin typeface="微软雅黑"/>
+                <a:ea typeface="微软雅黑"/>
+                <a:cs typeface="微软雅黑"/>
+              </a:rPr>
+              <a:t>8</a:t>
+            </a:r>
+          </a:p>
+        </p:txBody>
+      </p:sp>
+      <p:sp>
+        <p:nvSpPr>
+          <p:cNvPr id="14" name="TextBox 13"/>
+          <p:cNvSpPr txBox="1"/>
+          <p:nvPr/>
+        </p:nvSpPr>
+        <p:spPr>
+          <a:xfrm>
+            <a:off x="9661916" y="3337560"/>
+            <a:ext cx="1889699" cy="365760"/>
+          </a:xfrm>
+          <a:prstGeom prst="rect">
+            <a:avLst/>
+          </a:prstGeom>
+          <a:noFill/>
+        </p:spPr>
+        <p:txBody>
+          <a:bodyPr wrap="square" anchor="t" lIns="0" rIns="0" tIns="0" bIns="0">
+            <a:spAutoFit/>
+          </a:bodyPr>
+          <a:lstStyle/>
+          <a:p>
+            <a:pPr algn="ctr"/>
+            <a:r>
+              <a:rPr sz="1300" b="0">
+                <a:solidFill>
+                  <a:srgbClr val="CFE8DA"/>
+                </a:solidFill>
+                <a:latin typeface="微软雅黑"/>
+                <a:ea typeface="微软雅黑"/>
+                <a:cs typeface="微软雅黑"/>
+              </a:rPr>
+              <a:t>套件回归通过</a:t>
+            </a:r>
+          </a:p>
+        </p:txBody>
+      </p:sp>
+      <p:sp>
+        <p:nvSpPr>
+          <p:cNvPr id="15" name="Rectangle 14"/>
+          <p:cNvSpPr/>
+          <p:nvPr/>
+        </p:nvSpPr>
+        <p:spPr>
+          <a:xfrm>
+            <a:off x="640080" y="3977639"/>
+            <a:ext cx="10911535" cy="18288"/>
+          </a:xfrm>
+          <a:prstGeom prst="rect">
+            <a:avLst/>
+          </a:prstGeom>
+          <a:solidFill>
+            <a:srgbClr val="2E6B50"/>
+          </a:solidFill>
+          <a:ln>
+            <a:noFill/>
+          </a:ln>
+          <a:effectLst/>
+        </p:spPr>
+        <p:style>
+          <a:lnRef idx="1">
+            <a:schemeClr val="accent1"/>
+          </a:lnRef>
+          <a:fillRef idx="3">
+            <a:schemeClr val="accent1"/>
+          </a:fillRef>
+          <a:effectRef idx="2">
+            <a:schemeClr val="accent1"/>
+          </a:effectRef>
+          <a:fontRef idx="minor">
+            <a:schemeClr val="lt1"/>
+          </a:fontRef>
+        </p:style>
+        <p:txBody>
+          <a:bodyPr rtlCol="0" anchor="ctr"/>
+          <a:lstStyle/>
+          <a:p>
+            <a:pPr algn="ctr"/>
+          </a:p>
+        </p:txBody>
+      </p:sp>
+      <p:sp>
+        <p:nvSpPr>
+          <p:cNvPr id="16" name="TextBox 15"/>
+          <p:cNvSpPr txBox="1"/>
+          <p:nvPr/>
+        </p:nvSpPr>
+        <p:spPr>
+          <a:xfrm>
+            <a:off x="640080" y="4251960"/>
+            <a:ext cx="5669280" cy="1828800"/>
+          </a:xfrm>
+          <a:prstGeom prst="rect">
+            <a:avLst/>
+          </a:prstGeom>
+          <a:noFill/>
+        </p:spPr>
+        <p:txBody>
+          <a:bodyPr wrap="square" anchor="t" lIns="0" rIns="0" tIns="0" bIns="0">
+            <a:spAutoFit/>
+          </a:bodyPr>
+          <a:lstStyle/>
+          <a:p>
+            <a:pPr algn="l">
+              <a:spcAft>
+                <a:spcPts val="600"/>
+              </a:spcAft>
+            </a:pPr>
+            <a:r>
+              <a:rPr sz="1500" b="1">
+                <a:solidFill>
+                  <a:srgbClr val="7EE2A8"/>
+                </a:solidFill>
+                <a:latin typeface="微软雅黑"/>
+                <a:ea typeface="微软雅黑"/>
+                <a:cs typeface="微软雅黑"/>
+              </a:rPr>
+              <a:t>下一步</a:t>
+            </a:r>
+          </a:p>
+          <a:p>
+            <a:pPr algn="l">
+              <a:spcAft>
+                <a:spcPts val="600"/>
+              </a:spcAft>
+            </a:pPr>
+            <a:r>
+              <a:rPr sz="1350" b="1">
+                <a:solidFill>
+                  <a:srgbClr val="F0B45C"/>
+                </a:solidFill>
+                <a:latin typeface="微软雅黑"/>
+                <a:ea typeface="微软雅黑"/>
+                <a:cs typeface="微软雅黑"/>
+              </a:rPr>
+              <a:t>▸  </a:t>
+            </a:r>
+            <a:r>
+              <a:rPr sz="1350" b="0">
+                <a:solidFill>
+                  <a:srgbClr val="EAF5EF"/>
+                </a:solidFill>
+                <a:latin typeface="微软雅黑"/>
+                <a:ea typeface="微软雅黑"/>
+                <a:cs typeface="微软雅黑"/>
+              </a:rPr>
+              <a:t>工具调用结果二次核验，杜绝幻觉式假成功</a:t>
+            </a:r>
+          </a:p>
+          <a:p>
+            <a:pPr algn="l">
+              <a:spcAft>
+                <a:spcPts val="600"/>
+              </a:spcAft>
+            </a:pPr>
+            <a:r>
+              <a:rPr sz="1350" b="1">
+                <a:solidFill>
+                  <a:srgbClr val="F0B45C"/>
+                </a:solidFill>
+                <a:latin typeface="微软雅黑"/>
+                <a:ea typeface="微软雅黑"/>
+                <a:cs typeface="微软雅黑"/>
+              </a:rPr>
+              <a:t>▸  </a:t>
+            </a:r>
+            <a:r>
+              <a:rPr sz="1350" b="0">
+                <a:solidFill>
+                  <a:srgbClr val="EAF5EF"/>
+                </a:solidFill>
+                <a:latin typeface="微软雅黑"/>
+                <a:ea typeface="微软雅黑"/>
+                <a:cs typeface="微软雅黑"/>
+              </a:rPr>
+              <a:t>审计链头外部锚定，抵御整体重算哈希链</a:t>
+            </a:r>
+          </a:p>
+          <a:p>
+            <a:pPr algn="l">
+              <a:spcAft>
+                <a:spcPts val="600"/>
+              </a:spcAft>
+            </a:pPr>
+            <a:r>
+              <a:rPr sz="1350" b="1">
+                <a:solidFill>
+                  <a:srgbClr val="F0B45C"/>
+                </a:solidFill>
+                <a:latin typeface="微软雅黑"/>
+                <a:ea typeface="微软雅黑"/>
+                <a:cs typeface="微软雅黑"/>
+              </a:rPr>
+              <a:t>▸  </a:t>
+            </a:r>
+            <a:r>
+              <a:rPr sz="1350" b="0">
+                <a:solidFill>
+                  <a:srgbClr val="EAF5EF"/>
+                </a:solidFill>
+                <a:latin typeface="微软雅黑"/>
+                <a:ea typeface="微软雅黑"/>
+                <a:cs typeface="微软雅黑"/>
+              </a:rPr>
+              <a:t>策略引擎规则可视化编辑</a:t>
+            </a:r>
+          </a:p>
+          <a:p>
+            <a:pPr algn="l">
+              <a:spcAft>
+                <a:spcPts val="600"/>
+              </a:spcAft>
+            </a:pPr>
+            <a:r>
+              <a:rPr sz="1350" b="1">
+                <a:solidFill>
+                  <a:srgbClr val="F0B45C"/>
+                </a:solidFill>
+                <a:latin typeface="微软雅黑"/>
+                <a:ea typeface="微软雅黑"/>
+                <a:cs typeface="微软雅黑"/>
+              </a:rPr>
+              <a:t>▸  </a:t>
+            </a:r>
+            <a:r>
+              <a:rPr sz="1350" b="0">
+                <a:solidFill>
+                  <a:srgbClr val="EAF5EF"/>
+                </a:solidFill>
+                <a:latin typeface="微软雅黑"/>
+                <a:ea typeface="微软雅黑"/>
+                <a:cs typeface="微软雅黑"/>
+              </a:rPr>
+              <a:t>CI 接入 bandit/semgrep 静态安全扫描</a:t>
+            </a:r>
+          </a:p>
+        </p:txBody>
+      </p:sp>
+      <p:sp>
+        <p:nvSpPr>
+          <p:cNvPr id="17" name="TextBox 16"/>
+          <p:cNvSpPr txBox="1"/>
+          <p:nvPr/>
+        </p:nvSpPr>
+        <p:spPr>
+          <a:xfrm>
+            <a:off x="6675120" y="4434840"/>
+            <a:ext cx="4846320" cy="1463040"/>
+          </a:xfrm>
+          <a:prstGeom prst="rect">
+            <a:avLst/>
+          </a:prstGeom>
+          <a:noFill/>
+        </p:spPr>
+        <p:txBody>
+          <a:bodyPr wrap="square" anchor="ctr" lIns="0" rIns="0" tIns="0" bIns="0">
+            <a:spAutoFit/>
+          </a:bodyPr>
+          <a:lstStyle/>
+          <a:p>
+            <a:pPr algn="r"/>
+            <a:r>
+              <a:rPr sz="2400" b="1">
+                <a:solidFill>
+                  <a:srgbClr val="FFFFFF"/>
+                </a:solidFill>
+                <a:latin typeface="微软雅黑"/>
+                <a:ea typeface="微软雅黑"/>
+                <a:cs typeface="微软雅黑"/>
+              </a:rPr>
+              <a:t>让本地 AI</a:t>
+            </a:r>
+          </a:p>
+          <a:p>
+            <a:pPr algn="r"/>
+            <a:r>
+              <a:rPr sz="2400" b="1">
+                <a:solidFill>
+                  <a:srgbClr val="7EE2A8"/>
+                </a:solidFill>
+                <a:latin typeface="微软雅黑"/>
+                <a:ea typeface="微软雅黑"/>
+                <a:cs typeface="微软雅黑"/>
+              </a:rPr>
+              <a:t>更安全 · 更智能 · 更可控</a:t>
+            </a:r>
+          </a:p>
+        </p:txBody>
+      </p:sp>
+      <p:sp>
+        <p:nvSpPr>
+          <p:cNvPr id="18" name="TextBox 17"/>
+          <p:cNvSpPr txBox="1"/>
+          <p:nvPr/>
+        </p:nvSpPr>
+        <p:spPr>
+          <a:xfrm>
+            <a:off x="640080" y="6309360"/>
+            <a:ext cx="10911535" cy="365760"/>
+          </a:xfrm>
+          <a:prstGeom prst="rect">
+            <a:avLst/>
+          </a:prstGeom>
+          <a:noFill/>
+        </p:spPr>
+        <p:txBody>
+          <a:bodyPr wrap="square" anchor="t" lIns="0" rIns="0" tIns="0" bIns="0">
+            <a:spAutoFit/>
+          </a:bodyPr>
+          <a:lstStyle/>
+          <a:p>
+            <a:pPr algn="l"/>
+            <a:r>
+              <a:rPr sz="1100" b="0">
+                <a:solidFill>
+                  <a:srgbClr val="6E9C86"/>
+                </a:solidFill>
+                <a:latin typeface="微软雅黑"/>
+                <a:ea typeface="微软雅黑"/>
+                <a:cs typeface="微软雅黑"/>
+              </a:rPr>
+              <a:t>隐盾安全智能体 · Yindun Team · 2026    |    技术报告 · 仅供学习研究</a:t>
             </a:r>
           </a:p>
         </p:txBody>

--- a/docs/隐盾安全智能体_项目汇报.pptx
+++ b/docs/隐盾安全智能体_项目汇报.pptx
@@ -9951,7 +9951,7 @@
                 <a:ea typeface="微软雅黑"/>
                 <a:cs typeface="微软雅黑"/>
               </a:rPr>
-              <a:t>内置 5 个插件（默认关闭，按需启用；启停与配置改动均写审计）</a:t>
+              <a:t>内置 6 个插件（默认关闭，按需启用；启停与配置改动均写审计）</a:t>
             </a:r>
           </a:p>
         </p:txBody>
@@ -12265,7 +12265,7 @@
                 <a:ea typeface="微软雅黑"/>
                 <a:cs typeface="微软雅黑"/>
               </a:rPr>
-              <a:t>8 个测试套件 · 全部通过（含攻防评测 9 项实验）</a:t>
+              <a:t>18 个测试套件 · 全部通过（含攻防评测 9 项实验）</a:t>
             </a:r>
           </a:p>
         </p:txBody>
@@ -14727,7 +14727,7 @@
                 <a:ea typeface="微软雅黑"/>
                 <a:cs typeface="微软雅黑"/>
               </a:rPr>
-              <a:t>8</a:t>
+              <a:t>18</a:t>
             </a:r>
           </a:p>
         </p:txBody>

--- a/docs/隐盾安全智能体_项目汇报.pptx
+++ b/docs/隐盾安全智能体_项目汇报.pptx
@@ -8323,7 +8323,7 @@
         <p:spPr>
           <a:xfrm>
             <a:off x="640080" y="1691640"/>
-            <a:ext cx="5394960" cy="3972213"/>
+            <a:ext cx="6766560" cy="4748828"/>
           </a:xfrm>
           <a:prstGeom prst="roundRect">
             <a:avLst>
@@ -8384,7 +8384,7 @@
         <p:spPr>
           <a:xfrm>
             <a:off x="768096" y="1819656"/>
-            <a:ext cx="5138928" cy="3539820"/>
+            <a:ext cx="6510528" cy="4322799"/>
           </a:xfrm>
           <a:prstGeom prst="rect">
             <a:avLst/>
@@ -8399,8 +8399,8 @@
         </p:nvSpPr>
         <p:spPr>
           <a:xfrm>
-            <a:off x="640080" y="5718717"/>
-            <a:ext cx="5394960" cy="365760"/>
+            <a:off x="640080" y="6495332"/>
+            <a:ext cx="6766560" cy="365760"/>
           </a:xfrm>
           <a:prstGeom prst="rect">
             <a:avLst/>
@@ -8423,98 +8423,21 @@
                 <a:ea typeface="微软雅黑"/>
                 <a:cs typeface="微软雅黑"/>
               </a:rPr>
-              <a:t>① 3 篇文档入库（入库即逐块脱敏），向量库零明文</a:t>
-            </a:r>
-          </a:p>
-        </p:txBody>
-      </p:sp>
-      <p:sp>
-        <p:nvSpPr>
-          <p:cNvPr id="8" name="Rounded Rectangle 7"/>
-          <p:cNvSpPr/>
-          <p:nvPr/>
-        </p:nvSpPr>
-        <p:spPr>
-          <a:xfrm>
-            <a:off x="6172200" y="1691640"/>
-            <a:ext cx="5394960" cy="3915800"/>
-          </a:xfrm>
-          <a:prstGeom prst="roundRect">
-            <a:avLst>
-              <a:gd name="adj" fmla="val 3000"/>
-            </a:avLst>
-          </a:prstGeom>
-          <a:solidFill>
-            <a:srgbClr val="FFFFFF"/>
-          </a:solidFill>
-          <a:ln>
-            <a:noFill/>
-          </a:ln>
-          <a:effectLst/>
-          <a:effectLst>
-            <a:outerShdw blurRad="101600" dist="25400" dir="5400000" rotWithShape="0">
-              <a:srgbClr val="0B2A1E">
-                <a:alpha val="14000"/>
-              </a:srgbClr>
-            </a:outerShdw>
-          </a:effectLst>
-        </p:spPr>
-        <p:style>
-          <a:lnRef idx="1">
-            <a:schemeClr val="accent1"/>
-          </a:lnRef>
-          <a:fillRef idx="3">
-            <a:schemeClr val="accent1"/>
-          </a:fillRef>
-          <a:effectRef idx="2">
-            <a:schemeClr val="accent1"/>
-          </a:effectRef>
-          <a:fontRef idx="minor">
-            <a:schemeClr val="lt1"/>
-          </a:fontRef>
-        </p:style>
-        <p:txBody>
-          <a:bodyPr rtlCol="0" anchor="ctr"/>
-          <a:lstStyle/>
-          <a:p>
-            <a:pPr algn="ctr"/>
-          </a:p>
-        </p:txBody>
-      </p:sp>
-      <p:pic>
-        <p:nvPicPr>
-          <p:cNvPr id="9" name="Picture 8" descr="08_知识库检索回答.png"/>
-          <p:cNvPicPr>
-            <a:picLocks noChangeAspect="1"/>
-          </p:cNvPicPr>
-          <p:nvPr/>
-        </p:nvPicPr>
-        <p:blipFill>
-          <a:blip r:embed="rId3"/>
-          <a:stretch>
-            <a:fillRect/>
-          </a:stretch>
-        </p:blipFill>
-        <p:spPr>
-          <a:xfrm>
-            <a:off x="6300216" y="1819656"/>
-            <a:ext cx="5138928" cy="3486084"/>
-          </a:xfrm>
-          <a:prstGeom prst="rect">
-            <a:avLst/>
-          </a:prstGeom>
-        </p:spPr>
-      </p:pic>
-      <p:sp>
-        <p:nvSpPr>
-          <p:cNvPr id="10" name="TextBox 9"/>
-          <p:cNvSpPr txBox="1"/>
-          <p:nvPr/>
-        </p:nvSpPr>
-        <p:spPr>
-          <a:xfrm>
-            <a:off x="6172200" y="5662304"/>
-            <a:ext cx="5394960" cy="365760"/>
+              <a:t>文档入库即逐块脱敏（实拍：5 篇文档 / 8 个片段，向量库零明文）</a:t>
+            </a:r>
+          </a:p>
+        </p:txBody>
+      </p:sp>
+      <p:sp>
+        <p:nvSpPr>
+          <p:cNvPr id="8" name="TextBox 7"/>
+          <p:cNvSpPr txBox="1"/>
+          <p:nvPr/>
+        </p:nvSpPr>
+        <p:spPr>
+          <a:xfrm>
+            <a:off x="640080" y="4892040"/>
+            <a:ext cx="10911535" cy="1234440"/>
           </a:xfrm>
           <a:prstGeom prst="rect">
             <a:avLst/>
@@ -8527,43 +8450,6 @@
           </a:bodyPr>
           <a:lstStyle/>
           <a:p>
-            <a:pPr algn="ctr"/>
-            <a:r>
-              <a:rPr sz="1150" b="0">
-                <a:solidFill>
-                  <a:srgbClr val="6B7A72"/>
-                </a:solidFill>
-                <a:latin typeface="微软雅黑"/>
-                <a:ea typeface="微软雅黑"/>
-                <a:cs typeface="微软雅黑"/>
-              </a:rPr>
-              <a:t>② 检索命中占位符 → 输出层还原真实值呈现</a:t>
-            </a:r>
-          </a:p>
-        </p:txBody>
-      </p:sp>
-      <p:sp>
-        <p:nvSpPr>
-          <p:cNvPr id="11" name="TextBox 10"/>
-          <p:cNvSpPr txBox="1"/>
-          <p:nvPr/>
-        </p:nvSpPr>
-        <p:spPr>
-          <a:xfrm>
-            <a:off x="640080" y="6263640"/>
-            <a:ext cx="10911535" cy="457200"/>
-          </a:xfrm>
-          <a:prstGeom prst="rect">
-            <a:avLst/>
-          </a:prstGeom>
-          <a:noFill/>
-        </p:spPr>
-        <p:txBody>
-          <a:bodyPr wrap="square" anchor="t" lIns="0" rIns="0" tIns="0" bIns="0">
-            <a:spAutoFit/>
-          </a:bodyPr>
-          <a:lstStyle/>
-          <a:p>
             <a:pPr algn="l"/>
             <a:r>
               <a:rPr sz="1300" b="1">
@@ -8574,7 +8460,7 @@
                 <a:ea typeface="微软雅黑"/>
                 <a:cs typeface="微软雅黑"/>
               </a:rPr>
-              <a:t>闭环要点：</a:t>
+              <a:t>① 入库即脱敏：</a:t>
             </a:r>
             <a:r>
               <a:rPr sz="1300" b="0">
@@ -8585,14 +8471,64 @@
                 <a:ea typeface="微软雅黑"/>
                 <a:cs typeface="微软雅黑"/>
               </a:rPr>
-              <a:t>模型全程只接触占位符；真实值仅在本地输出层还原，云端/向量库/审计均无明文。</a:t>
-            </a:r>
-          </a:p>
-        </p:txBody>
-      </p:sp>
-      <p:sp>
-        <p:nvSpPr>
-          <p:cNvPr id="12" name="TextBox 11"/>
+              <a:t>整篇先脱敏再切块，向量库只存占位符（长实体不被切碎成明文碎片）。</a:t>
+            </a:r>
+          </a:p>
+          <a:p>
+            <a:pPr algn="l"/>
+            <a:r>
+              <a:rPr sz="1300" b="1">
+                <a:solidFill>
+                  <a:srgbClr val="0E7A4F"/>
+                </a:solidFill>
+                <a:latin typeface="微软雅黑"/>
+                <a:ea typeface="微软雅黑"/>
+                <a:cs typeface="微软雅黑"/>
+              </a:rPr>
+              <a:t>② 检索与还原：</a:t>
+            </a:r>
+            <a:r>
+              <a:rPr sz="1300" b="0">
+                <a:solidFill>
+                  <a:srgbClr val="1A2332"/>
+                </a:solidFill>
+                <a:latin typeface="微软雅黑"/>
+                <a:ea typeface="微软雅黑"/>
+                <a:cs typeface="微软雅黑"/>
+              </a:rPr>
+              <a:t>命中片段以占位符形态送入模型（本地或外部算力，出网亦无明文），回答中的占位符由输出层在本机还原为真实值。</a:t>
+            </a:r>
+          </a:p>
+          <a:p>
+            <a:pPr algn="l"/>
+            <a:r>
+              <a:rPr sz="1300" b="1">
+                <a:solidFill>
+                  <a:srgbClr val="0E7A4F"/>
+                </a:solidFill>
+                <a:latin typeface="微软雅黑"/>
+                <a:ea typeface="微软雅黑"/>
+                <a:cs typeface="微软雅黑"/>
+              </a:rPr>
+              <a:t>③ 验证口径：</a:t>
+            </a:r>
+            <a:r>
+              <a:rPr sz="1300" b="0">
+                <a:solidFill>
+                  <a:srgbClr val="1A2332"/>
+                </a:solidFill>
+                <a:latin typeface="微软雅黑"/>
+                <a:ea typeface="微软雅黑"/>
+                <a:cs typeface="微软雅黑"/>
+              </a:rPr>
+              <a:t>回归 test_kb_pipeline + 本地 E2E（检索工具被真实调用）；外部模型自行改写占位符编号时该片段以占位符原样显示（已知边界）。</a:t>
+            </a:r>
+          </a:p>
+        </p:txBody>
+      </p:sp>
+      <p:sp>
+        <p:nvSpPr>
+          <p:cNvPr id="9" name="TextBox 8"/>
           <p:cNvSpPr txBox="1"/>
           <p:nvPr/>
         </p:nvSpPr>

--- a/docs/隐盾安全智能体_项目汇报.pptx
+++ b/docs/隐盾安全智能体_项目汇报.pptx
@@ -3564,7 +3564,7 @@
                 <a:ea typeface="微软雅黑"/>
                 <a:cs typeface="微软雅黑"/>
               </a:rPr>
-              <a:t>    ·    V3.4    ·    LangChain · pywebview/WebView2 · 本地/云端双算力    ·    2026</a:t>
+              <a:t>    ·    V3.4.5    ·    LangChain · pywebview/WebView2 · 本地/云端双算力    ·    2026</a:t>
             </a:r>
           </a:p>
         </p:txBody>
@@ -5457,7 +5457,7 @@
                 <a:ea typeface="微软雅黑"/>
                 <a:cs typeface="微软雅黑"/>
               </a:rPr>
-              <a:t>仅 python/pip/git/echo</a:t>
+              <a:t>仅 python/pip/git/echo；Job Object 进程容器</a:t>
             </a:r>
           </a:p>
           <a:p>
@@ -5478,7 +5478,7 @@
                 <a:ea typeface="微软雅黑"/>
                 <a:cs typeface="微软雅黑"/>
               </a:rPr>
-              <a:t>shlex + shell=False + 子命令级校验（封堵内联代码/安装入口）</a:t>
+              <a:t>子命令级校验 + 严格模式可禁用解释器</a:t>
             </a:r>
           </a:p>
         </p:txBody>
@@ -5758,7 +5758,28 @@
                 <a:ea typeface="微软雅黑"/>
                 <a:cs typeface="微软雅黑"/>
               </a:rPr>
-              <a:t>强制人工二次确认，超时自动驳回</a:t>
+              <a:t>弹窗展示待执行内容与脚本预览</a:t>
+            </a:r>
+          </a:p>
+          <a:p>
+            <a:pPr algn="ctr">
+              <a:lnSpc>
+                <a:spcPct val="110000"/>
+              </a:lnSpc>
+              <a:spcAft>
+                <a:spcPts val="300"/>
+              </a:spcAft>
+            </a:pPr>
+            <a:r>
+              <a:rPr sz="1250" b="0">
+                <a:solidFill>
+                  <a:srgbClr val="1A2332"/>
+                </a:solidFill>
+                <a:latin typeface="微软雅黑"/>
+                <a:ea typeface="微软雅黑"/>
+                <a:cs typeface="微软雅黑"/>
+              </a:rPr>
+              <a:t>人工二次确认，超时自动驳回</a:t>
             </a:r>
           </a:p>
         </p:txBody>
@@ -12201,7 +12222,7 @@
                 <a:ea typeface="微软雅黑"/>
                 <a:cs typeface="微软雅黑"/>
               </a:rPr>
-              <a:t>18 个测试套件 · 全部通过（含攻防评测 9 项实验）</a:t>
+              <a:t>20 个测试套件 · 全部通过（含攻防评测 9 项实验）</a:t>
             </a:r>
           </a:p>
         </p:txBody>
@@ -12284,7 +12305,7 @@
                 <a:ea typeface="微软雅黑"/>
                 <a:cs typeface="微软雅黑"/>
               </a:rPr>
-              <a:t>隐私引擎</a:t>
+              <a:t>隐私引擎 + 回归</a:t>
             </a:r>
           </a:p>
         </p:txBody>
@@ -12321,7 +12342,7 @@
                 <a:ea typeface="微软雅黑"/>
                 <a:cs typeface="微软雅黑"/>
               </a:rPr>
-              <a:t>实体/脱敏/还原/nonce/strict</a:t>
+              <a:t>27 类实体；泄露 0 / 误伤 0 / 落盘扫描</a:t>
             </a:r>
           </a:p>
         </p:txBody>
@@ -12441,7 +12462,7 @@
                 <a:ea typeface="微软雅黑"/>
                 <a:cs typeface="微软雅黑"/>
               </a:rPr>
-              <a:t>审计黑匣子</a:t>
+              <a:t>对抗集 + 真实文档</a:t>
             </a:r>
           </a:p>
         </p:txBody>
@@ -12478,7 +12499,7 @@
                 <a:ea typeface="微软雅黑"/>
                 <a:cs typeface="微软雅黑"/>
               </a:rPr>
-              <a:t>哈希链/防篡改/一致性 14/14</a:t>
+              <a:t>14 项格式变体；8 种真实格式全链路</a:t>
             </a:r>
           </a:p>
         </p:txBody>
@@ -12598,7 +12619,7 @@
                 <a:ea typeface="微软雅黑"/>
                 <a:cs typeface="微软雅黑"/>
               </a:rPr>
-              <a:t>记忆管理</a:t>
+              <a:t>审计黑匣子</a:t>
             </a:r>
           </a:p>
         </p:txBody>
@@ -12635,7 +12656,7 @@
                 <a:ea typeface="微软雅黑"/>
                 <a:cs typeface="微软雅黑"/>
               </a:rPr>
-              <a:t>摘要/跨轮还原/序列化 6/6</a:t>
+              <a:t>哈希链 + 链锚点 19/19</a:t>
             </a:r>
           </a:p>
         </p:txBody>
@@ -12755,7 +12776,7 @@
                 <a:ea typeface="微软雅黑"/>
                 <a:cs typeface="微软雅黑"/>
               </a:rPr>
-              <a:t>工作流 + 知识库</a:t>
+              <a:t>命令白名单</a:t>
             </a:r>
           </a:p>
         </p:txBody>
@@ -12792,7 +12813,7 @@
                 <a:ea typeface="微软雅黑"/>
                 <a:cs typeface="微软雅黑"/>
               </a:rPr>
-              <a:t>执行/审批链/导出；入库检索零明文</a:t>
+              <a:t>高危入口全拦截 + 进程容器 + 严格模式</a:t>
             </a:r>
           </a:p>
         </p:txBody>
@@ -12912,7 +12933,7 @@
                 <a:ea typeface="微软雅黑"/>
                 <a:cs typeface="微软雅黑"/>
               </a:rPr>
-              <a:t>白名单（新增）</a:t>
+              <a:t>插件 + 记忆 + 工作流</a:t>
             </a:r>
           </a:p>
         </p:txBody>
@@ -12949,7 +12970,7 @@
                 <a:ea typeface="微软雅黑"/>
                 <a:cs typeface="微软雅黑"/>
               </a:rPr>
-              <a:t>16 项高危入口全拦截</a:t>
+              <a:t>宿主契约 / 能力端到端 / 执行与导出</a:t>
             </a:r>
           </a:p>
         </p:txBody>
@@ -13069,7 +13090,7 @@
                 <a:ea typeface="微软雅黑"/>
                 <a:cs typeface="微软雅黑"/>
               </a:rPr>
-              <a:t>取消 + 回归（新增）</a:t>
+              <a:t>laya 插件 + 窗口</a:t>
             </a:r>
           </a:p>
         </p:txBody>
@@ -13106,7 +13127,7 @@
                 <a:ea typeface="微软雅黑"/>
                 <a:cs typeface="微软雅黑"/>
               </a:rPr>
-              <a:t>取消 0.33s 返回；泄露 0 / 误伤 0</a:t>
+              <a:t>模型与正则双后端；8 向拖拽锚定</a:t>
             </a:r>
           </a:p>
         </p:txBody>
@@ -14663,7 +14684,7 @@
                 <a:ea typeface="微软雅黑"/>
                 <a:cs typeface="微软雅黑"/>
               </a:rPr>
-              <a:t>18</a:t>
+              <a:t>20</a:t>
             </a:r>
           </a:p>
         </p:txBody>

--- a/docs/隐盾安全智能体_项目汇报.pptx
+++ b/docs/隐盾安全智能体_项目汇报.pptx
@@ -3564,7 +3564,7 @@
                 <a:ea typeface="微软雅黑"/>
                 <a:cs typeface="微软雅黑"/>
               </a:rPr>
-              <a:t>    ·    V3.4.5    ·    LangChain · pywebview/WebView2 · 本地/云端双算力    ·    2026</a:t>
+              <a:t>    ·    V3.4.6    ·    LangChain · pywebview/WebView2 · 本地/云端双算力    ·    2026</a:t>
             </a:r>
           </a:p>
         </p:txBody>
@@ -3713,8 +3713,8 @@
         </p:nvSpPr>
         <p:spPr>
           <a:xfrm>
-            <a:off x="640080" y="1627632"/>
-            <a:ext cx="10911535" cy="320040"/>
+            <a:off x="640080" y="1572768"/>
+            <a:ext cx="10911535" cy="457200"/>
           </a:xfrm>
           <a:prstGeom prst="rect">
             <a:avLst/>
@@ -3727,9 +3727,13 @@
           </a:bodyPr>
           <a:lstStyle/>
           <a:p>
-            <a:pPr algn="l"/>
-            <a:r>
-              <a:rPr sz="1250" b="0">
+            <a:pPr algn="l">
+              <a:lnSpc>
+                <a:spcPct val="110000"/>
+              </a:lnSpc>
+            </a:pPr>
+            <a:r>
+              <a:rPr sz="1200" b="0">
                 <a:solidFill>
                   <a:srgbClr val="6B7A72"/>
                 </a:solidFill>
@@ -3737,7 +3741,25 @@
                 <a:ea typeface="微软雅黑"/>
                 <a:cs typeface="微软雅黑"/>
               </a:rPr>
-              <a:t>13 篇合成办公语料 · 41 个敏感实体实例（含国际前缀/全角/分段卡号/PEM/JWT/IPv6 等边界格式）· 17 个业务数字负样本 · 可一键复现</a:t>
+              <a:t>评测协议：开发集（13 篇，仅作回归基线）与留出集（60 篇 · 280 个注入值）分离，注入值零重合、规则冻结后一次性运行</a:t>
+            </a:r>
+          </a:p>
+          <a:p>
+            <a:pPr algn="l">
+              <a:lnSpc>
+                <a:spcPct val="110000"/>
+              </a:lnSpc>
+            </a:pPr>
+            <a:r>
+              <a:rPr sz="1200" b="1">
+                <a:solidFill>
+                  <a:srgbClr val="E8590C"/>
+                </a:solidFill>
+                <a:latin typeface="微软雅黑"/>
+                <a:ea typeface="微软雅黑"/>
+                <a:cs typeface="微软雅黑"/>
+              </a:rPr>
+              <a:t>两条性质分开陈述：架构保证不依赖识别覆盖率 —— 认出来的绝不出网，认不出来的逐项公开</a:t>
             </a:r>
           </a:p>
         </p:txBody>
@@ -3751,8 +3773,8 @@
           <p:nvPr/>
         </p:nvGraphicFramePr>
         <p:xfrm>
-          <a:off x="640080" y="1965960"/>
-          <a:ext cx="10911535" cy="3383280"/>
+          <a:off x="640080" y="2212848"/>
+          <a:ext cx="10911535" cy="2926080"/>
         </p:xfrm>
         <a:graphic>
           <a:graphicData uri="http://schemas.openxmlformats.org/drawingml/2006/table">
@@ -3761,11 +3783,11 @@
                 <a:tableStyleId>{5C22544A-7EE6-4342-B048-85BDC9FD1C3A}</a:tableStyleId>
               </a:tblPr>
               <a:tblGrid>
-                <a:gridCol w="3108960"/>
-                <a:gridCol w="5029200"/>
+                <a:gridCol w="2468880"/>
+                <a:gridCol w="5669280"/>
                 <a:gridCol w="2773375"/>
               </a:tblGrid>
-              <a:tr h="375920">
+              <a:tr h="365760">
                 <a:tc>
                   <a:txBody>
                     <a:bodyPr/>
@@ -3781,7 +3803,7 @@
                           <a:ea typeface="微软雅黑"/>
                           <a:cs typeface="微软雅黑"/>
                         </a:rPr>
-                        <a:t>实验（威胁）</a:t>
+                        <a:t>性质</a:t>
                       </a:r>
                     </a:p>
                   </a:txBody>
@@ -3842,7 +3864,7 @@
                   </a:tcPr>
                 </a:tc>
               </a:tr>
-              <a:tr h="375920">
+              <a:tr h="365760">
                 <a:tc>
                   <a:txBody>
                     <a:bodyPr/>
@@ -3858,7 +3880,7 @@
                           <a:ea typeface="微软雅黑"/>
                           <a:cs typeface="微软雅黑"/>
                         </a:rPr>
-                        <a:t>黑盒 · 出网泄露</a:t>
+                        <a:t>架构保证 · 出网</a:t>
                       </a:r>
                     </a:p>
                   </a:txBody>
@@ -3883,7 +3905,7 @@
                           <a:ea typeface="微软雅黑"/>
                           <a:cs typeface="微软雅黑"/>
                         </a:rPr>
-                        <a:t>脱敏召回率 / 明文泄露</a:t>
+                        <a:t>已识别实体的出网明文实例</a:t>
                       </a:r>
                     </a:p>
                   </a:txBody>
@@ -3908,7 +3930,7 @@
                           <a:ea typeface="微软雅黑"/>
                           <a:cs typeface="微软雅黑"/>
                         </a:rPr>
-                        <a:t>100%  /  0 例</a:t>
+                        <a:t>0 例</a:t>
                       </a:r>
                     </a:p>
                   </a:txBody>
@@ -3919,7 +3941,7 @@
                   </a:tcPr>
                 </a:tc>
               </a:tr>
-              <a:tr h="375920">
+              <a:tr h="365760">
                 <a:tc>
                   <a:txBody>
                     <a:bodyPr/>
@@ -3935,7 +3957,7 @@
                           <a:ea typeface="微软雅黑"/>
                           <a:cs typeface="微软雅黑"/>
                         </a:rPr>
-                        <a:t>黑盒 · 误伤</a:t>
+                        <a:t>架构保证 · 还原</a:t>
                       </a:r>
                     </a:p>
                   </a:txBody>
@@ -3960,7 +3982,7 @@
                           <a:ea typeface="微软雅黑"/>
                           <a:cs typeface="微软雅黑"/>
                         </a:rPr>
-                        <a:t>业务数字误报率</a:t>
+                        <a:t>往返逐字一致 / 劫持成功</a:t>
                       </a:r>
                     </a:p>
                   </a:txBody>
@@ -3985,7 +4007,7 @@
                           <a:ea typeface="微软雅黑"/>
                           <a:cs typeface="微软雅黑"/>
                         </a:rPr>
-                        <a:t>0%（0/17）</a:t>
+                        <a:t>60/60 · 0（500 轮）</a:t>
                       </a:r>
                     </a:p>
                   </a:txBody>
@@ -3996,7 +4018,7 @@
                   </a:tcPr>
                 </a:tc>
               </a:tr>
-              <a:tr h="375920">
+              <a:tr h="365760">
                 <a:tc>
                   <a:txBody>
                     <a:bodyPr/>
@@ -4012,7 +4034,7 @@
                           <a:ea typeface="微软雅黑"/>
                           <a:cs typeface="微软雅黑"/>
                         </a:rPr>
-                        <a:t>可用性 · 往返</a:t>
+                        <a:t>架构保证 · 落盘</a:t>
                       </a:r>
                     </a:p>
                   </a:txBody>
@@ -4037,161 +4059,7 @@
                           <a:ea typeface="微软雅黑"/>
                           <a:cs typeface="微软雅黑"/>
                         </a:rPr>
-                        <a:t>还原正确率</a:t>
-                      </a:r>
-                    </a:p>
-                  </a:txBody>
-                  <a:tcPr>
-                    <a:solidFill>
-                      <a:srgbClr val="FFFFFF"/>
-                    </a:solidFill>
-                  </a:tcPr>
-                </a:tc>
-                <a:tc>
-                  <a:txBody>
-                    <a:bodyPr/>
-                    <a:lstStyle/>
-                    <a:p>
-                      <a:pPr algn="ctr"/>
-                      <a:r>
-                        <a:rPr sz="1200" b="1">
-                          <a:solidFill>
-                            <a:srgbClr val="0E7A4F"/>
-                          </a:solidFill>
-                          <a:latin typeface="微软雅黑"/>
-                          <a:ea typeface="微软雅黑"/>
-                          <a:cs typeface="微软雅黑"/>
-                        </a:rPr>
-                        <a:t>100%（13/13）</a:t>
-                      </a:r>
-                    </a:p>
-                  </a:txBody>
-                  <a:tcPr>
-                    <a:solidFill>
-                      <a:srgbClr val="FFFFFF"/>
-                    </a:solidFill>
-                  </a:tcPr>
-                </a:tc>
-              </a:tr>
-              <a:tr h="375920">
-                <a:tc>
-                  <a:txBody>
-                    <a:bodyPr/>
-                    <a:lstStyle/>
-                    <a:p>
-                      <a:pPr algn="l"/>
-                      <a:r>
-                        <a:rPr sz="1200" b="0">
-                          <a:solidFill>
-                            <a:srgbClr val="1A2332"/>
-                          </a:solidFill>
-                          <a:latin typeface="微软雅黑"/>
-                          <a:ea typeface="微软雅黑"/>
-                          <a:cs typeface="微软雅黑"/>
-                        </a:rPr>
-                        <a:t>黑盒主动 · 还原劫持</a:t>
-                      </a:r>
-                    </a:p>
-                  </a:txBody>
-                  <a:tcPr>
-                    <a:solidFill>
-                      <a:srgbClr val="F0F5F2"/>
-                    </a:solidFill>
-                  </a:tcPr>
-                </a:tc>
-                <a:tc>
-                  <a:txBody>
-                    <a:bodyPr/>
-                    <a:lstStyle/>
-                    <a:p>
-                      <a:pPr algn="l"/>
-                      <a:r>
-                        <a:rPr sz="1200" b="0">
-                          <a:solidFill>
-                            <a:srgbClr val="1A2332"/>
-                          </a:solidFill>
-                          <a:latin typeface="微软雅黑"/>
-                          <a:ea typeface="微软雅黑"/>
-                          <a:cs typeface="微软雅黑"/>
-                        </a:rPr>
-                        <a:t>植入字面量占位符劫持成功率</a:t>
-                      </a:r>
-                    </a:p>
-                  </a:txBody>
-                  <a:tcPr>
-                    <a:solidFill>
-                      <a:srgbClr val="F0F5F2"/>
-                    </a:solidFill>
-                  </a:tcPr>
-                </a:tc>
-                <a:tc>
-                  <a:txBody>
-                    <a:bodyPr/>
-                    <a:lstStyle/>
-                    <a:p>
-                      <a:pPr algn="ctr"/>
-                      <a:r>
-                        <a:rPr sz="1200" b="1">
-                          <a:solidFill>
-                            <a:srgbClr val="0E7A4F"/>
-                          </a:solidFill>
-                          <a:latin typeface="微软雅黑"/>
-                          <a:ea typeface="微软雅黑"/>
-                          <a:cs typeface="微软雅黑"/>
-                        </a:rPr>
-                        <a:t>0 / 500 轮</a:t>
-                      </a:r>
-                    </a:p>
-                  </a:txBody>
-                  <a:tcPr>
-                    <a:solidFill>
-                      <a:srgbClr val="F0F5F2"/>
-                    </a:solidFill>
-                  </a:tcPr>
-                </a:tc>
-              </a:tr>
-              <a:tr h="375920">
-                <a:tc>
-                  <a:txBody>
-                    <a:bodyPr/>
-                    <a:lstStyle/>
-                    <a:p>
-                      <a:pPr algn="l"/>
-                      <a:r>
-                        <a:rPr sz="1200" b="0">
-                          <a:solidFill>
-                            <a:srgbClr val="1A2332"/>
-                          </a:solidFill>
-                          <a:latin typeface="微软雅黑"/>
-                          <a:ea typeface="微软雅黑"/>
-                          <a:cs typeface="微软雅黑"/>
-                        </a:rPr>
-                        <a:t>黑盒主动 · 提示注入</a:t>
-                      </a:r>
-                    </a:p>
-                  </a:txBody>
-                  <a:tcPr>
-                    <a:solidFill>
-                      <a:srgbClr val="FFFFFF"/>
-                    </a:solidFill>
-                  </a:tcPr>
-                </a:tc>
-                <a:tc>
-                  <a:txBody>
-                    <a:bodyPr/>
-                    <a:lstStyle/>
-                    <a:p>
-                      <a:pPr algn="l"/>
-                      <a:r>
-                        <a:rPr sz="1200" b="0">
-                          <a:solidFill>
-                            <a:srgbClr val="1A2332"/>
-                          </a:solidFill>
-                          <a:latin typeface="微软雅黑"/>
-                          <a:ea typeface="微软雅黑"/>
-                          <a:cs typeface="微软雅黑"/>
-                        </a:rPr>
-                        <a:t>模型可见上下文中的真实 PII 数</a:t>
+                        <a:t>持久化与审计产物明文命中</a:t>
                       </a:r>
                     </a:p>
                   </a:txBody>
@@ -4227,7 +4095,7 @@
                   </a:tcPr>
                 </a:tc>
               </a:tr>
-              <a:tr h="375920">
+              <a:tr h="365760">
                 <a:tc>
                   <a:txBody>
                     <a:bodyPr/>
@@ -4243,7 +4111,7 @@
                           <a:ea typeface="微软雅黑"/>
                           <a:cs typeface="微软雅黑"/>
                         </a:rPr>
-                        <a:t>白盒 · 持久化扫描</a:t>
+                        <a:t>经验测量 · 识别</a:t>
                       </a:r>
                     </a:p>
                   </a:txBody>
@@ -4268,7 +4136,7 @@
                           <a:ea typeface="微软雅黑"/>
                           <a:cs typeface="微软雅黑"/>
                         </a:rPr>
-                        <a:t>落盘文件明文 PII 命中</a:t>
+                        <a:t>留出集完整脱敏（全量口径）</a:t>
                       </a:r>
                     </a:p>
                   </a:txBody>
@@ -4293,7 +4161,7 @@
                           <a:ea typeface="微软雅黑"/>
                           <a:cs typeface="微软雅黑"/>
                         </a:rPr>
-                        <a:t>0</a:t>
+                        <a:t>222/280</a:t>
                       </a:r>
                     </a:p>
                   </a:txBody>
@@ -4304,7 +4172,7 @@
                   </a:tcPr>
                 </a:tc>
               </a:tr>
-              <a:tr h="375920">
+              <a:tr h="365760">
                 <a:tc>
                   <a:txBody>
                     <a:bodyPr/>
@@ -4320,7 +4188,7 @@
                           <a:ea typeface="微软雅黑"/>
                           <a:cs typeface="微软雅黑"/>
                         </a:rPr>
-                        <a:t>白盒 · 审计预览</a:t>
+                        <a:t>经验测量 · 识别</a:t>
                       </a:r>
                     </a:p>
                   </a:txBody>
@@ -4345,7 +4213,7 @@
                           <a:ea typeface="微软雅黑"/>
                           <a:cs typeface="微软雅黑"/>
                         </a:rPr>
-                        <a:t>审计掩码后明文 PII 命中</a:t>
+                        <a:t>其中：系统声明支持的写法</a:t>
                       </a:r>
                     </a:p>
                   </a:txBody>
@@ -4370,7 +4238,7 @@
                           <a:ea typeface="微软雅黑"/>
                           <a:cs typeface="微软雅黑"/>
                         </a:rPr>
-                        <a:t>0</a:t>
+                        <a:t>222/230</a:t>
                       </a:r>
                     </a:p>
                   </a:txBody>
@@ -4381,7 +4249,7 @@
                   </a:tcPr>
                 </a:tc>
               </a:tr>
-              <a:tr h="375920">
+              <a:tr h="365760">
                 <a:tc>
                   <a:txBody>
                     <a:bodyPr/>
@@ -4397,7 +4265,7 @@
                           <a:ea typeface="微软雅黑"/>
                           <a:cs typeface="微软雅黑"/>
                         </a:rPr>
-                        <a:t>白盒 · 无密钥还原</a:t>
+                        <a:t>经验测量 · 误伤</a:t>
                       </a:r>
                     </a:p>
                   </a:txBody>
@@ -4422,7 +4290,7 @@
                           <a:ea typeface="微软雅黑"/>
                           <a:cs typeface="微软雅黑"/>
                         </a:rPr>
-                        <a:t>strict 模式是否泄露明文</a:t>
+                        <a:t>业务数字被误脱敏</a:t>
                       </a:r>
                     </a:p>
                   </a:txBody>
@@ -4447,7 +4315,7 @@
                           <a:ea typeface="微软雅黑"/>
                           <a:cs typeface="微软雅黑"/>
                         </a:rPr>
-                        <a:t>否</a:t>
+                        <a:t>0/80</a:t>
                       </a:r>
                     </a:p>
                   </a:txBody>
@@ -4458,6 +4326,83 @@
                   </a:tcPr>
                 </a:tc>
               </a:tr>
+              <a:tr h="365760">
+                <a:tc>
+                  <a:txBody>
+                    <a:bodyPr/>
+                    <a:lstStyle/>
+                    <a:p>
+                      <a:pPr algn="l"/>
+                      <a:r>
+                        <a:rPr sz="1200" b="0">
+                          <a:solidFill>
+                            <a:srgbClr val="1A2332"/>
+                          </a:solidFill>
+                          <a:latin typeface="微软雅黑"/>
+                          <a:ea typeface="微软雅黑"/>
+                          <a:cs typeface="微软雅黑"/>
+                        </a:rPr>
+                        <a:t>边界公开</a:t>
+                      </a:r>
+                    </a:p>
+                  </a:txBody>
+                  <a:tcPr>
+                    <a:solidFill>
+                      <a:srgbClr val="FFFFFF"/>
+                    </a:solidFill>
+                  </a:tcPr>
+                </a:tc>
+                <a:tc>
+                  <a:txBody>
+                    <a:bodyPr/>
+                    <a:lstStyle/>
+                    <a:p>
+                      <a:pPr algn="l"/>
+                      <a:r>
+                        <a:rPr sz="1200" b="0">
+                          <a:solidFill>
+                            <a:srgbClr val="1A2332"/>
+                          </a:solidFill>
+                          <a:latin typeface="微软雅黑"/>
+                          <a:ea typeface="微软雅黑"/>
+                          <a:cs typeface="微软雅黑"/>
+                        </a:rPr>
+                        <a:t>已声明未覆盖的形态清单</a:t>
+                      </a:r>
+                    </a:p>
+                  </a:txBody>
+                  <a:tcPr>
+                    <a:solidFill>
+                      <a:srgbClr val="FFFFFF"/>
+                    </a:solidFill>
+                  </a:tcPr>
+                </a:tc>
+                <a:tc>
+                  <a:txBody>
+                    <a:bodyPr/>
+                    <a:lstStyle/>
+                    <a:p>
+                      <a:pPr algn="ctr"/>
+                      <a:r>
+                        <a:rPr sz="1200" b="1">
+                          <a:solidFill>
+                            <a:srgbClr val="0E7A4F"/>
+                          </a:solidFill>
+                          <a:latin typeface="微软雅黑"/>
+                          <a:ea typeface="微软雅黑"/>
+                          <a:cs typeface="微软雅黑"/>
+                        </a:rPr>
+                        <a:t>50 例（报告 5.4）</a:t>
+                      </a:r>
+                    </a:p>
+                  </a:txBody>
+                  <a:tcPr>
+                    <a:solidFill>
+                      <a:srgbClr val="FFFFFF"/>
+                    </a:solidFill>
+                  </a:tcPr>
+                </a:tc>
+              </a:tr>
             </a:tbl>
           </a:graphicData>
         </a:graphic>
@@ -4470,8 +4415,8 @@
         </p:nvSpPr>
         <p:spPr>
           <a:xfrm>
-            <a:off x="640080" y="5532120"/>
-            <a:ext cx="10911535" cy="914400"/>
+            <a:off x="640080" y="5257800"/>
+            <a:ext cx="10911535" cy="1188720"/>
           </a:xfrm>
           <a:prstGeom prst="rect">
             <a:avLst/>
@@ -4509,7 +4454,25 @@
                 <a:ea typeface="微软雅黑"/>
                 <a:cs typeface="微软雅黑"/>
               </a:rPr>
-              <a:t>出网零明文 ⇒ 模型信息论上无法泄露它没见过的数据；nonce ⇒ 还原环节不可被植入劫持（碰撞率≈5.9×10⁻⁷）；Fernet+DPAPI ⇒ 拿走磁盘文件、无密钥也无法恢复明文。</a:t>
+              <a:t>认出来的实体绝不出网——模型在信息论上无法泄露它从未接触的数据；认不出来的形态我们不隐藏、逐项公开并说明原因。</a:t>
+            </a:r>
+          </a:p>
+          <a:p>
+            <a:pPr algn="l">
+              <a:lnSpc>
+                <a:spcPct val="120000"/>
+              </a:lnSpc>
+            </a:pPr>
+            <a:r>
+              <a:rPr sz="1200" b="0">
+                <a:solidFill>
+                  <a:srgbClr val="6B7A72"/>
+                </a:solidFill>
+                <a:latin typeface="微软雅黑"/>
+                <a:ea typeface="微软雅黑"/>
+                <a:cs typeface="微软雅黑"/>
+              </a:rPr>
+              <a:t>nonce ⇒ 还原环节不可被植入劫持（碰撞率≈5.9×10⁻⁷）；Fernet+DPAPI ⇒ 拿走磁盘文件、无密钥也恢复不出明文；全部读数可一键复现。</a:t>
             </a:r>
           </a:p>
         </p:txBody>
@@ -9884,7 +9847,7 @@
         </p:nvSpPr>
         <p:spPr>
           <a:xfrm>
-            <a:off x="6172200" y="6766560"/>
+            <a:off x="6172200" y="6419088"/>
             <a:ext cx="5394960" cy="365760"/>
           </a:xfrm>
           <a:prstGeom prst="rect">
@@ -12222,7 +12185,7 @@
                 <a:ea typeface="微软雅黑"/>
                 <a:cs typeface="微软雅黑"/>
               </a:rPr>
-              <a:t>20 个测试套件 · 全部通过（含攻防评测 9 项实验）</a:t>
+              <a:t>21 个测试/评测套件 · 全部通过（含攻防评测 9 项实验 + 留出集覆盖率评测）</a:t>
             </a:r>
           </a:p>
         </p:txBody>

--- a/docs/隐盾安全智能体_项目汇报.pptx
+++ b/docs/隐盾安全智能体_项目汇报.pptx
@@ -25,6 +25,7 @@
     <p:sldId id="273" r:id="rId24"/>
     <p:sldId id="274" r:id="rId25"/>
     <p:sldId id="275" r:id="rId26"/>
+    <p:sldId id="276" r:id="rId27"/>
   </p:sldIdLst>
   <p:sldSz cx="12191695" cy="6858000" type="screen4x3"/>
   <p:notesSz cx="6858000" cy="9144000"/>
@@ -3564,7 +3565,7 @@
                 <a:ea typeface="微软雅黑"/>
                 <a:cs typeface="微软雅黑"/>
               </a:rPr>
-              <a:t>    ·    V3.4.6    ·    LangChain · pywebview/WebView2 · 本地/云端双算力    ·    2026</a:t>
+              <a:t>    ·    V3.5.0    ·    LangChain · pywebview/WebView2 · 本地/云端双算力    ·    2026</a:t>
             </a:r>
           </a:p>
         </p:txBody>
@@ -12111,7 +12112,7 @@
                 <a:ea typeface="微软雅黑"/>
                 <a:cs typeface="微软雅黑"/>
               </a:rPr>
-              <a:t>质量与交付</a:t>
+              <a:t>企业部署形态</a:t>
             </a:r>
           </a:p>
         </p:txBody>
@@ -12148,7 +12149,7 @@
                 <a:ea typeface="微软雅黑"/>
                 <a:cs typeface="微软雅黑"/>
               </a:rPr>
-              <a:t>全量回归通过 · 免安装单文件 exe 就绪</a:t>
+              <a:t>控制面：把集中管理加上去，不减一条既有性质</a:t>
             </a:r>
           </a:p>
         </p:txBody>
@@ -12161,8 +12162,8 @@
         </p:nvSpPr>
         <p:spPr>
           <a:xfrm>
-            <a:off x="640080" y="1572768"/>
-            <a:ext cx="5669280" cy="502920"/>
+            <a:off x="640080" y="1591056"/>
+            <a:ext cx="10911535" cy="365760"/>
           </a:xfrm>
           <a:prstGeom prst="rect">
             <a:avLst/>
@@ -12177,15 +12178,15 @@
           <a:p>
             <a:pPr algn="l"/>
             <a:r>
-              <a:rPr sz="1450" b="1">
-                <a:solidFill>
-                  <a:srgbClr val="0E7A4F"/>
-                </a:solidFill>
-                <a:latin typeface="微软雅黑"/>
-                <a:ea typeface="微软雅黑"/>
-                <a:cs typeface="微软雅黑"/>
-              </a:rPr>
-              <a:t>21 个测试/评测套件 · 全部通过（含攻防评测 9 项实验 + 留出集覆盖率评测）</a:t>
+              <a:rPr sz="1200" b="0">
+                <a:solidFill>
+                  <a:srgbClr val="6B7A72"/>
+                </a:solidFill>
+                <a:latin typeface="微软雅黑"/>
+                <a:ea typeface="微软雅黑"/>
+                <a:cs typeface="微软雅黑"/>
+              </a:rPr>
+              <a:t>yindun/control/ · 零新增依赖（SQLite + 标准库）· core/ 仅新增一个审计事件类型 · 端点上报默认关闭</a:t>
             </a:r>
           </a:p>
         </p:txBody>
@@ -12198,8 +12199,8 @@
         </p:nvSpPr>
         <p:spPr>
           <a:xfrm>
-            <a:off x="640080" y="2103120"/>
-            <a:ext cx="5486400" cy="603504"/>
+            <a:off x="640080" y="2066543"/>
+            <a:ext cx="5623560" cy="786384"/>
           </a:xfrm>
           <a:prstGeom prst="roundRect">
             <a:avLst>
@@ -12244,23 +12245,23 @@
         </p:nvSpPr>
         <p:spPr>
           <a:xfrm>
-            <a:off x="914400" y="2103120"/>
-            <a:ext cx="2194560" cy="603504"/>
-          </a:xfrm>
-          <a:prstGeom prst="rect">
-            <a:avLst/>
-          </a:prstGeom>
-          <a:noFill/>
-        </p:spPr>
-        <p:txBody>
-          <a:bodyPr wrap="square" anchor="ctr" lIns="0" rIns="0" tIns="0" bIns="0">
+            <a:off x="914400" y="2157984"/>
+            <a:ext cx="5120640" cy="292608"/>
+          </a:xfrm>
+          <a:prstGeom prst="rect">
+            <a:avLst/>
+          </a:prstGeom>
+          <a:noFill/>
+        </p:spPr>
+        <p:txBody>
+          <a:bodyPr wrap="square" anchor="t" lIns="0" rIns="0" tIns="0" bIns="0">
             <a:spAutoFit/>
           </a:bodyPr>
           <a:lstStyle/>
           <a:p>
             <a:pPr algn="l"/>
             <a:r>
-              <a:rPr sz="1400" b="1">
+              <a:rPr sz="1450" b="1">
                 <a:solidFill>
                   <a:srgbClr val="1A2332"/>
                 </a:solidFill>
@@ -12268,7 +12269,7 @@
                 <a:ea typeface="微软雅黑"/>
                 <a:cs typeface="微软雅黑"/>
               </a:rPr>
-              <a:t>隐私引擎 + 回归</a:t>
+              <a:t>控制面拿不到明文</a:t>
             </a:r>
           </a:p>
         </p:txBody>
@@ -12281,23 +12282,27 @@
         </p:nvSpPr>
         <p:spPr>
           <a:xfrm>
-            <a:off x="3154680" y="2103120"/>
-            <a:ext cx="2468880" cy="603504"/>
-          </a:xfrm>
-          <a:prstGeom prst="rect">
-            <a:avLst/>
-          </a:prstGeom>
-          <a:noFill/>
-        </p:spPr>
-        <p:txBody>
-          <a:bodyPr wrap="square" anchor="ctr" lIns="0" rIns="0" tIns="0" bIns="0">
-            <a:spAutoFit/>
-          </a:bodyPr>
-          <a:lstStyle/>
-          <a:p>
-            <a:pPr algn="l"/>
-            <a:r>
-              <a:rPr sz="1150" b="0">
+            <a:off x="914400" y="2450591"/>
+            <a:ext cx="5120640" cy="365760"/>
+          </a:xfrm>
+          <a:prstGeom prst="rect">
+            <a:avLst/>
+          </a:prstGeom>
+          <a:noFill/>
+        </p:spPr>
+        <p:txBody>
+          <a:bodyPr wrap="square" anchor="t" lIns="0" rIns="0" tIns="0" bIns="0">
+            <a:spAutoFit/>
+          </a:bodyPr>
+          <a:lstStyle/>
+          <a:p>
+            <a:pPr algn="l">
+              <a:lnSpc>
+                <a:spcPct val="105000"/>
+              </a:lnSpc>
+            </a:pPr>
+            <a:r>
+              <a:rPr sz="1100" b="0">
                 <a:solidFill>
                   <a:srgbClr val="6B7A72"/>
                 </a:solidFill>
@@ -12305,58 +12310,21 @@
                 <a:ea typeface="微软雅黑"/>
                 <a:cs typeface="微软雅黑"/>
               </a:rPr>
-              <a:t>27 类实体；泄露 0 / 误伤 0 / 落盘扫描</a:t>
-            </a:r>
-          </a:p>
-        </p:txBody>
-      </p:sp>
-      <p:sp>
-        <p:nvSpPr>
-          <p:cNvPr id="9" name="TextBox 8"/>
-          <p:cNvSpPr txBox="1"/>
-          <p:nvPr/>
-        </p:nvSpPr>
-        <p:spPr>
-          <a:xfrm>
-            <a:off x="5577840" y="2103120"/>
-            <a:ext cx="457200" cy="603504"/>
-          </a:xfrm>
-          <a:prstGeom prst="rect">
-            <a:avLst/>
-          </a:prstGeom>
-          <a:noFill/>
-        </p:spPr>
-        <p:txBody>
-          <a:bodyPr wrap="square" anchor="ctr" lIns="0" rIns="0" tIns="0" bIns="0">
-            <a:spAutoFit/>
-          </a:bodyPr>
-          <a:lstStyle/>
-          <a:p>
-            <a:pPr algn="l"/>
-            <a:r>
-              <a:rPr sz="1800" b="1">
-                <a:solidFill>
-                  <a:srgbClr val="0E7A4F"/>
-                </a:solidFill>
-                <a:latin typeface="微软雅黑"/>
-                <a:ea typeface="微软雅黑"/>
-                <a:cs typeface="微软雅黑"/>
-              </a:rPr>
-              <a:t>✓</a:t>
-            </a:r>
-          </a:p>
-        </p:txBody>
-      </p:sp>
-      <p:sp>
-        <p:nvSpPr>
-          <p:cNvPr id="10" name="Rounded Rectangle 9"/>
+              <a:t>看到的内容＝端点本地审计落盘的内容；敏感路径已掩码为占位符，映射密钥由端点 DPAPI 托管</a:t>
+            </a:r>
+          </a:p>
+        </p:txBody>
+      </p:sp>
+      <p:sp>
+        <p:nvSpPr>
+          <p:cNvPr id="9" name="Rounded Rectangle 8"/>
           <p:cNvSpPr/>
           <p:nvPr/>
         </p:nvSpPr>
         <p:spPr>
           <a:xfrm>
-            <a:off x="640080" y="2788920"/>
-            <a:ext cx="5486400" cy="603504"/>
+            <a:off x="640080" y="2944368"/>
+            <a:ext cx="5623560" cy="786384"/>
           </a:xfrm>
           <a:prstGeom prst="roundRect">
             <a:avLst>
@@ -12395,66 +12363,70 @@
       </p:sp>
       <p:sp>
         <p:nvSpPr>
+          <p:cNvPr id="10" name="TextBox 9"/>
+          <p:cNvSpPr txBox="1"/>
+          <p:nvPr/>
+        </p:nvSpPr>
+        <p:spPr>
+          <a:xfrm>
+            <a:off x="914400" y="3035808"/>
+            <a:ext cx="5120640" cy="292608"/>
+          </a:xfrm>
+          <a:prstGeom prst="rect">
+            <a:avLst/>
+          </a:prstGeom>
+          <a:noFill/>
+        </p:spPr>
+        <p:txBody>
+          <a:bodyPr wrap="square" anchor="t" lIns="0" rIns="0" tIns="0" bIns="0">
+            <a:spAutoFit/>
+          </a:bodyPr>
+          <a:lstStyle/>
+          <a:p>
+            <a:pPr algn="l"/>
+            <a:r>
+              <a:rPr sz="1450" b="1">
+                <a:solidFill>
+                  <a:srgbClr val="1A2332"/>
+                </a:solidFill>
+                <a:latin typeface="微软雅黑"/>
+                <a:ea typeface="微软雅黑"/>
+                <a:cs typeface="微软雅黑"/>
+              </a:rPr>
+              <a:t>策略只能收紧</a:t>
+            </a:r>
+          </a:p>
+        </p:txBody>
+      </p:sp>
+      <p:sp>
+        <p:nvSpPr>
           <p:cNvPr id="11" name="TextBox 10"/>
           <p:cNvSpPr txBox="1"/>
           <p:nvPr/>
         </p:nvSpPr>
         <p:spPr>
           <a:xfrm>
-            <a:off x="914400" y="2788920"/>
-            <a:ext cx="2194560" cy="603504"/>
-          </a:xfrm>
-          <a:prstGeom prst="rect">
-            <a:avLst/>
-          </a:prstGeom>
-          <a:noFill/>
-        </p:spPr>
-        <p:txBody>
-          <a:bodyPr wrap="square" anchor="ctr" lIns="0" rIns="0" tIns="0" bIns="0">
-            <a:spAutoFit/>
-          </a:bodyPr>
-          <a:lstStyle/>
-          <a:p>
-            <a:pPr algn="l"/>
-            <a:r>
-              <a:rPr sz="1400" b="1">
-                <a:solidFill>
-                  <a:srgbClr val="1A2332"/>
-                </a:solidFill>
-                <a:latin typeface="微软雅黑"/>
-                <a:ea typeface="微软雅黑"/>
-                <a:cs typeface="微软雅黑"/>
-              </a:rPr>
-              <a:t>对抗集 + 真实文档</a:t>
-            </a:r>
-          </a:p>
-        </p:txBody>
-      </p:sp>
-      <p:sp>
-        <p:nvSpPr>
-          <p:cNvPr id="12" name="TextBox 11"/>
-          <p:cNvSpPr txBox="1"/>
-          <p:nvPr/>
-        </p:nvSpPr>
-        <p:spPr>
-          <a:xfrm>
-            <a:off x="3154680" y="2788920"/>
-            <a:ext cx="2468880" cy="603504"/>
-          </a:xfrm>
-          <a:prstGeom prst="rect">
-            <a:avLst/>
-          </a:prstGeom>
-          <a:noFill/>
-        </p:spPr>
-        <p:txBody>
-          <a:bodyPr wrap="square" anchor="ctr" lIns="0" rIns="0" tIns="0" bIns="0">
-            <a:spAutoFit/>
-          </a:bodyPr>
-          <a:lstStyle/>
-          <a:p>
-            <a:pPr algn="l"/>
-            <a:r>
-              <a:rPr sz="1150" b="0">
+            <a:off x="914400" y="3328415"/>
+            <a:ext cx="5120640" cy="365760"/>
+          </a:xfrm>
+          <a:prstGeom prst="rect">
+            <a:avLst/>
+          </a:prstGeom>
+          <a:noFill/>
+        </p:spPr>
+        <p:txBody>
+          <a:bodyPr wrap="square" anchor="t" lIns="0" rIns="0" tIns="0" bIns="0">
+            <a:spAutoFit/>
+          </a:bodyPr>
+          <a:lstStyle/>
+          <a:p>
+            <a:pPr algn="l">
+              <a:lnSpc>
+                <a:spcPct val="105000"/>
+              </a:lnSpc>
+            </a:pPr>
+            <a:r>
+              <a:rPr sz="1100" b="0">
                 <a:solidFill>
                   <a:srgbClr val="6B7A72"/>
                 </a:solidFill>
@@ -12462,58 +12434,21 @@
                 <a:ea typeface="微软雅黑"/>
                 <a:cs typeface="微软雅黑"/>
               </a:rPr>
-              <a:t>14 项格式变体；8 种真实格式全链路</a:t>
-            </a:r>
-          </a:p>
-        </p:txBody>
-      </p:sp>
-      <p:sp>
-        <p:nvSpPr>
-          <p:cNvPr id="13" name="TextBox 12"/>
-          <p:cNvSpPr txBox="1"/>
-          <p:nvPr/>
-        </p:nvSpPr>
-        <p:spPr>
-          <a:xfrm>
-            <a:off x="5577840" y="2788920"/>
-            <a:ext cx="457200" cy="603504"/>
-          </a:xfrm>
-          <a:prstGeom prst="rect">
-            <a:avLst/>
-          </a:prstGeom>
-          <a:noFill/>
-        </p:spPr>
-        <p:txBody>
-          <a:bodyPr wrap="square" anchor="ctr" lIns="0" rIns="0" tIns="0" bIns="0">
-            <a:spAutoFit/>
-          </a:bodyPr>
-          <a:lstStyle/>
-          <a:p>
-            <a:pPr algn="l"/>
-            <a:r>
-              <a:rPr sz="1800" b="1">
-                <a:solidFill>
-                  <a:srgbClr val="0E7A4F"/>
-                </a:solidFill>
-                <a:latin typeface="微软雅黑"/>
-                <a:ea typeface="微软雅黑"/>
-                <a:cs typeface="微软雅黑"/>
-              </a:rPr>
-              <a:t>✓</a:t>
-            </a:r>
-          </a:p>
-        </p:txBody>
-      </p:sp>
-      <p:sp>
-        <p:nvSpPr>
-          <p:cNvPr id="14" name="Rounded Rectangle 13"/>
+              <a:t>敏感路径取并集 / 审批下限取更严 / 允许模型与插件取交集 / 严格模式取或；降级键整包拒绝</a:t>
+            </a:r>
+          </a:p>
+        </p:txBody>
+      </p:sp>
+      <p:sp>
+        <p:nvSpPr>
+          <p:cNvPr id="12" name="Rounded Rectangle 11"/>
           <p:cNvSpPr/>
           <p:nvPr/>
         </p:nvSpPr>
         <p:spPr>
           <a:xfrm>
-            <a:off x="640080" y="3474720"/>
-            <a:ext cx="5486400" cy="603504"/>
+            <a:off x="640080" y="3822191"/>
+            <a:ext cx="5623560" cy="786384"/>
           </a:xfrm>
           <a:prstGeom prst="roundRect">
             <a:avLst>
@@ -12552,29 +12487,29 @@
       </p:sp>
       <p:sp>
         <p:nvSpPr>
-          <p:cNvPr id="15" name="TextBox 14"/>
-          <p:cNvSpPr txBox="1"/>
-          <p:nvPr/>
-        </p:nvSpPr>
-        <p:spPr>
-          <a:xfrm>
-            <a:off x="914400" y="3474720"/>
-            <a:ext cx="2194560" cy="603504"/>
-          </a:xfrm>
-          <a:prstGeom prst="rect">
-            <a:avLst/>
-          </a:prstGeom>
-          <a:noFill/>
-        </p:spPr>
-        <p:txBody>
-          <a:bodyPr wrap="square" anchor="ctr" lIns="0" rIns="0" tIns="0" bIns="0">
+          <p:cNvPr id="13" name="TextBox 12"/>
+          <p:cNvSpPr txBox="1"/>
+          <p:nvPr/>
+        </p:nvSpPr>
+        <p:spPr>
+          <a:xfrm>
+            <a:off x="914400" y="3913631"/>
+            <a:ext cx="5120640" cy="292608"/>
+          </a:xfrm>
+          <a:prstGeom prst="rect">
+            <a:avLst/>
+          </a:prstGeom>
+          <a:noFill/>
+        </p:spPr>
+        <p:txBody>
+          <a:bodyPr wrap="square" anchor="t" lIns="0" rIns="0" tIns="0" bIns="0">
             <a:spAutoFit/>
           </a:bodyPr>
           <a:lstStyle/>
           <a:p>
             <a:pPr algn="l"/>
             <a:r>
-              <a:rPr sz="1400" b="1">
+              <a:rPr sz="1450" b="1">
                 <a:solidFill>
                   <a:srgbClr val="1A2332"/>
                 </a:solidFill>
@@ -12582,36 +12517,40 @@
                 <a:ea typeface="微软雅黑"/>
                 <a:cs typeface="微软雅黑"/>
               </a:rPr>
-              <a:t>审计黑匣子</a:t>
-            </a:r>
-          </a:p>
-        </p:txBody>
-      </p:sp>
-      <p:sp>
-        <p:nvSpPr>
-          <p:cNvPr id="16" name="TextBox 15"/>
-          <p:cNvSpPr txBox="1"/>
-          <p:nvPr/>
-        </p:nvSpPr>
-        <p:spPr>
-          <a:xfrm>
-            <a:off x="3154680" y="3474720"/>
-            <a:ext cx="2468880" cy="603504"/>
-          </a:xfrm>
-          <a:prstGeom prst="rect">
-            <a:avLst/>
-          </a:prstGeom>
-          <a:noFill/>
-        </p:spPr>
-        <p:txBody>
-          <a:bodyPr wrap="square" anchor="ctr" lIns="0" rIns="0" tIns="0" bIns="0">
-            <a:spAutoFit/>
-          </a:bodyPr>
-          <a:lstStyle/>
-          <a:p>
-            <a:pPr algn="l"/>
-            <a:r>
-              <a:rPr sz="1150" b="0">
+              <a:t>链头外部锚定</a:t>
+            </a:r>
+          </a:p>
+        </p:txBody>
+      </p:sp>
+      <p:sp>
+        <p:nvSpPr>
+          <p:cNvPr id="14" name="TextBox 13"/>
+          <p:cNvSpPr txBox="1"/>
+          <p:nvPr/>
+        </p:nvSpPr>
+        <p:spPr>
+          <a:xfrm>
+            <a:off x="914400" y="4206240"/>
+            <a:ext cx="5120640" cy="365760"/>
+          </a:xfrm>
+          <a:prstGeom prst="rect">
+            <a:avLst/>
+          </a:prstGeom>
+          <a:noFill/>
+        </p:spPr>
+        <p:txBody>
+          <a:bodyPr wrap="square" anchor="t" lIns="0" rIns="0" tIns="0" bIns="0">
+            <a:spAutoFit/>
+          </a:bodyPr>
+          <a:lstStyle/>
+          <a:p>
+            <a:pPr algn="l">
+              <a:lnSpc>
+                <a:spcPct val="105000"/>
+              </a:lnSpc>
+            </a:pPr>
+            <a:r>
+              <a:rPr sz="1100" b="0">
                 <a:solidFill>
                   <a:srgbClr val="6B7A72"/>
                 </a:solidFill>
@@ -12619,58 +12558,21 @@
                 <a:ea typeface="微软雅黑"/>
                 <a:cs typeface="微软雅黑"/>
               </a:rPr>
-              <a:t>哈希链 + 链锚点 19/19</a:t>
-            </a:r>
-          </a:p>
-        </p:txBody>
-      </p:sp>
-      <p:sp>
-        <p:nvSpPr>
-          <p:cNvPr id="17" name="TextBox 16"/>
-          <p:cNvSpPr txBox="1"/>
-          <p:nvPr/>
-        </p:nvSpPr>
-        <p:spPr>
-          <a:xfrm>
-            <a:off x="5577840" y="3474720"/>
-            <a:ext cx="457200" cy="603504"/>
-          </a:xfrm>
-          <a:prstGeom prst="rect">
-            <a:avLst/>
-          </a:prstGeom>
-          <a:noFill/>
-        </p:spPr>
-        <p:txBody>
-          <a:bodyPr wrap="square" anchor="ctr" lIns="0" rIns="0" tIns="0" bIns="0">
-            <a:spAutoFit/>
-          </a:bodyPr>
-          <a:lstStyle/>
-          <a:p>
-            <a:pPr algn="l"/>
-            <a:r>
-              <a:rPr sz="1800" b="1">
-                <a:solidFill>
-                  <a:srgbClr val="0E7A4F"/>
-                </a:solidFill>
-                <a:latin typeface="微软雅黑"/>
-                <a:ea typeface="微软雅黑"/>
-                <a:cs typeface="微软雅黑"/>
-              </a:rPr>
-              <a:t>✓</a:t>
-            </a:r>
-          </a:p>
-        </p:txBody>
-      </p:sp>
-      <p:sp>
-        <p:nvSpPr>
-          <p:cNvPr id="18" name="Rounded Rectangle 17"/>
+              <a:t>逐次留痕（条数·链头·legacy 前缀）：截断/改写/缺口/断链等六种删改手法可检出</a:t>
+            </a:r>
+          </a:p>
+        </p:txBody>
+      </p:sp>
+      <p:sp>
+        <p:nvSpPr>
+          <p:cNvPr id="15" name="Rounded Rectangle 14"/>
           <p:cNvSpPr/>
           <p:nvPr/>
         </p:nvSpPr>
         <p:spPr>
           <a:xfrm>
-            <a:off x="640080" y="4160520"/>
-            <a:ext cx="5486400" cy="603504"/>
+            <a:off x="640080" y="4700016"/>
+            <a:ext cx="5623560" cy="786384"/>
           </a:xfrm>
           <a:prstGeom prst="roundRect">
             <a:avLst>
@@ -12709,29 +12611,29 @@
       </p:sp>
       <p:sp>
         <p:nvSpPr>
-          <p:cNvPr id="19" name="TextBox 18"/>
-          <p:cNvSpPr txBox="1"/>
-          <p:nvPr/>
-        </p:nvSpPr>
-        <p:spPr>
-          <a:xfrm>
-            <a:off x="914400" y="4160520"/>
-            <a:ext cx="2194560" cy="603504"/>
-          </a:xfrm>
-          <a:prstGeom prst="rect">
-            <a:avLst/>
-          </a:prstGeom>
-          <a:noFill/>
-        </p:spPr>
-        <p:txBody>
-          <a:bodyPr wrap="square" anchor="ctr" lIns="0" rIns="0" tIns="0" bIns="0">
+          <p:cNvPr id="16" name="TextBox 15"/>
+          <p:cNvSpPr txBox="1"/>
+          <p:nvPr/>
+        </p:nvSpPr>
+        <p:spPr>
+          <a:xfrm>
+            <a:off x="914400" y="4791455"/>
+            <a:ext cx="5120640" cy="292608"/>
+          </a:xfrm>
+          <a:prstGeom prst="rect">
+            <a:avLst/>
+          </a:prstGeom>
+          <a:noFill/>
+        </p:spPr>
+        <p:txBody>
+          <a:bodyPr wrap="square" anchor="t" lIns="0" rIns="0" tIns="0" bIns="0">
             <a:spAutoFit/>
           </a:bodyPr>
           <a:lstStyle/>
           <a:p>
             <a:pPr algn="l"/>
             <a:r>
-              <a:rPr sz="1400" b="1">
+              <a:rPr sz="1450" b="1">
                 <a:solidFill>
                   <a:srgbClr val="1A2332"/>
                 </a:solidFill>
@@ -12739,36 +12641,40 @@
                 <a:ea typeface="微软雅黑"/>
                 <a:cs typeface="微软雅黑"/>
               </a:rPr>
-              <a:t>命令白名单</a:t>
-            </a:r>
-          </a:p>
-        </p:txBody>
-      </p:sp>
-      <p:sp>
-        <p:nvSpPr>
-          <p:cNvPr id="20" name="TextBox 19"/>
-          <p:cNvSpPr txBox="1"/>
-          <p:nvPr/>
-        </p:nvSpPr>
-        <p:spPr>
-          <a:xfrm>
-            <a:off x="3154680" y="4160520"/>
-            <a:ext cx="2468880" cy="603504"/>
-          </a:xfrm>
-          <a:prstGeom prst="rect">
-            <a:avLst/>
-          </a:prstGeom>
-          <a:noFill/>
-        </p:spPr>
-        <p:txBody>
-          <a:bodyPr wrap="square" anchor="ctr" lIns="0" rIns="0" tIns="0" bIns="0">
-            <a:spAutoFit/>
-          </a:bodyPr>
-          <a:lstStyle/>
-          <a:p>
-            <a:pPr algn="l"/>
-            <a:r>
-              <a:rPr sz="1150" b="0">
+              <a:t>默认关闭 · 本机留痕</a:t>
+            </a:r>
+          </a:p>
+        </p:txBody>
+      </p:sp>
+      <p:sp>
+        <p:nvSpPr>
+          <p:cNvPr id="17" name="TextBox 16"/>
+          <p:cNvSpPr txBox="1"/>
+          <p:nvPr/>
+        </p:nvSpPr>
+        <p:spPr>
+          <a:xfrm>
+            <a:off x="914400" y="5084064"/>
+            <a:ext cx="5120640" cy="365760"/>
+          </a:xfrm>
+          <a:prstGeom prst="rect">
+            <a:avLst/>
+          </a:prstGeom>
+          <a:noFill/>
+        </p:spPr>
+        <p:txBody>
+          <a:bodyPr wrap="square" anchor="t" lIns="0" rIns="0" tIns="0" bIns="0">
+            <a:spAutoFit/>
+          </a:bodyPr>
+          <a:lstStyle/>
+          <a:p>
+            <a:pPr algn="l">
+              <a:lnSpc>
+                <a:spcPct val="105000"/>
+              </a:lnSpc>
+            </a:pPr>
+            <a:r>
+              <a:rPr sz="1100" b="0">
                 <a:solidFill>
                   <a:srgbClr val="6B7A72"/>
                 </a:solidFill>
@@ -12776,372 +12682,21 @@
                 <a:ea typeface="微软雅黑"/>
                 <a:cs typeface="微软雅黑"/>
               </a:rPr>
-              <a:t>高危入口全拦截 + 进程容器 + 严格模式</a:t>
-            </a:r>
-          </a:p>
-        </p:txBody>
-      </p:sp>
-      <p:sp>
-        <p:nvSpPr>
-          <p:cNvPr id="21" name="TextBox 20"/>
-          <p:cNvSpPr txBox="1"/>
-          <p:nvPr/>
-        </p:nvSpPr>
-        <p:spPr>
-          <a:xfrm>
-            <a:off x="5577840" y="4160520"/>
-            <a:ext cx="457200" cy="603504"/>
-          </a:xfrm>
-          <a:prstGeom prst="rect">
-            <a:avLst/>
-          </a:prstGeom>
-          <a:noFill/>
-        </p:spPr>
-        <p:txBody>
-          <a:bodyPr wrap="square" anchor="ctr" lIns="0" rIns="0" tIns="0" bIns="0">
-            <a:spAutoFit/>
-          </a:bodyPr>
-          <a:lstStyle/>
-          <a:p>
-            <a:pPr algn="l"/>
-            <a:r>
-              <a:rPr sz="1800" b="1">
-                <a:solidFill>
-                  <a:srgbClr val="0E7A4F"/>
-                </a:solidFill>
-                <a:latin typeface="微软雅黑"/>
-                <a:ea typeface="微软雅黑"/>
-                <a:cs typeface="微软雅黑"/>
-              </a:rPr>
-              <a:t>✓</a:t>
-            </a:r>
-          </a:p>
-        </p:txBody>
-      </p:sp>
-      <p:sp>
-        <p:nvSpPr>
-          <p:cNvPr id="22" name="Rounded Rectangle 21"/>
+              <a:t>绝不静默上报；每次上报成功或失败都写本地审计（control_report），用户可查</a:t>
+            </a:r>
+          </a:p>
+        </p:txBody>
+      </p:sp>
+      <p:sp>
+        <p:nvSpPr>
+          <p:cNvPr id="18" name="Rounded Rectangle 17"/>
           <p:cNvSpPr/>
           <p:nvPr/>
         </p:nvSpPr>
         <p:spPr>
           <a:xfrm>
-            <a:off x="640080" y="4846320"/>
-            <a:ext cx="5486400" cy="603504"/>
-          </a:xfrm>
-          <a:prstGeom prst="roundRect">
-            <a:avLst>
-              <a:gd name="adj" fmla="val 10000"/>
-            </a:avLst>
-          </a:prstGeom>
-          <a:solidFill>
-            <a:srgbClr val="FFFFFF"/>
-          </a:solidFill>
-          <a:ln>
-            <a:noFill/>
-          </a:ln>
-          <a:effectLst/>
-        </p:spPr>
-        <p:style>
-          <a:lnRef idx="1">
-            <a:schemeClr val="accent1"/>
-          </a:lnRef>
-          <a:fillRef idx="3">
-            <a:schemeClr val="accent1"/>
-          </a:fillRef>
-          <a:effectRef idx="2">
-            <a:schemeClr val="accent1"/>
-          </a:effectRef>
-          <a:fontRef idx="minor">
-            <a:schemeClr val="lt1"/>
-          </a:fontRef>
-        </p:style>
-        <p:txBody>
-          <a:bodyPr rtlCol="0" anchor="ctr"/>
-          <a:lstStyle/>
-          <a:p>
-            <a:pPr algn="ctr"/>
-          </a:p>
-        </p:txBody>
-      </p:sp>
-      <p:sp>
-        <p:nvSpPr>
-          <p:cNvPr id="23" name="TextBox 22"/>
-          <p:cNvSpPr txBox="1"/>
-          <p:nvPr/>
-        </p:nvSpPr>
-        <p:spPr>
-          <a:xfrm>
-            <a:off x="914400" y="4846320"/>
-            <a:ext cx="2194560" cy="603504"/>
-          </a:xfrm>
-          <a:prstGeom prst="rect">
-            <a:avLst/>
-          </a:prstGeom>
-          <a:noFill/>
-        </p:spPr>
-        <p:txBody>
-          <a:bodyPr wrap="square" anchor="ctr" lIns="0" rIns="0" tIns="0" bIns="0">
-            <a:spAutoFit/>
-          </a:bodyPr>
-          <a:lstStyle/>
-          <a:p>
-            <a:pPr algn="l"/>
-            <a:r>
-              <a:rPr sz="1400" b="1">
-                <a:solidFill>
-                  <a:srgbClr val="1A2332"/>
-                </a:solidFill>
-                <a:latin typeface="微软雅黑"/>
-                <a:ea typeface="微软雅黑"/>
-                <a:cs typeface="微软雅黑"/>
-              </a:rPr>
-              <a:t>插件 + 记忆 + 工作流</a:t>
-            </a:r>
-          </a:p>
-        </p:txBody>
-      </p:sp>
-      <p:sp>
-        <p:nvSpPr>
-          <p:cNvPr id="24" name="TextBox 23"/>
-          <p:cNvSpPr txBox="1"/>
-          <p:nvPr/>
-        </p:nvSpPr>
-        <p:spPr>
-          <a:xfrm>
-            <a:off x="3154680" y="4846320"/>
-            <a:ext cx="2468880" cy="603504"/>
-          </a:xfrm>
-          <a:prstGeom prst="rect">
-            <a:avLst/>
-          </a:prstGeom>
-          <a:noFill/>
-        </p:spPr>
-        <p:txBody>
-          <a:bodyPr wrap="square" anchor="ctr" lIns="0" rIns="0" tIns="0" bIns="0">
-            <a:spAutoFit/>
-          </a:bodyPr>
-          <a:lstStyle/>
-          <a:p>
-            <a:pPr algn="l"/>
-            <a:r>
-              <a:rPr sz="1150" b="0">
-                <a:solidFill>
-                  <a:srgbClr val="6B7A72"/>
-                </a:solidFill>
-                <a:latin typeface="微软雅黑"/>
-                <a:ea typeface="微软雅黑"/>
-                <a:cs typeface="微软雅黑"/>
-              </a:rPr>
-              <a:t>宿主契约 / 能力端到端 / 执行与导出</a:t>
-            </a:r>
-          </a:p>
-        </p:txBody>
-      </p:sp>
-      <p:sp>
-        <p:nvSpPr>
-          <p:cNvPr id="25" name="TextBox 24"/>
-          <p:cNvSpPr txBox="1"/>
-          <p:nvPr/>
-        </p:nvSpPr>
-        <p:spPr>
-          <a:xfrm>
-            <a:off x="5577840" y="4846320"/>
-            <a:ext cx="457200" cy="603504"/>
-          </a:xfrm>
-          <a:prstGeom prst="rect">
-            <a:avLst/>
-          </a:prstGeom>
-          <a:noFill/>
-        </p:spPr>
-        <p:txBody>
-          <a:bodyPr wrap="square" anchor="ctr" lIns="0" rIns="0" tIns="0" bIns="0">
-            <a:spAutoFit/>
-          </a:bodyPr>
-          <a:lstStyle/>
-          <a:p>
-            <a:pPr algn="l"/>
-            <a:r>
-              <a:rPr sz="1800" b="1">
-                <a:solidFill>
-                  <a:srgbClr val="0E7A4F"/>
-                </a:solidFill>
-                <a:latin typeface="微软雅黑"/>
-                <a:ea typeface="微软雅黑"/>
-                <a:cs typeface="微软雅黑"/>
-              </a:rPr>
-              <a:t>✓</a:t>
-            </a:r>
-          </a:p>
-        </p:txBody>
-      </p:sp>
-      <p:sp>
-        <p:nvSpPr>
-          <p:cNvPr id="26" name="Rounded Rectangle 25"/>
-          <p:cNvSpPr/>
-          <p:nvPr/>
-        </p:nvSpPr>
-        <p:spPr>
-          <a:xfrm>
-            <a:off x="640080" y="5532120"/>
-            <a:ext cx="5486400" cy="603504"/>
-          </a:xfrm>
-          <a:prstGeom prst="roundRect">
-            <a:avLst>
-              <a:gd name="adj" fmla="val 10000"/>
-            </a:avLst>
-          </a:prstGeom>
-          <a:solidFill>
-            <a:srgbClr val="FFFFFF"/>
-          </a:solidFill>
-          <a:ln>
-            <a:noFill/>
-          </a:ln>
-          <a:effectLst/>
-        </p:spPr>
-        <p:style>
-          <a:lnRef idx="1">
-            <a:schemeClr val="accent1"/>
-          </a:lnRef>
-          <a:fillRef idx="3">
-            <a:schemeClr val="accent1"/>
-          </a:fillRef>
-          <a:effectRef idx="2">
-            <a:schemeClr val="accent1"/>
-          </a:effectRef>
-          <a:fontRef idx="minor">
-            <a:schemeClr val="lt1"/>
-          </a:fontRef>
-        </p:style>
-        <p:txBody>
-          <a:bodyPr rtlCol="0" anchor="ctr"/>
-          <a:lstStyle/>
-          <a:p>
-            <a:pPr algn="ctr"/>
-          </a:p>
-        </p:txBody>
-      </p:sp>
-      <p:sp>
-        <p:nvSpPr>
-          <p:cNvPr id="27" name="TextBox 26"/>
-          <p:cNvSpPr txBox="1"/>
-          <p:nvPr/>
-        </p:nvSpPr>
-        <p:spPr>
-          <a:xfrm>
-            <a:off x="914400" y="5532120"/>
-            <a:ext cx="2194560" cy="603504"/>
-          </a:xfrm>
-          <a:prstGeom prst="rect">
-            <a:avLst/>
-          </a:prstGeom>
-          <a:noFill/>
-        </p:spPr>
-        <p:txBody>
-          <a:bodyPr wrap="square" anchor="ctr" lIns="0" rIns="0" tIns="0" bIns="0">
-            <a:spAutoFit/>
-          </a:bodyPr>
-          <a:lstStyle/>
-          <a:p>
-            <a:pPr algn="l"/>
-            <a:r>
-              <a:rPr sz="1400" b="1">
-                <a:solidFill>
-                  <a:srgbClr val="1A2332"/>
-                </a:solidFill>
-                <a:latin typeface="微软雅黑"/>
-                <a:ea typeface="微软雅黑"/>
-                <a:cs typeface="微软雅黑"/>
-              </a:rPr>
-              <a:t>laya 插件 + 窗口</a:t>
-            </a:r>
-          </a:p>
-        </p:txBody>
-      </p:sp>
-      <p:sp>
-        <p:nvSpPr>
-          <p:cNvPr id="28" name="TextBox 27"/>
-          <p:cNvSpPr txBox="1"/>
-          <p:nvPr/>
-        </p:nvSpPr>
-        <p:spPr>
-          <a:xfrm>
-            <a:off x="3154680" y="5532120"/>
-            <a:ext cx="2468880" cy="603504"/>
-          </a:xfrm>
-          <a:prstGeom prst="rect">
-            <a:avLst/>
-          </a:prstGeom>
-          <a:noFill/>
-        </p:spPr>
-        <p:txBody>
-          <a:bodyPr wrap="square" anchor="ctr" lIns="0" rIns="0" tIns="0" bIns="0">
-            <a:spAutoFit/>
-          </a:bodyPr>
-          <a:lstStyle/>
-          <a:p>
-            <a:pPr algn="l"/>
-            <a:r>
-              <a:rPr sz="1150" b="0">
-                <a:solidFill>
-                  <a:srgbClr val="6B7A72"/>
-                </a:solidFill>
-                <a:latin typeface="微软雅黑"/>
-                <a:ea typeface="微软雅黑"/>
-                <a:cs typeface="微软雅黑"/>
-              </a:rPr>
-              <a:t>模型与正则双后端；8 向拖拽锚定</a:t>
-            </a:r>
-          </a:p>
-        </p:txBody>
-      </p:sp>
-      <p:sp>
-        <p:nvSpPr>
-          <p:cNvPr id="29" name="TextBox 28"/>
-          <p:cNvSpPr txBox="1"/>
-          <p:nvPr/>
-        </p:nvSpPr>
-        <p:spPr>
-          <a:xfrm>
-            <a:off x="5577840" y="5532120"/>
-            <a:ext cx="457200" cy="603504"/>
-          </a:xfrm>
-          <a:prstGeom prst="rect">
-            <a:avLst/>
-          </a:prstGeom>
-          <a:noFill/>
-        </p:spPr>
-        <p:txBody>
-          <a:bodyPr wrap="square" anchor="ctr" lIns="0" rIns="0" tIns="0" bIns="0">
-            <a:spAutoFit/>
-          </a:bodyPr>
-          <a:lstStyle/>
-          <a:p>
-            <a:pPr algn="l"/>
-            <a:r>
-              <a:rPr sz="1800" b="1">
-                <a:solidFill>
-                  <a:srgbClr val="0E7A4F"/>
-                </a:solidFill>
-                <a:latin typeface="微软雅黑"/>
-                <a:ea typeface="微软雅黑"/>
-                <a:cs typeface="微软雅黑"/>
-              </a:rPr>
-              <a:t>✓</a:t>
-            </a:r>
-          </a:p>
-        </p:txBody>
-      </p:sp>
-      <p:sp>
-        <p:nvSpPr>
-          <p:cNvPr id="30" name="Rounded Rectangle 29"/>
-          <p:cNvSpPr/>
-          <p:nvPr/>
-        </p:nvSpPr>
-        <p:spPr>
-          <a:xfrm>
-            <a:off x="6537960" y="1737360"/>
-            <a:ext cx="4983480" cy="4206240"/>
+            <a:off x="6537960" y="1691640"/>
+            <a:ext cx="4983480" cy="4251960"/>
           </a:xfrm>
           <a:prstGeom prst="roundRect">
             <a:avLst>
@@ -13187,14 +12742,14 @@
       </p:sp>
       <p:sp>
         <p:nvSpPr>
-          <p:cNvPr id="31" name="TextBox 30"/>
-          <p:cNvSpPr txBox="1"/>
-          <p:nvPr/>
-        </p:nvSpPr>
-        <p:spPr>
-          <a:xfrm>
-            <a:off x="6812280" y="2057400"/>
-            <a:ext cx="4434840" cy="914400"/>
+          <p:cNvPr id="19" name="TextBox 18"/>
+          <p:cNvSpPr txBox="1"/>
+          <p:nvPr/>
+        </p:nvSpPr>
+        <p:spPr>
+          <a:xfrm>
+            <a:off x="6766560" y="1965960"/>
+            <a:ext cx="4526280" cy="914400"/>
           </a:xfrm>
           <a:prstGeom prst="rect">
             <a:avLst/>
@@ -13209,7 +12764,7 @@
           <a:p>
             <a:pPr algn="ctr"/>
             <a:r>
-              <a:rPr sz="5200" b="1">
+              <a:rPr sz="4000" b="1">
                 <a:solidFill>
                   <a:srgbClr val="FFFFFF"/>
                 </a:solidFill>
@@ -13217,21 +12772,21 @@
                 <a:ea typeface="微软雅黑"/>
                 <a:cs typeface="微软雅黑"/>
               </a:rPr>
-              <a:t>1 个 exe</a:t>
-            </a:r>
-          </a:p>
-        </p:txBody>
-      </p:sp>
-      <p:sp>
-        <p:nvSpPr>
-          <p:cNvPr id="32" name="TextBox 31"/>
-          <p:cNvSpPr txBox="1"/>
-          <p:nvPr/>
-        </p:nvSpPr>
-        <p:spPr>
-          <a:xfrm>
-            <a:off x="6812280" y="3063240"/>
-            <a:ext cx="4434840" cy="457200"/>
+              <a:t>0 条放行通路</a:t>
+            </a:r>
+          </a:p>
+        </p:txBody>
+      </p:sp>
+      <p:sp>
+        <p:nvSpPr>
+          <p:cNvPr id="20" name="TextBox 19"/>
+          <p:cNvSpPr txBox="1"/>
+          <p:nvPr/>
+        </p:nvSpPr>
+        <p:spPr>
+          <a:xfrm>
+            <a:off x="6766560" y="2907792"/>
+            <a:ext cx="4526280" cy="457200"/>
           </a:xfrm>
           <a:prstGeom prst="rect">
             <a:avLst/>
@@ -13246,7 +12801,7 @@
           <a:p>
             <a:pPr algn="ctr"/>
             <a:r>
-              <a:rPr sz="1500" b="1">
+              <a:rPr sz="1400" b="1">
                 <a:solidFill>
                   <a:srgbClr val="8FD3B4"/>
                 </a:solidFill>
@@ -13254,20 +12809,20 @@
                 <a:ea typeface="微软雅黑"/>
                 <a:cs typeface="微软雅黑"/>
               </a:rPr>
-              <a:t>免安装 · 双击即用 · 无需脚本</a:t>
-            </a:r>
-          </a:p>
-        </p:txBody>
-      </p:sp>
-      <p:sp>
-        <p:nvSpPr>
-          <p:cNvPr id="33" name="Rectangle 32"/>
+              <a:t>控制面被攻破，也只能让端点管得更严</a:t>
+            </a:r>
+          </a:p>
+        </p:txBody>
+      </p:sp>
+      <p:sp>
+        <p:nvSpPr>
+          <p:cNvPr id="21" name="Rectangle 20"/>
           <p:cNvSpPr/>
           <p:nvPr/>
         </p:nvSpPr>
         <p:spPr>
           <a:xfrm>
-            <a:off x="6949440" y="3611880"/>
+            <a:off x="6949440" y="3456432"/>
             <a:ext cx="4160520" cy="18288"/>
           </a:xfrm>
           <a:prstGeom prst="rect">
@@ -13305,14 +12860,14 @@
       </p:sp>
       <p:sp>
         <p:nvSpPr>
-          <p:cNvPr id="34" name="TextBox 33"/>
-          <p:cNvSpPr txBox="1"/>
-          <p:nvPr/>
-        </p:nvSpPr>
-        <p:spPr>
-          <a:xfrm>
-            <a:off x="6812280" y="3794760"/>
-            <a:ext cx="4434840" cy="2011680"/>
+          <p:cNvPr id="22" name="TextBox 21"/>
+          <p:cNvSpPr txBox="1"/>
+          <p:nvPr/>
+        </p:nvSpPr>
+        <p:spPr>
+          <a:xfrm>
+            <a:off x="6766560" y="3611880"/>
+            <a:ext cx="4526280" cy="2194560"/>
           </a:xfrm>
           <a:prstGeom prst="rect">
             <a:avLst/>
@@ -13327,14 +12882,14 @@
           <a:p>
             <a:pPr algn="l">
               <a:lnSpc>
-                <a:spcPct val="110000"/>
+                <a:spcPct val="105000"/>
               </a:lnSpc>
               <a:spcAft>
                 <a:spcPts val="800"/>
               </a:spcAft>
             </a:pPr>
             <a:r>
-              <a:rPr sz="1300" b="1">
+              <a:rPr sz="1150" b="1">
                 <a:solidFill>
                   <a:srgbClr val="F0B45C"/>
                 </a:solidFill>
@@ -13345,7 +12900,7 @@
               <a:t>▪  </a:t>
             </a:r>
             <a:r>
-              <a:rPr sz="1300" b="0">
+              <a:rPr sz="1150" b="0">
                 <a:solidFill>
                   <a:srgbClr val="EAF5EF"/>
                 </a:solidFill>
@@ -13353,20 +12908,20 @@
                 <a:ea typeface="微软雅黑"/>
                 <a:cs typeface="微软雅黑"/>
               </a:rPr>
-              <a:t>PySide6 + LangChain 全依赖自包含（PyInstaller onefile）</a:t>
+              <a:t>脱敏豁免 · 审批放行 · 白名单放行 · 审计开关：无任何下发通路</a:t>
             </a:r>
           </a:p>
           <a:p>
             <a:pPr algn="l">
               <a:lnSpc>
-                <a:spcPct val="110000"/>
+                <a:spcPct val="105000"/>
               </a:lnSpc>
               <a:spcAft>
                 <a:spcPts val="800"/>
               </a:spcAft>
             </a:pPr>
             <a:r>
-              <a:rPr sz="1300" b="1">
+              <a:rPr sz="1150" b="1">
                 <a:solidFill>
                   <a:srgbClr val="F0B45C"/>
                 </a:solidFill>
@@ -13377,7 +12932,7 @@
               <a:t>▪  </a:t>
             </a:r>
             <a:r>
-              <a:rPr sz="1300" b="0">
+              <a:rPr sz="1150" b="0">
                 <a:solidFill>
                   <a:srgbClr val="EAF5EF"/>
                 </a:solidFill>
@@ -13385,20 +12940,20 @@
                 <a:ea typeface="微软雅黑"/>
                 <a:cs typeface="微软雅黑"/>
               </a:rPr>
-              <a:t>单文件双击即用，无需安装与脚本</a:t>
+              <a:t>端点侧再做一次单调合并兜底，签名只解决来源与完整性</a:t>
             </a:r>
           </a:p>
           <a:p>
             <a:pPr algn="l">
               <a:lnSpc>
-                <a:spcPct val="110000"/>
+                <a:spcPct val="105000"/>
               </a:lnSpc>
               <a:spcAft>
                 <a:spcPts val="800"/>
               </a:spcAft>
             </a:pPr>
             <a:r>
-              <a:rPr sz="1300" b="1">
+              <a:rPr sz="1150" b="1">
                 <a:solidFill>
                   <a:srgbClr val="F0B45C"/>
                 </a:solidFill>
@@ -13409,7 +12964,7 @@
               <a:t>▪  </a:t>
             </a:r>
             <a:r>
-              <a:rPr sz="1300" b="0">
+              <a:rPr sz="1150" b="0">
                 <a:solidFill>
                   <a:srgbClr val="EAF5EF"/>
                 </a:solidFill>
@@ -13417,20 +12972,20 @@
                 <a:ea typeface="微软雅黑"/>
                 <a:cs typeface="微软雅黑"/>
               </a:rPr>
-              <a:t>配置/会话/审计/向量库写在 exe 同目录，删文件即卸载</a:t>
+              <a:t>控制台五页：态势总览 / 事件台账 / 端点资产 / 策略下发 / 模型用量</a:t>
             </a:r>
           </a:p>
           <a:p>
             <a:pPr algn="l">
               <a:lnSpc>
-                <a:spcPct val="110000"/>
+                <a:spcPct val="105000"/>
               </a:lnSpc>
               <a:spcAft>
                 <a:spcPts val="800"/>
               </a:spcAft>
             </a:pPr>
             <a:r>
-              <a:rPr sz="1300" b="1">
+              <a:rPr sz="1150" b="1">
                 <a:solidFill>
                   <a:srgbClr val="F0B45C"/>
                 </a:solidFill>
@@ -13441,7 +12996,7 @@
               <a:t>▪  </a:t>
             </a:r>
             <a:r>
-              <a:rPr sz="1300" b="0">
+              <a:rPr sz="1150" b="0">
                 <a:solidFill>
                   <a:srgbClr val="EAF5EF"/>
                 </a:solidFill>
@@ -13449,14 +13004,14 @@
                 <a:ea typeface="微软雅黑"/>
                 <a:cs typeface="微软雅黑"/>
               </a:rPr>
-              <a:t>随附《使用说明》：本地/云端算力两步接入</a:t>
-            </a:r>
-          </a:p>
-        </p:txBody>
-      </p:sp>
-      <p:sp>
-        <p:nvSpPr>
-          <p:cNvPr id="35" name="TextBox 34"/>
+              <a:t>不代理模型流量、不做整机监控；原型边界如实声明（无 TLS / 无 RBAC）</a:t>
+            </a:r>
+          </a:p>
+        </p:txBody>
+      </p:sp>
+      <p:sp>
+        <p:nvSpPr>
+          <p:cNvPr id="23" name="TextBox 22"/>
           <p:cNvSpPr txBox="1"/>
           <p:nvPr/>
         </p:nvSpPr>
@@ -14192,6 +13747,1480 @@
 </file>
 
 <file path=ppt/slides/slide20.xml><?xml version="1.0" encoding="utf-8"?>
+<p:sld xmlns:a="http://schemas.openxmlformats.org/drawingml/2006/main" xmlns:p="http://schemas.openxmlformats.org/presentationml/2006/main" xmlns:r="http://schemas.openxmlformats.org/officeDocument/2006/relationships">
+  <p:cSld>
+    <p:spTree>
+      <p:nvGrpSpPr>
+        <p:cNvPr id="1" name=""/>
+        <p:cNvGrpSpPr/>
+        <p:nvPr/>
+      </p:nvGrpSpPr>
+      <p:grpSpPr/>
+      <p:sp>
+        <p:nvSpPr>
+          <p:cNvPr id="2" name="Rectangle 1"/>
+          <p:cNvSpPr/>
+          <p:nvPr/>
+        </p:nvSpPr>
+        <p:spPr>
+          <a:xfrm>
+            <a:off x="0" y="0"/>
+            <a:ext cx="12191695" cy="6858000"/>
+          </a:xfrm>
+          <a:prstGeom prst="rect">
+            <a:avLst/>
+          </a:prstGeom>
+          <a:solidFill>
+            <a:srgbClr val="F4F7F5"/>
+          </a:solidFill>
+          <a:ln>
+            <a:noFill/>
+          </a:ln>
+          <a:effectLst/>
+        </p:spPr>
+        <p:style>
+          <a:lnRef idx="1">
+            <a:schemeClr val="accent1"/>
+          </a:lnRef>
+          <a:fillRef idx="3">
+            <a:schemeClr val="accent1"/>
+          </a:fillRef>
+          <a:effectRef idx="2">
+            <a:schemeClr val="accent1"/>
+          </a:effectRef>
+          <a:fontRef idx="minor">
+            <a:schemeClr val="lt1"/>
+          </a:fontRef>
+        </p:style>
+        <p:txBody>
+          <a:bodyPr rtlCol="0" anchor="ctr"/>
+          <a:lstStyle/>
+          <a:p>
+            <a:pPr algn="ctr"/>
+          </a:p>
+        </p:txBody>
+      </p:sp>
+      <p:sp>
+        <p:nvSpPr>
+          <p:cNvPr id="3" name="TextBox 2"/>
+          <p:cNvSpPr txBox="1"/>
+          <p:nvPr/>
+        </p:nvSpPr>
+        <p:spPr>
+          <a:xfrm>
+            <a:off x="640080" y="502920"/>
+            <a:ext cx="7315200" cy="274320"/>
+          </a:xfrm>
+          <a:prstGeom prst="rect">
+            <a:avLst/>
+          </a:prstGeom>
+          <a:noFill/>
+        </p:spPr>
+        <p:txBody>
+          <a:bodyPr wrap="square" anchor="t" lIns="0" rIns="0" tIns="0" bIns="0">
+            <a:spAutoFit/>
+          </a:bodyPr>
+          <a:lstStyle/>
+          <a:p>
+            <a:pPr algn="l"/>
+            <a:r>
+              <a:rPr sz="1300" b="1">
+                <a:solidFill>
+                  <a:srgbClr val="0E7A4F"/>
+                </a:solidFill>
+                <a:latin typeface="微软雅黑"/>
+                <a:ea typeface="微软雅黑"/>
+                <a:cs typeface="微软雅黑"/>
+              </a:rPr>
+              <a:t>质量与交付</a:t>
+            </a:r>
+          </a:p>
+        </p:txBody>
+      </p:sp>
+      <p:sp>
+        <p:nvSpPr>
+          <p:cNvPr id="4" name="TextBox 3"/>
+          <p:cNvSpPr txBox="1"/>
+          <p:nvPr/>
+        </p:nvSpPr>
+        <p:spPr>
+          <a:xfrm>
+            <a:off x="640080" y="822960"/>
+            <a:ext cx="10911535" cy="731520"/>
+          </a:xfrm>
+          <a:prstGeom prst="rect">
+            <a:avLst/>
+          </a:prstGeom>
+          <a:noFill/>
+        </p:spPr>
+        <p:txBody>
+          <a:bodyPr wrap="square" anchor="t" lIns="0" rIns="0" tIns="0" bIns="0">
+            <a:spAutoFit/>
+          </a:bodyPr>
+          <a:lstStyle/>
+          <a:p>
+            <a:pPr algn="l"/>
+            <a:r>
+              <a:rPr sz="3000" b="1">
+                <a:solidFill>
+                  <a:srgbClr val="1A2332"/>
+                </a:solidFill>
+                <a:latin typeface="微软雅黑"/>
+                <a:ea typeface="微软雅黑"/>
+                <a:cs typeface="微软雅黑"/>
+              </a:rPr>
+              <a:t>全量回归通过 · 免安装单文件 exe 就绪</a:t>
+            </a:r>
+          </a:p>
+        </p:txBody>
+      </p:sp>
+      <p:sp>
+        <p:nvSpPr>
+          <p:cNvPr id="5" name="TextBox 4"/>
+          <p:cNvSpPr txBox="1"/>
+          <p:nvPr/>
+        </p:nvSpPr>
+        <p:spPr>
+          <a:xfrm>
+            <a:off x="640080" y="1572768"/>
+            <a:ext cx="5669280" cy="502920"/>
+          </a:xfrm>
+          <a:prstGeom prst="rect">
+            <a:avLst/>
+          </a:prstGeom>
+          <a:noFill/>
+        </p:spPr>
+        <p:txBody>
+          <a:bodyPr wrap="square" anchor="t" lIns="0" rIns="0" tIns="0" bIns="0">
+            <a:spAutoFit/>
+          </a:bodyPr>
+          <a:lstStyle/>
+          <a:p>
+            <a:pPr algn="l"/>
+            <a:r>
+              <a:rPr sz="1450" b="1">
+                <a:solidFill>
+                  <a:srgbClr val="0E7A4F"/>
+                </a:solidFill>
+                <a:latin typeface="微软雅黑"/>
+                <a:ea typeface="微软雅黑"/>
+                <a:cs typeface="微软雅黑"/>
+              </a:rPr>
+              <a:t>22 个测试/评测套件 · 全部通过（含攻防评测 9 项实验 + 留出集评测 + 控制面七组）</a:t>
+            </a:r>
+          </a:p>
+        </p:txBody>
+      </p:sp>
+      <p:sp>
+        <p:nvSpPr>
+          <p:cNvPr id="6" name="Rounded Rectangle 5"/>
+          <p:cNvSpPr/>
+          <p:nvPr/>
+        </p:nvSpPr>
+        <p:spPr>
+          <a:xfrm>
+            <a:off x="640080" y="2103120"/>
+            <a:ext cx="5486400" cy="603504"/>
+          </a:xfrm>
+          <a:prstGeom prst="roundRect">
+            <a:avLst>
+              <a:gd name="adj" fmla="val 10000"/>
+            </a:avLst>
+          </a:prstGeom>
+          <a:solidFill>
+            <a:srgbClr val="FFFFFF"/>
+          </a:solidFill>
+          <a:ln>
+            <a:noFill/>
+          </a:ln>
+          <a:effectLst/>
+        </p:spPr>
+        <p:style>
+          <a:lnRef idx="1">
+            <a:schemeClr val="accent1"/>
+          </a:lnRef>
+          <a:fillRef idx="3">
+            <a:schemeClr val="accent1"/>
+          </a:fillRef>
+          <a:effectRef idx="2">
+            <a:schemeClr val="accent1"/>
+          </a:effectRef>
+          <a:fontRef idx="minor">
+            <a:schemeClr val="lt1"/>
+          </a:fontRef>
+        </p:style>
+        <p:txBody>
+          <a:bodyPr rtlCol="0" anchor="ctr"/>
+          <a:lstStyle/>
+          <a:p>
+            <a:pPr algn="ctr"/>
+          </a:p>
+        </p:txBody>
+      </p:sp>
+      <p:sp>
+        <p:nvSpPr>
+          <p:cNvPr id="7" name="TextBox 6"/>
+          <p:cNvSpPr txBox="1"/>
+          <p:nvPr/>
+        </p:nvSpPr>
+        <p:spPr>
+          <a:xfrm>
+            <a:off x="914400" y="2103120"/>
+            <a:ext cx="2194560" cy="603504"/>
+          </a:xfrm>
+          <a:prstGeom prst="rect">
+            <a:avLst/>
+          </a:prstGeom>
+          <a:noFill/>
+        </p:spPr>
+        <p:txBody>
+          <a:bodyPr wrap="square" anchor="ctr" lIns="0" rIns="0" tIns="0" bIns="0">
+            <a:spAutoFit/>
+          </a:bodyPr>
+          <a:lstStyle/>
+          <a:p>
+            <a:pPr algn="l"/>
+            <a:r>
+              <a:rPr sz="1400" b="1">
+                <a:solidFill>
+                  <a:srgbClr val="1A2332"/>
+                </a:solidFill>
+                <a:latin typeface="微软雅黑"/>
+                <a:ea typeface="微软雅黑"/>
+                <a:cs typeface="微软雅黑"/>
+              </a:rPr>
+              <a:t>隐私引擎 + 回归</a:t>
+            </a:r>
+          </a:p>
+        </p:txBody>
+      </p:sp>
+      <p:sp>
+        <p:nvSpPr>
+          <p:cNvPr id="8" name="TextBox 7"/>
+          <p:cNvSpPr txBox="1"/>
+          <p:nvPr/>
+        </p:nvSpPr>
+        <p:spPr>
+          <a:xfrm>
+            <a:off x="3154680" y="2103120"/>
+            <a:ext cx="2468880" cy="603504"/>
+          </a:xfrm>
+          <a:prstGeom prst="rect">
+            <a:avLst/>
+          </a:prstGeom>
+          <a:noFill/>
+        </p:spPr>
+        <p:txBody>
+          <a:bodyPr wrap="square" anchor="ctr" lIns="0" rIns="0" tIns="0" bIns="0">
+            <a:spAutoFit/>
+          </a:bodyPr>
+          <a:lstStyle/>
+          <a:p>
+            <a:pPr algn="l"/>
+            <a:r>
+              <a:rPr sz="1150" b="0">
+                <a:solidFill>
+                  <a:srgbClr val="6B7A72"/>
+                </a:solidFill>
+                <a:latin typeface="微软雅黑"/>
+                <a:ea typeface="微软雅黑"/>
+                <a:cs typeface="微软雅黑"/>
+              </a:rPr>
+              <a:t>27 类实体；泄露 0 / 误伤 0 / 落盘扫描</a:t>
+            </a:r>
+          </a:p>
+        </p:txBody>
+      </p:sp>
+      <p:sp>
+        <p:nvSpPr>
+          <p:cNvPr id="9" name="TextBox 8"/>
+          <p:cNvSpPr txBox="1"/>
+          <p:nvPr/>
+        </p:nvSpPr>
+        <p:spPr>
+          <a:xfrm>
+            <a:off x="5577840" y="2103120"/>
+            <a:ext cx="457200" cy="603504"/>
+          </a:xfrm>
+          <a:prstGeom prst="rect">
+            <a:avLst/>
+          </a:prstGeom>
+          <a:noFill/>
+        </p:spPr>
+        <p:txBody>
+          <a:bodyPr wrap="square" anchor="ctr" lIns="0" rIns="0" tIns="0" bIns="0">
+            <a:spAutoFit/>
+          </a:bodyPr>
+          <a:lstStyle/>
+          <a:p>
+            <a:pPr algn="l"/>
+            <a:r>
+              <a:rPr sz="1800" b="1">
+                <a:solidFill>
+                  <a:srgbClr val="0E7A4F"/>
+                </a:solidFill>
+                <a:latin typeface="微软雅黑"/>
+                <a:ea typeface="微软雅黑"/>
+                <a:cs typeface="微软雅黑"/>
+              </a:rPr>
+              <a:t>✓</a:t>
+            </a:r>
+          </a:p>
+        </p:txBody>
+      </p:sp>
+      <p:sp>
+        <p:nvSpPr>
+          <p:cNvPr id="10" name="Rounded Rectangle 9"/>
+          <p:cNvSpPr/>
+          <p:nvPr/>
+        </p:nvSpPr>
+        <p:spPr>
+          <a:xfrm>
+            <a:off x="640080" y="2788920"/>
+            <a:ext cx="5486400" cy="603504"/>
+          </a:xfrm>
+          <a:prstGeom prst="roundRect">
+            <a:avLst>
+              <a:gd name="adj" fmla="val 10000"/>
+            </a:avLst>
+          </a:prstGeom>
+          <a:solidFill>
+            <a:srgbClr val="FFFFFF"/>
+          </a:solidFill>
+          <a:ln>
+            <a:noFill/>
+          </a:ln>
+          <a:effectLst/>
+        </p:spPr>
+        <p:style>
+          <a:lnRef idx="1">
+            <a:schemeClr val="accent1"/>
+          </a:lnRef>
+          <a:fillRef idx="3">
+            <a:schemeClr val="accent1"/>
+          </a:fillRef>
+          <a:effectRef idx="2">
+            <a:schemeClr val="accent1"/>
+          </a:effectRef>
+          <a:fontRef idx="minor">
+            <a:schemeClr val="lt1"/>
+          </a:fontRef>
+        </p:style>
+        <p:txBody>
+          <a:bodyPr rtlCol="0" anchor="ctr"/>
+          <a:lstStyle/>
+          <a:p>
+            <a:pPr algn="ctr"/>
+          </a:p>
+        </p:txBody>
+      </p:sp>
+      <p:sp>
+        <p:nvSpPr>
+          <p:cNvPr id="11" name="TextBox 10"/>
+          <p:cNvSpPr txBox="1"/>
+          <p:nvPr/>
+        </p:nvSpPr>
+        <p:spPr>
+          <a:xfrm>
+            <a:off x="914400" y="2788920"/>
+            <a:ext cx="2194560" cy="603504"/>
+          </a:xfrm>
+          <a:prstGeom prst="rect">
+            <a:avLst/>
+          </a:prstGeom>
+          <a:noFill/>
+        </p:spPr>
+        <p:txBody>
+          <a:bodyPr wrap="square" anchor="ctr" lIns="0" rIns="0" tIns="0" bIns="0">
+            <a:spAutoFit/>
+          </a:bodyPr>
+          <a:lstStyle/>
+          <a:p>
+            <a:pPr algn="l"/>
+            <a:r>
+              <a:rPr sz="1400" b="1">
+                <a:solidFill>
+                  <a:srgbClr val="1A2332"/>
+                </a:solidFill>
+                <a:latin typeface="微软雅黑"/>
+                <a:ea typeface="微软雅黑"/>
+                <a:cs typeface="微软雅黑"/>
+              </a:rPr>
+              <a:t>对抗集 + 真实文档</a:t>
+            </a:r>
+          </a:p>
+        </p:txBody>
+      </p:sp>
+      <p:sp>
+        <p:nvSpPr>
+          <p:cNvPr id="12" name="TextBox 11"/>
+          <p:cNvSpPr txBox="1"/>
+          <p:nvPr/>
+        </p:nvSpPr>
+        <p:spPr>
+          <a:xfrm>
+            <a:off x="3154680" y="2788920"/>
+            <a:ext cx="2468880" cy="603504"/>
+          </a:xfrm>
+          <a:prstGeom prst="rect">
+            <a:avLst/>
+          </a:prstGeom>
+          <a:noFill/>
+        </p:spPr>
+        <p:txBody>
+          <a:bodyPr wrap="square" anchor="ctr" lIns="0" rIns="0" tIns="0" bIns="0">
+            <a:spAutoFit/>
+          </a:bodyPr>
+          <a:lstStyle/>
+          <a:p>
+            <a:pPr algn="l"/>
+            <a:r>
+              <a:rPr sz="1150" b="0">
+                <a:solidFill>
+                  <a:srgbClr val="6B7A72"/>
+                </a:solidFill>
+                <a:latin typeface="微软雅黑"/>
+                <a:ea typeface="微软雅黑"/>
+                <a:cs typeface="微软雅黑"/>
+              </a:rPr>
+              <a:t>14 项格式变体；8 种真实格式全链路</a:t>
+            </a:r>
+          </a:p>
+        </p:txBody>
+      </p:sp>
+      <p:sp>
+        <p:nvSpPr>
+          <p:cNvPr id="13" name="TextBox 12"/>
+          <p:cNvSpPr txBox="1"/>
+          <p:nvPr/>
+        </p:nvSpPr>
+        <p:spPr>
+          <a:xfrm>
+            <a:off x="5577840" y="2788920"/>
+            <a:ext cx="457200" cy="603504"/>
+          </a:xfrm>
+          <a:prstGeom prst="rect">
+            <a:avLst/>
+          </a:prstGeom>
+          <a:noFill/>
+        </p:spPr>
+        <p:txBody>
+          <a:bodyPr wrap="square" anchor="ctr" lIns="0" rIns="0" tIns="0" bIns="0">
+            <a:spAutoFit/>
+          </a:bodyPr>
+          <a:lstStyle/>
+          <a:p>
+            <a:pPr algn="l"/>
+            <a:r>
+              <a:rPr sz="1800" b="1">
+                <a:solidFill>
+                  <a:srgbClr val="0E7A4F"/>
+                </a:solidFill>
+                <a:latin typeface="微软雅黑"/>
+                <a:ea typeface="微软雅黑"/>
+                <a:cs typeface="微软雅黑"/>
+              </a:rPr>
+              <a:t>✓</a:t>
+            </a:r>
+          </a:p>
+        </p:txBody>
+      </p:sp>
+      <p:sp>
+        <p:nvSpPr>
+          <p:cNvPr id="14" name="Rounded Rectangle 13"/>
+          <p:cNvSpPr/>
+          <p:nvPr/>
+        </p:nvSpPr>
+        <p:spPr>
+          <a:xfrm>
+            <a:off x="640080" y="3474720"/>
+            <a:ext cx="5486400" cy="603504"/>
+          </a:xfrm>
+          <a:prstGeom prst="roundRect">
+            <a:avLst>
+              <a:gd name="adj" fmla="val 10000"/>
+            </a:avLst>
+          </a:prstGeom>
+          <a:solidFill>
+            <a:srgbClr val="FFFFFF"/>
+          </a:solidFill>
+          <a:ln>
+            <a:noFill/>
+          </a:ln>
+          <a:effectLst/>
+        </p:spPr>
+        <p:style>
+          <a:lnRef idx="1">
+            <a:schemeClr val="accent1"/>
+          </a:lnRef>
+          <a:fillRef idx="3">
+            <a:schemeClr val="accent1"/>
+          </a:fillRef>
+          <a:effectRef idx="2">
+            <a:schemeClr val="accent1"/>
+          </a:effectRef>
+          <a:fontRef idx="minor">
+            <a:schemeClr val="lt1"/>
+          </a:fontRef>
+        </p:style>
+        <p:txBody>
+          <a:bodyPr rtlCol="0" anchor="ctr"/>
+          <a:lstStyle/>
+          <a:p>
+            <a:pPr algn="ctr"/>
+          </a:p>
+        </p:txBody>
+      </p:sp>
+      <p:sp>
+        <p:nvSpPr>
+          <p:cNvPr id="15" name="TextBox 14"/>
+          <p:cNvSpPr txBox="1"/>
+          <p:nvPr/>
+        </p:nvSpPr>
+        <p:spPr>
+          <a:xfrm>
+            <a:off x="914400" y="3474720"/>
+            <a:ext cx="2194560" cy="603504"/>
+          </a:xfrm>
+          <a:prstGeom prst="rect">
+            <a:avLst/>
+          </a:prstGeom>
+          <a:noFill/>
+        </p:spPr>
+        <p:txBody>
+          <a:bodyPr wrap="square" anchor="ctr" lIns="0" rIns="0" tIns="0" bIns="0">
+            <a:spAutoFit/>
+          </a:bodyPr>
+          <a:lstStyle/>
+          <a:p>
+            <a:pPr algn="l"/>
+            <a:r>
+              <a:rPr sz="1400" b="1">
+                <a:solidFill>
+                  <a:srgbClr val="1A2332"/>
+                </a:solidFill>
+                <a:latin typeface="微软雅黑"/>
+                <a:ea typeface="微软雅黑"/>
+                <a:cs typeface="微软雅黑"/>
+              </a:rPr>
+              <a:t>审计黑匣子</a:t>
+            </a:r>
+          </a:p>
+        </p:txBody>
+      </p:sp>
+      <p:sp>
+        <p:nvSpPr>
+          <p:cNvPr id="16" name="TextBox 15"/>
+          <p:cNvSpPr txBox="1"/>
+          <p:nvPr/>
+        </p:nvSpPr>
+        <p:spPr>
+          <a:xfrm>
+            <a:off x="3154680" y="3474720"/>
+            <a:ext cx="2468880" cy="603504"/>
+          </a:xfrm>
+          <a:prstGeom prst="rect">
+            <a:avLst/>
+          </a:prstGeom>
+          <a:noFill/>
+        </p:spPr>
+        <p:txBody>
+          <a:bodyPr wrap="square" anchor="ctr" lIns="0" rIns="0" tIns="0" bIns="0">
+            <a:spAutoFit/>
+          </a:bodyPr>
+          <a:lstStyle/>
+          <a:p>
+            <a:pPr algn="l"/>
+            <a:r>
+              <a:rPr sz="1150" b="0">
+                <a:solidFill>
+                  <a:srgbClr val="6B7A72"/>
+                </a:solidFill>
+                <a:latin typeface="微软雅黑"/>
+                <a:ea typeface="微软雅黑"/>
+                <a:cs typeface="微软雅黑"/>
+              </a:rPr>
+              <a:t>哈希链 + 链锚点 19/19</a:t>
+            </a:r>
+          </a:p>
+        </p:txBody>
+      </p:sp>
+      <p:sp>
+        <p:nvSpPr>
+          <p:cNvPr id="17" name="TextBox 16"/>
+          <p:cNvSpPr txBox="1"/>
+          <p:nvPr/>
+        </p:nvSpPr>
+        <p:spPr>
+          <a:xfrm>
+            <a:off x="5577840" y="3474720"/>
+            <a:ext cx="457200" cy="603504"/>
+          </a:xfrm>
+          <a:prstGeom prst="rect">
+            <a:avLst/>
+          </a:prstGeom>
+          <a:noFill/>
+        </p:spPr>
+        <p:txBody>
+          <a:bodyPr wrap="square" anchor="ctr" lIns="0" rIns="0" tIns="0" bIns="0">
+            <a:spAutoFit/>
+          </a:bodyPr>
+          <a:lstStyle/>
+          <a:p>
+            <a:pPr algn="l"/>
+            <a:r>
+              <a:rPr sz="1800" b="1">
+                <a:solidFill>
+                  <a:srgbClr val="0E7A4F"/>
+                </a:solidFill>
+                <a:latin typeface="微软雅黑"/>
+                <a:ea typeface="微软雅黑"/>
+                <a:cs typeface="微软雅黑"/>
+              </a:rPr>
+              <a:t>✓</a:t>
+            </a:r>
+          </a:p>
+        </p:txBody>
+      </p:sp>
+      <p:sp>
+        <p:nvSpPr>
+          <p:cNvPr id="18" name="Rounded Rectangle 17"/>
+          <p:cNvSpPr/>
+          <p:nvPr/>
+        </p:nvSpPr>
+        <p:spPr>
+          <a:xfrm>
+            <a:off x="640080" y="4160520"/>
+            <a:ext cx="5486400" cy="603504"/>
+          </a:xfrm>
+          <a:prstGeom prst="roundRect">
+            <a:avLst>
+              <a:gd name="adj" fmla="val 10000"/>
+            </a:avLst>
+          </a:prstGeom>
+          <a:solidFill>
+            <a:srgbClr val="FFFFFF"/>
+          </a:solidFill>
+          <a:ln>
+            <a:noFill/>
+          </a:ln>
+          <a:effectLst/>
+        </p:spPr>
+        <p:style>
+          <a:lnRef idx="1">
+            <a:schemeClr val="accent1"/>
+          </a:lnRef>
+          <a:fillRef idx="3">
+            <a:schemeClr val="accent1"/>
+          </a:fillRef>
+          <a:effectRef idx="2">
+            <a:schemeClr val="accent1"/>
+          </a:effectRef>
+          <a:fontRef idx="minor">
+            <a:schemeClr val="lt1"/>
+          </a:fontRef>
+        </p:style>
+        <p:txBody>
+          <a:bodyPr rtlCol="0" anchor="ctr"/>
+          <a:lstStyle/>
+          <a:p>
+            <a:pPr algn="ctr"/>
+          </a:p>
+        </p:txBody>
+      </p:sp>
+      <p:sp>
+        <p:nvSpPr>
+          <p:cNvPr id="19" name="TextBox 18"/>
+          <p:cNvSpPr txBox="1"/>
+          <p:nvPr/>
+        </p:nvSpPr>
+        <p:spPr>
+          <a:xfrm>
+            <a:off x="914400" y="4160520"/>
+            <a:ext cx="2194560" cy="603504"/>
+          </a:xfrm>
+          <a:prstGeom prst="rect">
+            <a:avLst/>
+          </a:prstGeom>
+          <a:noFill/>
+        </p:spPr>
+        <p:txBody>
+          <a:bodyPr wrap="square" anchor="ctr" lIns="0" rIns="0" tIns="0" bIns="0">
+            <a:spAutoFit/>
+          </a:bodyPr>
+          <a:lstStyle/>
+          <a:p>
+            <a:pPr algn="l"/>
+            <a:r>
+              <a:rPr sz="1400" b="1">
+                <a:solidFill>
+                  <a:srgbClr val="1A2332"/>
+                </a:solidFill>
+                <a:latin typeface="微软雅黑"/>
+                <a:ea typeface="微软雅黑"/>
+                <a:cs typeface="微软雅黑"/>
+              </a:rPr>
+              <a:t>命令白名单</a:t>
+            </a:r>
+          </a:p>
+        </p:txBody>
+      </p:sp>
+      <p:sp>
+        <p:nvSpPr>
+          <p:cNvPr id="20" name="TextBox 19"/>
+          <p:cNvSpPr txBox="1"/>
+          <p:nvPr/>
+        </p:nvSpPr>
+        <p:spPr>
+          <a:xfrm>
+            <a:off x="3154680" y="4160520"/>
+            <a:ext cx="2468880" cy="603504"/>
+          </a:xfrm>
+          <a:prstGeom prst="rect">
+            <a:avLst/>
+          </a:prstGeom>
+          <a:noFill/>
+        </p:spPr>
+        <p:txBody>
+          <a:bodyPr wrap="square" anchor="ctr" lIns="0" rIns="0" tIns="0" bIns="0">
+            <a:spAutoFit/>
+          </a:bodyPr>
+          <a:lstStyle/>
+          <a:p>
+            <a:pPr algn="l"/>
+            <a:r>
+              <a:rPr sz="1150" b="0">
+                <a:solidFill>
+                  <a:srgbClr val="6B7A72"/>
+                </a:solidFill>
+                <a:latin typeface="微软雅黑"/>
+                <a:ea typeface="微软雅黑"/>
+                <a:cs typeface="微软雅黑"/>
+              </a:rPr>
+              <a:t>高危入口全拦截 + 进程容器 + 严格模式</a:t>
+            </a:r>
+          </a:p>
+        </p:txBody>
+      </p:sp>
+      <p:sp>
+        <p:nvSpPr>
+          <p:cNvPr id="21" name="TextBox 20"/>
+          <p:cNvSpPr txBox="1"/>
+          <p:nvPr/>
+        </p:nvSpPr>
+        <p:spPr>
+          <a:xfrm>
+            <a:off x="5577840" y="4160520"/>
+            <a:ext cx="457200" cy="603504"/>
+          </a:xfrm>
+          <a:prstGeom prst="rect">
+            <a:avLst/>
+          </a:prstGeom>
+          <a:noFill/>
+        </p:spPr>
+        <p:txBody>
+          <a:bodyPr wrap="square" anchor="ctr" lIns="0" rIns="0" tIns="0" bIns="0">
+            <a:spAutoFit/>
+          </a:bodyPr>
+          <a:lstStyle/>
+          <a:p>
+            <a:pPr algn="l"/>
+            <a:r>
+              <a:rPr sz="1800" b="1">
+                <a:solidFill>
+                  <a:srgbClr val="0E7A4F"/>
+                </a:solidFill>
+                <a:latin typeface="微软雅黑"/>
+                <a:ea typeface="微软雅黑"/>
+                <a:cs typeface="微软雅黑"/>
+              </a:rPr>
+              <a:t>✓</a:t>
+            </a:r>
+          </a:p>
+        </p:txBody>
+      </p:sp>
+      <p:sp>
+        <p:nvSpPr>
+          <p:cNvPr id="22" name="Rounded Rectangle 21"/>
+          <p:cNvSpPr/>
+          <p:nvPr/>
+        </p:nvSpPr>
+        <p:spPr>
+          <a:xfrm>
+            <a:off x="640080" y="4846320"/>
+            <a:ext cx="5486400" cy="603504"/>
+          </a:xfrm>
+          <a:prstGeom prst="roundRect">
+            <a:avLst>
+              <a:gd name="adj" fmla="val 10000"/>
+            </a:avLst>
+          </a:prstGeom>
+          <a:solidFill>
+            <a:srgbClr val="FFFFFF"/>
+          </a:solidFill>
+          <a:ln>
+            <a:noFill/>
+          </a:ln>
+          <a:effectLst/>
+        </p:spPr>
+        <p:style>
+          <a:lnRef idx="1">
+            <a:schemeClr val="accent1"/>
+          </a:lnRef>
+          <a:fillRef idx="3">
+            <a:schemeClr val="accent1"/>
+          </a:fillRef>
+          <a:effectRef idx="2">
+            <a:schemeClr val="accent1"/>
+          </a:effectRef>
+          <a:fontRef idx="minor">
+            <a:schemeClr val="lt1"/>
+          </a:fontRef>
+        </p:style>
+        <p:txBody>
+          <a:bodyPr rtlCol="0" anchor="ctr"/>
+          <a:lstStyle/>
+          <a:p>
+            <a:pPr algn="ctr"/>
+          </a:p>
+        </p:txBody>
+      </p:sp>
+      <p:sp>
+        <p:nvSpPr>
+          <p:cNvPr id="23" name="TextBox 22"/>
+          <p:cNvSpPr txBox="1"/>
+          <p:nvPr/>
+        </p:nvSpPr>
+        <p:spPr>
+          <a:xfrm>
+            <a:off x="914400" y="4846320"/>
+            <a:ext cx="2194560" cy="603504"/>
+          </a:xfrm>
+          <a:prstGeom prst="rect">
+            <a:avLst/>
+          </a:prstGeom>
+          <a:noFill/>
+        </p:spPr>
+        <p:txBody>
+          <a:bodyPr wrap="square" anchor="ctr" lIns="0" rIns="0" tIns="0" bIns="0">
+            <a:spAutoFit/>
+          </a:bodyPr>
+          <a:lstStyle/>
+          <a:p>
+            <a:pPr algn="l"/>
+            <a:r>
+              <a:rPr sz="1400" b="1">
+                <a:solidFill>
+                  <a:srgbClr val="1A2332"/>
+                </a:solidFill>
+                <a:latin typeface="微软雅黑"/>
+                <a:ea typeface="微软雅黑"/>
+                <a:cs typeface="微软雅黑"/>
+              </a:rPr>
+              <a:t>插件 + 记忆 + 工作流</a:t>
+            </a:r>
+          </a:p>
+        </p:txBody>
+      </p:sp>
+      <p:sp>
+        <p:nvSpPr>
+          <p:cNvPr id="24" name="TextBox 23"/>
+          <p:cNvSpPr txBox="1"/>
+          <p:nvPr/>
+        </p:nvSpPr>
+        <p:spPr>
+          <a:xfrm>
+            <a:off x="3154680" y="4846320"/>
+            <a:ext cx="2468880" cy="603504"/>
+          </a:xfrm>
+          <a:prstGeom prst="rect">
+            <a:avLst/>
+          </a:prstGeom>
+          <a:noFill/>
+        </p:spPr>
+        <p:txBody>
+          <a:bodyPr wrap="square" anchor="ctr" lIns="0" rIns="0" tIns="0" bIns="0">
+            <a:spAutoFit/>
+          </a:bodyPr>
+          <a:lstStyle/>
+          <a:p>
+            <a:pPr algn="l"/>
+            <a:r>
+              <a:rPr sz="1150" b="0">
+                <a:solidFill>
+                  <a:srgbClr val="6B7A72"/>
+                </a:solidFill>
+                <a:latin typeface="微软雅黑"/>
+                <a:ea typeface="微软雅黑"/>
+                <a:cs typeface="微软雅黑"/>
+              </a:rPr>
+              <a:t>宿主契约 / 能力端到端 / 执行与导出</a:t>
+            </a:r>
+          </a:p>
+        </p:txBody>
+      </p:sp>
+      <p:sp>
+        <p:nvSpPr>
+          <p:cNvPr id="25" name="TextBox 24"/>
+          <p:cNvSpPr txBox="1"/>
+          <p:nvPr/>
+        </p:nvSpPr>
+        <p:spPr>
+          <a:xfrm>
+            <a:off x="5577840" y="4846320"/>
+            <a:ext cx="457200" cy="603504"/>
+          </a:xfrm>
+          <a:prstGeom prst="rect">
+            <a:avLst/>
+          </a:prstGeom>
+          <a:noFill/>
+        </p:spPr>
+        <p:txBody>
+          <a:bodyPr wrap="square" anchor="ctr" lIns="0" rIns="0" tIns="0" bIns="0">
+            <a:spAutoFit/>
+          </a:bodyPr>
+          <a:lstStyle/>
+          <a:p>
+            <a:pPr algn="l"/>
+            <a:r>
+              <a:rPr sz="1800" b="1">
+                <a:solidFill>
+                  <a:srgbClr val="0E7A4F"/>
+                </a:solidFill>
+                <a:latin typeface="微软雅黑"/>
+                <a:ea typeface="微软雅黑"/>
+                <a:cs typeface="微软雅黑"/>
+              </a:rPr>
+              <a:t>✓</a:t>
+            </a:r>
+          </a:p>
+        </p:txBody>
+      </p:sp>
+      <p:sp>
+        <p:nvSpPr>
+          <p:cNvPr id="26" name="Rounded Rectangle 25"/>
+          <p:cNvSpPr/>
+          <p:nvPr/>
+        </p:nvSpPr>
+        <p:spPr>
+          <a:xfrm>
+            <a:off x="640080" y="5532120"/>
+            <a:ext cx="5486400" cy="603504"/>
+          </a:xfrm>
+          <a:prstGeom prst="roundRect">
+            <a:avLst>
+              <a:gd name="adj" fmla="val 10000"/>
+            </a:avLst>
+          </a:prstGeom>
+          <a:solidFill>
+            <a:srgbClr val="FFFFFF"/>
+          </a:solidFill>
+          <a:ln>
+            <a:noFill/>
+          </a:ln>
+          <a:effectLst/>
+        </p:spPr>
+        <p:style>
+          <a:lnRef idx="1">
+            <a:schemeClr val="accent1"/>
+          </a:lnRef>
+          <a:fillRef idx="3">
+            <a:schemeClr val="accent1"/>
+          </a:fillRef>
+          <a:effectRef idx="2">
+            <a:schemeClr val="accent1"/>
+          </a:effectRef>
+          <a:fontRef idx="minor">
+            <a:schemeClr val="lt1"/>
+          </a:fontRef>
+        </p:style>
+        <p:txBody>
+          <a:bodyPr rtlCol="0" anchor="ctr"/>
+          <a:lstStyle/>
+          <a:p>
+            <a:pPr algn="ctr"/>
+          </a:p>
+        </p:txBody>
+      </p:sp>
+      <p:sp>
+        <p:nvSpPr>
+          <p:cNvPr id="27" name="TextBox 26"/>
+          <p:cNvSpPr txBox="1"/>
+          <p:nvPr/>
+        </p:nvSpPr>
+        <p:spPr>
+          <a:xfrm>
+            <a:off x="914400" y="5532120"/>
+            <a:ext cx="2194560" cy="603504"/>
+          </a:xfrm>
+          <a:prstGeom prst="rect">
+            <a:avLst/>
+          </a:prstGeom>
+          <a:noFill/>
+        </p:spPr>
+        <p:txBody>
+          <a:bodyPr wrap="square" anchor="ctr" lIns="0" rIns="0" tIns="0" bIns="0">
+            <a:spAutoFit/>
+          </a:bodyPr>
+          <a:lstStyle/>
+          <a:p>
+            <a:pPr algn="l"/>
+            <a:r>
+              <a:rPr sz="1400" b="1">
+                <a:solidFill>
+                  <a:srgbClr val="1A2332"/>
+                </a:solidFill>
+                <a:latin typeface="微软雅黑"/>
+                <a:ea typeface="微软雅黑"/>
+                <a:cs typeface="微软雅黑"/>
+              </a:rPr>
+              <a:t>laya 插件 + 窗口</a:t>
+            </a:r>
+          </a:p>
+        </p:txBody>
+      </p:sp>
+      <p:sp>
+        <p:nvSpPr>
+          <p:cNvPr id="28" name="TextBox 27"/>
+          <p:cNvSpPr txBox="1"/>
+          <p:nvPr/>
+        </p:nvSpPr>
+        <p:spPr>
+          <a:xfrm>
+            <a:off x="3154680" y="5532120"/>
+            <a:ext cx="2468880" cy="603504"/>
+          </a:xfrm>
+          <a:prstGeom prst="rect">
+            <a:avLst/>
+          </a:prstGeom>
+          <a:noFill/>
+        </p:spPr>
+        <p:txBody>
+          <a:bodyPr wrap="square" anchor="ctr" lIns="0" rIns="0" tIns="0" bIns="0">
+            <a:spAutoFit/>
+          </a:bodyPr>
+          <a:lstStyle/>
+          <a:p>
+            <a:pPr algn="l"/>
+            <a:r>
+              <a:rPr sz="1150" b="0">
+                <a:solidFill>
+                  <a:srgbClr val="6B7A72"/>
+                </a:solidFill>
+                <a:latin typeface="微软雅黑"/>
+                <a:ea typeface="微软雅黑"/>
+                <a:cs typeface="微软雅黑"/>
+              </a:rPr>
+              <a:t>模型与正则双后端；8 向拖拽锚定</a:t>
+            </a:r>
+          </a:p>
+        </p:txBody>
+      </p:sp>
+      <p:sp>
+        <p:nvSpPr>
+          <p:cNvPr id="29" name="TextBox 28"/>
+          <p:cNvSpPr txBox="1"/>
+          <p:nvPr/>
+        </p:nvSpPr>
+        <p:spPr>
+          <a:xfrm>
+            <a:off x="5577840" y="5532120"/>
+            <a:ext cx="457200" cy="603504"/>
+          </a:xfrm>
+          <a:prstGeom prst="rect">
+            <a:avLst/>
+          </a:prstGeom>
+          <a:noFill/>
+        </p:spPr>
+        <p:txBody>
+          <a:bodyPr wrap="square" anchor="ctr" lIns="0" rIns="0" tIns="0" bIns="0">
+            <a:spAutoFit/>
+          </a:bodyPr>
+          <a:lstStyle/>
+          <a:p>
+            <a:pPr algn="l"/>
+            <a:r>
+              <a:rPr sz="1800" b="1">
+                <a:solidFill>
+                  <a:srgbClr val="0E7A4F"/>
+                </a:solidFill>
+                <a:latin typeface="微软雅黑"/>
+                <a:ea typeface="微软雅黑"/>
+                <a:cs typeface="微软雅黑"/>
+              </a:rPr>
+              <a:t>✓</a:t>
+            </a:r>
+          </a:p>
+        </p:txBody>
+      </p:sp>
+      <p:sp>
+        <p:nvSpPr>
+          <p:cNvPr id="30" name="Rounded Rectangle 29"/>
+          <p:cNvSpPr/>
+          <p:nvPr/>
+        </p:nvSpPr>
+        <p:spPr>
+          <a:xfrm>
+            <a:off x="6537960" y="1737360"/>
+            <a:ext cx="4983480" cy="4206240"/>
+          </a:xfrm>
+          <a:prstGeom prst="roundRect">
+            <a:avLst>
+              <a:gd name="adj" fmla="val 5000"/>
+            </a:avLst>
+          </a:prstGeom>
+          <a:solidFill>
+            <a:srgbClr val="0A5C3B"/>
+          </a:solidFill>
+          <a:ln>
+            <a:noFill/>
+          </a:ln>
+          <a:effectLst/>
+          <a:effectLst>
+            <a:outerShdw blurRad="101600" dist="25400" dir="5400000" rotWithShape="0">
+              <a:srgbClr val="0B2A1E">
+                <a:alpha val="14000"/>
+              </a:srgbClr>
+            </a:outerShdw>
+          </a:effectLst>
+        </p:spPr>
+        <p:style>
+          <a:lnRef idx="1">
+            <a:schemeClr val="accent1"/>
+          </a:lnRef>
+          <a:fillRef idx="3">
+            <a:schemeClr val="accent1"/>
+          </a:fillRef>
+          <a:effectRef idx="2">
+            <a:schemeClr val="accent1"/>
+          </a:effectRef>
+          <a:fontRef idx="minor">
+            <a:schemeClr val="lt1"/>
+          </a:fontRef>
+        </p:style>
+        <p:txBody>
+          <a:bodyPr rtlCol="0" anchor="ctr"/>
+          <a:lstStyle/>
+          <a:p>
+            <a:pPr algn="ctr"/>
+          </a:p>
+        </p:txBody>
+      </p:sp>
+      <p:sp>
+        <p:nvSpPr>
+          <p:cNvPr id="31" name="TextBox 30"/>
+          <p:cNvSpPr txBox="1"/>
+          <p:nvPr/>
+        </p:nvSpPr>
+        <p:spPr>
+          <a:xfrm>
+            <a:off x="6812280" y="2057400"/>
+            <a:ext cx="4434840" cy="914400"/>
+          </a:xfrm>
+          <a:prstGeom prst="rect">
+            <a:avLst/>
+          </a:prstGeom>
+          <a:noFill/>
+        </p:spPr>
+        <p:txBody>
+          <a:bodyPr wrap="square" anchor="ctr" lIns="0" rIns="0" tIns="0" bIns="0">
+            <a:spAutoFit/>
+          </a:bodyPr>
+          <a:lstStyle/>
+          <a:p>
+            <a:pPr algn="ctr"/>
+            <a:r>
+              <a:rPr sz="5200" b="1">
+                <a:solidFill>
+                  <a:srgbClr val="FFFFFF"/>
+                </a:solidFill>
+                <a:latin typeface="微软雅黑"/>
+                <a:ea typeface="微软雅黑"/>
+                <a:cs typeface="微软雅黑"/>
+              </a:rPr>
+              <a:t>1 个 exe</a:t>
+            </a:r>
+          </a:p>
+        </p:txBody>
+      </p:sp>
+      <p:sp>
+        <p:nvSpPr>
+          <p:cNvPr id="32" name="TextBox 31"/>
+          <p:cNvSpPr txBox="1"/>
+          <p:nvPr/>
+        </p:nvSpPr>
+        <p:spPr>
+          <a:xfrm>
+            <a:off x="6812280" y="3063240"/>
+            <a:ext cx="4434840" cy="457200"/>
+          </a:xfrm>
+          <a:prstGeom prst="rect">
+            <a:avLst/>
+          </a:prstGeom>
+          <a:noFill/>
+        </p:spPr>
+        <p:txBody>
+          <a:bodyPr wrap="square" anchor="t" lIns="0" rIns="0" tIns="0" bIns="0">
+            <a:spAutoFit/>
+          </a:bodyPr>
+          <a:lstStyle/>
+          <a:p>
+            <a:pPr algn="ctr"/>
+            <a:r>
+              <a:rPr sz="1500" b="1">
+                <a:solidFill>
+                  <a:srgbClr val="8FD3B4"/>
+                </a:solidFill>
+                <a:latin typeface="微软雅黑"/>
+                <a:ea typeface="微软雅黑"/>
+                <a:cs typeface="微软雅黑"/>
+              </a:rPr>
+              <a:t>免安装 · 双击即用 · 无需脚本</a:t>
+            </a:r>
+          </a:p>
+        </p:txBody>
+      </p:sp>
+      <p:sp>
+        <p:nvSpPr>
+          <p:cNvPr id="33" name="Rectangle 32"/>
+          <p:cNvSpPr/>
+          <p:nvPr/>
+        </p:nvSpPr>
+        <p:spPr>
+          <a:xfrm>
+            <a:off x="6949440" y="3611880"/>
+            <a:ext cx="4160520" cy="18288"/>
+          </a:xfrm>
+          <a:prstGeom prst="rect">
+            <a:avLst/>
+          </a:prstGeom>
+          <a:solidFill>
+            <a:srgbClr val="2E6B50"/>
+          </a:solidFill>
+          <a:ln>
+            <a:noFill/>
+          </a:ln>
+          <a:effectLst/>
+        </p:spPr>
+        <p:style>
+          <a:lnRef idx="1">
+            <a:schemeClr val="accent1"/>
+          </a:lnRef>
+          <a:fillRef idx="3">
+            <a:schemeClr val="accent1"/>
+          </a:fillRef>
+          <a:effectRef idx="2">
+            <a:schemeClr val="accent1"/>
+          </a:effectRef>
+          <a:fontRef idx="minor">
+            <a:schemeClr val="lt1"/>
+          </a:fontRef>
+        </p:style>
+        <p:txBody>
+          <a:bodyPr rtlCol="0" anchor="ctr"/>
+          <a:lstStyle/>
+          <a:p>
+            <a:pPr algn="ctr"/>
+          </a:p>
+        </p:txBody>
+      </p:sp>
+      <p:sp>
+        <p:nvSpPr>
+          <p:cNvPr id="34" name="TextBox 33"/>
+          <p:cNvSpPr txBox="1"/>
+          <p:nvPr/>
+        </p:nvSpPr>
+        <p:spPr>
+          <a:xfrm>
+            <a:off x="6812280" y="3794760"/>
+            <a:ext cx="4434840" cy="2011680"/>
+          </a:xfrm>
+          <a:prstGeom prst="rect">
+            <a:avLst/>
+          </a:prstGeom>
+          <a:noFill/>
+        </p:spPr>
+        <p:txBody>
+          <a:bodyPr wrap="square" anchor="t" lIns="0" rIns="0" tIns="0" bIns="0">
+            <a:spAutoFit/>
+          </a:bodyPr>
+          <a:lstStyle/>
+          <a:p>
+            <a:pPr algn="l">
+              <a:lnSpc>
+                <a:spcPct val="110000"/>
+              </a:lnSpc>
+              <a:spcAft>
+                <a:spcPts val="800"/>
+              </a:spcAft>
+            </a:pPr>
+            <a:r>
+              <a:rPr sz="1300" b="1">
+                <a:solidFill>
+                  <a:srgbClr val="F0B45C"/>
+                </a:solidFill>
+                <a:latin typeface="微软雅黑"/>
+                <a:ea typeface="微软雅黑"/>
+                <a:cs typeface="微软雅黑"/>
+              </a:rPr>
+              <a:t>▪  </a:t>
+            </a:r>
+            <a:r>
+              <a:rPr sz="1300" b="0">
+                <a:solidFill>
+                  <a:srgbClr val="EAF5EF"/>
+                </a:solidFill>
+                <a:latin typeface="微软雅黑"/>
+                <a:ea typeface="微软雅黑"/>
+                <a:cs typeface="微软雅黑"/>
+              </a:rPr>
+              <a:t>PySide6 + LangChain 全依赖自包含（PyInstaller onefile）</a:t>
+            </a:r>
+          </a:p>
+          <a:p>
+            <a:pPr algn="l">
+              <a:lnSpc>
+                <a:spcPct val="110000"/>
+              </a:lnSpc>
+              <a:spcAft>
+                <a:spcPts val="800"/>
+              </a:spcAft>
+            </a:pPr>
+            <a:r>
+              <a:rPr sz="1300" b="1">
+                <a:solidFill>
+                  <a:srgbClr val="F0B45C"/>
+                </a:solidFill>
+                <a:latin typeface="微软雅黑"/>
+                <a:ea typeface="微软雅黑"/>
+                <a:cs typeface="微软雅黑"/>
+              </a:rPr>
+              <a:t>▪  </a:t>
+            </a:r>
+            <a:r>
+              <a:rPr sz="1300" b="0">
+                <a:solidFill>
+                  <a:srgbClr val="EAF5EF"/>
+                </a:solidFill>
+                <a:latin typeface="微软雅黑"/>
+                <a:ea typeface="微软雅黑"/>
+                <a:cs typeface="微软雅黑"/>
+              </a:rPr>
+              <a:t>单文件双击即用，无需安装与脚本</a:t>
+            </a:r>
+          </a:p>
+          <a:p>
+            <a:pPr algn="l">
+              <a:lnSpc>
+                <a:spcPct val="110000"/>
+              </a:lnSpc>
+              <a:spcAft>
+                <a:spcPts val="800"/>
+              </a:spcAft>
+            </a:pPr>
+            <a:r>
+              <a:rPr sz="1300" b="1">
+                <a:solidFill>
+                  <a:srgbClr val="F0B45C"/>
+                </a:solidFill>
+                <a:latin typeface="微软雅黑"/>
+                <a:ea typeface="微软雅黑"/>
+                <a:cs typeface="微软雅黑"/>
+              </a:rPr>
+              <a:t>▪  </a:t>
+            </a:r>
+            <a:r>
+              <a:rPr sz="1300" b="0">
+                <a:solidFill>
+                  <a:srgbClr val="EAF5EF"/>
+                </a:solidFill>
+                <a:latin typeface="微软雅黑"/>
+                <a:ea typeface="微软雅黑"/>
+                <a:cs typeface="微软雅黑"/>
+              </a:rPr>
+              <a:t>配置/会话/审计/向量库写在 exe 同目录，删文件即卸载</a:t>
+            </a:r>
+          </a:p>
+          <a:p>
+            <a:pPr algn="l">
+              <a:lnSpc>
+                <a:spcPct val="110000"/>
+              </a:lnSpc>
+              <a:spcAft>
+                <a:spcPts val="800"/>
+              </a:spcAft>
+            </a:pPr>
+            <a:r>
+              <a:rPr sz="1300" b="1">
+                <a:solidFill>
+                  <a:srgbClr val="F0B45C"/>
+                </a:solidFill>
+                <a:latin typeface="微软雅黑"/>
+                <a:ea typeface="微软雅黑"/>
+                <a:cs typeface="微软雅黑"/>
+              </a:rPr>
+              <a:t>▪  </a:t>
+            </a:r>
+            <a:r>
+              <a:rPr sz="1300" b="0">
+                <a:solidFill>
+                  <a:srgbClr val="EAF5EF"/>
+                </a:solidFill>
+                <a:latin typeface="微软雅黑"/>
+                <a:ea typeface="微软雅黑"/>
+                <a:cs typeface="微软雅黑"/>
+              </a:rPr>
+              <a:t>随附《使用说明》：本地/云端算力两步接入</a:t>
+            </a:r>
+          </a:p>
+        </p:txBody>
+      </p:sp>
+      <p:sp>
+        <p:nvSpPr>
+          <p:cNvPr id="35" name="TextBox 34"/>
+          <p:cNvSpPr txBox="1"/>
+          <p:nvPr/>
+        </p:nvSpPr>
+        <p:spPr>
+          <a:xfrm>
+            <a:off x="11185855" y="6291072"/>
+            <a:ext cx="548640" cy="320040"/>
+          </a:xfrm>
+          <a:prstGeom prst="rect">
+            <a:avLst/>
+          </a:prstGeom>
+          <a:noFill/>
+        </p:spPr>
+        <p:txBody>
+          <a:bodyPr wrap="square" anchor="t" lIns="0" rIns="0" tIns="0" bIns="0">
+            <a:spAutoFit/>
+          </a:bodyPr>
+          <a:lstStyle/>
+          <a:p>
+            <a:pPr algn="r"/>
+            <a:r>
+              <a:rPr sz="1100" b="0">
+                <a:solidFill>
+                  <a:srgbClr val="6B7A72"/>
+                </a:solidFill>
+                <a:latin typeface="微软雅黑"/>
+                <a:ea typeface="微软雅黑"/>
+                <a:cs typeface="微软雅黑"/>
+              </a:rPr>
+              <a:t>20</a:t>
+            </a:r>
+          </a:p>
+        </p:txBody>
+      </p:sp>
+    </p:spTree>
+  </p:cSld>
+  <p:clrMapOvr>
+    <a:masterClrMapping/>
+  </p:clrMapOvr>
+</p:sld>
+</file>
+
+<file path=ppt/slides/slide21.xml><?xml version="1.0" encoding="utf-8"?>
 <p:sld xmlns:a="http://schemas.openxmlformats.org/drawingml/2006/main" xmlns:p="http://schemas.openxmlformats.org/presentationml/2006/main" xmlns:r="http://schemas.openxmlformats.org/officeDocument/2006/relationships">
   <p:cSld>
     <p:spTree>

--- a/docs/隐盾安全智能体_项目汇报.pptx
+++ b/docs/隐盾安全智能体_项目汇报.pptx
@@ -3565,7 +3565,7 @@
                 <a:ea typeface="微软雅黑"/>
                 <a:cs typeface="微软雅黑"/>
               </a:rPr>
-              <a:t>    ·    V3.5.0    ·    LangChain · pywebview/WebView2 · 本地/云端双算力    ·    2026</a:t>
+              <a:t>    ·    V3.6.13    ·    LangChain · pywebview/WebView2 · 本地/云端双算力    ·    2026</a:t>
             </a:r>
           </a:p>
         </p:txBody>
@@ -6102,7 +6102,7 @@
                 <a:ea typeface="微软雅黑"/>
                 <a:cs typeface="微软雅黑"/>
               </a:rPr>
-              <a:t>高危操作：熔断挂起，人类安全员拍板</a:t>
+              <a:t>高危操作：先判用途，再熔断挂起</a:t>
             </a:r>
           </a:p>
         </p:txBody>
@@ -6131,14 +6131,14 @@
           <a:p>
             <a:pPr algn="l">
               <a:lnSpc>
-                <a:spcPct val="115000"/>
+                <a:spcPct val="110000"/>
               </a:lnSpc>
               <a:spcAft>
-                <a:spcPts val="1200"/>
+                <a:spcPts val="800"/>
               </a:spcAft>
             </a:pPr>
             <a:r>
-              <a:rPr sz="1600" b="1">
+              <a:rPr sz="1500" b="1">
                 <a:solidFill>
                   <a:srgbClr val="0E7A4F"/>
                 </a:solidFill>
@@ -6146,10 +6146,10 @@
                 <a:ea typeface="微软雅黑"/>
                 <a:cs typeface="微软雅黑"/>
               </a:rPr>
-              <a:t>独立审批弹窗</a:t>
-            </a:r>
-            <a:r>
-              <a:rPr sz="1300" b="0">
+              <a:t>用途红线先行</a:t>
+            </a:r>
+            <a:r>
+              <a:rPr sz="1200" b="0">
                 <a:solidFill>
                   <a:srgbClr val="1A2332"/>
                 </a:solidFill>
@@ -6157,20 +6157,20 @@
                 <a:ea typeface="微软雅黑"/>
                 <a:cs typeface="微软雅黑"/>
               </a:rPr>
-              <a:t>   检测到越界写盘 / 删除 / 命令执行时，后台写盘线程强行阻塞，等待人工决策</a:t>
+              <a:t>   收集个人信息用于出售/牟利 → 模型与工具调用前直接拒绝；外发/公开 → 弹窗顶部红色警示</a:t>
             </a:r>
           </a:p>
           <a:p>
             <a:pPr algn="l">
               <a:lnSpc>
-                <a:spcPct val="115000"/>
+                <a:spcPct val="110000"/>
               </a:lnSpc>
               <a:spcAft>
-                <a:spcPts val="1200"/>
+                <a:spcPts val="800"/>
               </a:spcAft>
             </a:pPr>
             <a:r>
-              <a:rPr sz="1600" b="1">
+              <a:rPr sz="1500" b="1">
                 <a:solidFill>
                   <a:srgbClr val="0E7A4F"/>
                 </a:solidFill>
@@ -6178,10 +6178,10 @@
                 <a:ea typeface="微软雅黑"/>
                 <a:cs typeface="微软雅黑"/>
               </a:rPr>
-              <a:t>透明展示上下文</a:t>
-            </a:r>
-            <a:r>
-              <a:rPr sz="1300" b="0">
+              <a:t>独立审批弹窗</a:t>
+            </a:r>
+            <a:r>
+              <a:rPr sz="1200" b="0">
                 <a:solidFill>
                   <a:srgbClr val="1A2332"/>
                 </a:solidFill>
@@ -6189,20 +6189,20 @@
                 <a:ea typeface="微软雅黑"/>
                 <a:cs typeface="微软雅黑"/>
               </a:rPr>
-              <a:t>   弹窗展示申请工具、目标路径与即将执行的命令/写入内容，杜绝“盲批”</a:t>
+              <a:t>   检测到越界写盘 / 删除 / 命令执行时，后台写盘线程强行阻塞，等待人工决策</a:t>
             </a:r>
           </a:p>
           <a:p>
             <a:pPr algn="l">
               <a:lnSpc>
-                <a:spcPct val="115000"/>
+                <a:spcPct val="110000"/>
               </a:lnSpc>
               <a:spcAft>
-                <a:spcPts val="1200"/>
+                <a:spcPts val="800"/>
               </a:spcAft>
             </a:pPr>
             <a:r>
-              <a:rPr sz="1600" b="1">
+              <a:rPr sz="1500" b="1">
                 <a:solidFill>
                   <a:srgbClr val="0E7A4F"/>
                 </a:solidFill>
@@ -6210,10 +6210,10 @@
                 <a:ea typeface="微软雅黑"/>
                 <a:cs typeface="微软雅黑"/>
               </a:rPr>
-              <a:t>授权 / 驳回双通道</a:t>
-            </a:r>
-            <a:r>
-              <a:rPr sz="1300" b="0">
+              <a:t>透明展示上下文</a:t>
+            </a:r>
+            <a:r>
+              <a:rPr sz="1200" b="0">
                 <a:solidFill>
                   <a:srgbClr val="1A2332"/>
                 </a:solidFill>
@@ -6221,20 +6221,20 @@
                 <a:ea typeface="微软雅黑"/>
                 <a:cs typeface="微软雅黑"/>
               </a:rPr>
-              <a:t>   驳回则工具不执行并如实反馈模型；授权才放行</a:t>
+              <a:t>   弹窗展示申请工具、目标路径与即将执行的命令/写入内容，杜绝“盲批”</a:t>
             </a:r>
           </a:p>
           <a:p>
             <a:pPr algn="l">
               <a:lnSpc>
-                <a:spcPct val="115000"/>
+                <a:spcPct val="110000"/>
               </a:lnSpc>
               <a:spcAft>
-                <a:spcPts val="1200"/>
+                <a:spcPts val="800"/>
               </a:spcAft>
             </a:pPr>
             <a:r>
-              <a:rPr sz="1600" b="1">
+              <a:rPr sz="1500" b="1">
                 <a:solidFill>
                   <a:srgbClr val="0E7A4F"/>
                 </a:solidFill>
@@ -6242,10 +6242,10 @@
                 <a:ea typeface="微软雅黑"/>
                 <a:cs typeface="微软雅黑"/>
               </a:rPr>
-              <a:t>超时安全兜底</a:t>
-            </a:r>
-            <a:r>
-              <a:rPr sz="1300" b="0">
+              <a:t>授权 / 驳回双通道</a:t>
+            </a:r>
+            <a:r>
+              <a:rPr sz="1200" b="0">
                 <a:solidFill>
                   <a:srgbClr val="1A2332"/>
                 </a:solidFill>
@@ -6253,20 +6253,20 @@
                 <a:ea typeface="微软雅黑"/>
                 <a:cs typeface="微软雅黑"/>
               </a:rPr>
-              <a:t>   5 分钟无响应自动按驳回处理，并关闭残留弹窗防误导</a:t>
+              <a:t>   驳回则工具不执行并如实反馈模型；授权才放行</a:t>
             </a:r>
           </a:p>
           <a:p>
             <a:pPr algn="l">
               <a:lnSpc>
-                <a:spcPct val="115000"/>
+                <a:spcPct val="110000"/>
               </a:lnSpc>
               <a:spcAft>
-                <a:spcPts val="1200"/>
+                <a:spcPts val="800"/>
               </a:spcAft>
             </a:pPr>
             <a:r>
-              <a:rPr sz="1600" b="1">
+              <a:rPr sz="1500" b="1">
                 <a:solidFill>
                   <a:srgbClr val="0E7A4F"/>
                 </a:solidFill>
@@ -6274,10 +6274,42 @@
                 <a:ea typeface="微软雅黑"/>
                 <a:cs typeface="微软雅黑"/>
               </a:rPr>
+              <a:t>超时安全兜底</a:t>
+            </a:r>
+            <a:r>
+              <a:rPr sz="1200" b="0">
+                <a:solidFill>
+                  <a:srgbClr val="1A2332"/>
+                </a:solidFill>
+                <a:latin typeface="微软雅黑"/>
+                <a:ea typeface="微软雅黑"/>
+                <a:cs typeface="微软雅黑"/>
+              </a:rPr>
+              <a:t>   5 分钟无响应自动按驳回处理，并关闭残留弹窗防误导</a:t>
+            </a:r>
+          </a:p>
+          <a:p>
+            <a:pPr algn="l">
+              <a:lnSpc>
+                <a:spcPct val="110000"/>
+              </a:lnSpc>
+              <a:spcAft>
+                <a:spcPts val="800"/>
+              </a:spcAft>
+            </a:pPr>
+            <a:r>
+              <a:rPr sz="1500" b="1">
+                <a:solidFill>
+                  <a:srgbClr val="0E7A4F"/>
+                </a:solidFill>
+                <a:latin typeface="微软雅黑"/>
+                <a:ea typeface="微软雅黑"/>
+                <a:cs typeface="微软雅黑"/>
+              </a:rPr>
               <a:t>审批入审计</a:t>
             </a:r>
             <a:r>
-              <a:rPr sz="1300" b="0">
+              <a:rPr sz="1200" b="0">
                 <a:solidFill>
                   <a:srgbClr val="1A2332"/>
                 </a:solidFill>

--- a/docs/隐盾安全智能体_项目汇报.pptx
+++ b/docs/隐盾安全智能体_项目汇报.pptx
@@ -3565,7 +3565,7 @@
                 <a:ea typeface="微软雅黑"/>
                 <a:cs typeface="微软雅黑"/>
               </a:rPr>
-              <a:t>    ·    V3.6.13    ·    LangChain · pywebview/WebView2 · 本地/云端双算力    ·    2026</a:t>
+              <a:t>    ·    V3.6.14    ·    LangChain · pywebview/WebView2 · 本地/云端双算力    ·    2026</a:t>
             </a:r>
           </a:p>
         </p:txBody>

--- a/docs/隐盾安全智能体_项目汇报.pptx
+++ b/docs/隐盾安全智能体_项目汇报.pptx
@@ -3565,7 +3565,7 @@
                 <a:ea typeface="微软雅黑"/>
                 <a:cs typeface="微软雅黑"/>
               </a:rPr>
-              <a:t>    ·    V3.6.14    ·    LangChain · pywebview/WebView2 · 本地/云端双算力    ·    2026</a:t>
+              <a:t>    ·    V3.6.15    ·    LangChain · pywebview/WebView2 · 本地/云端双算力    ·    2026</a:t>
             </a:r>
           </a:p>
         </p:txBody>

--- a/docs/隐盾安全智能体_项目汇报.pptx
+++ b/docs/隐盾安全智能体_项目汇报.pptx
@@ -3565,7 +3565,7 @@
                 <a:ea typeface="微软雅黑"/>
                 <a:cs typeface="微软雅黑"/>
               </a:rPr>
-              <a:t>    ·    V3.6.15    ·    LangChain · pywebview/WebView2 · 本地/云端双算力    ·    2026</a:t>
+              <a:t>    ·    V3.6.16    ·    LangChain · pywebview/WebView2 · 本地/云端双算力    ·    2026</a:t>
             </a:r>
           </a:p>
         </p:txBody>

--- a/docs/隐盾安全智能体_项目汇报.pptx
+++ b/docs/隐盾安全智能体_项目汇报.pptx
@@ -3565,7 +3565,7 @@
                 <a:ea typeface="微软雅黑"/>
                 <a:cs typeface="微软雅黑"/>
               </a:rPr>
-              <a:t>    ·    V3.6.16    ·    LangChain · pywebview/WebView2 · 本地/云端双算力    ·    2026</a:t>
+              <a:t>    ·    V3.6.17    ·    LangChain · pywebview/WebView2 · 本地/云端双算力    ·    2026</a:t>
             </a:r>
           </a:p>
         </p:txBody>
@@ -13938,7 +13938,7 @@
                 <a:ea typeface="微软雅黑"/>
                 <a:cs typeface="微软雅黑"/>
               </a:rPr>
-              <a:t>22 个测试/评测套件 · 全部通过（含攻防评测 9 项实验 + 留出集评测 + 控制面七组）</a:t>
+              <a:t>41 个测试/评测套件 · 全部通过（攻防 9 项实验 + 留出集 + 控制面七组 + V3.6.17 缺陷 12 条）</a:t>
             </a:r>
           </a:p>
         </p:txBody>
@@ -14843,7 +14843,7 @@
                 <a:ea typeface="微软雅黑"/>
                 <a:cs typeface="微软雅黑"/>
               </a:rPr>
-              <a:t>模型与正则双后端；8 向拖拽锚定</a:t>
+              <a:t>模型/正则双后端；8 向拖拽；12 条缺陷回归</a:t>
             </a:r>
           </a:p>
         </p:txBody>
@@ -15412,7 +15412,7 @@
                 <a:ea typeface="微软雅黑"/>
                 <a:cs typeface="微软雅黑"/>
               </a:rPr>
-              <a:t>1.6万</a:t>
+              <a:t>2.7万</a:t>
             </a:r>
           </a:p>
         </p:txBody>
@@ -15708,7 +15708,7 @@
                 <a:ea typeface="微软雅黑"/>
                 <a:cs typeface="微软雅黑"/>
               </a:rPr>
-              <a:t>20</a:t>
+              <a:t>41</a:t>
             </a:r>
           </a:p>
         </p:txBody>

--- a/docs/隐盾安全智能体_项目汇报.pptx
+++ b/docs/隐盾安全智能体_项目汇报.pptx
@@ -13938,7 +13938,7 @@
                 <a:ea typeface="微软雅黑"/>
                 <a:cs typeface="微软雅黑"/>
               </a:rPr>
-              <a:t>41 个测试/评测套件 · 全部通过（攻防 9 项实验 + 留出集 + 控制面七组 + V3.6.17 缺陷 12 条）</a:t>
+              <a:t>39 个测试/评测套件 · 全部通过（攻防 9 项实验 + 留出集 + 控制面七组 + V3.6.17 缺陷 12 条）</a:t>
             </a:r>
           </a:p>
         </p:txBody>
@@ -15708,7 +15708,7 @@
                 <a:ea typeface="微软雅黑"/>
                 <a:cs typeface="微软雅黑"/>
               </a:rPr>
-              <a:t>41</a:t>
+              <a:t>39</a:t>
             </a:r>
           </a:p>
         </p:txBody>

--- a/docs/隐盾安全智能体_项目汇报.pptx
+++ b/docs/隐盾安全智能体_项目汇报.pptx
@@ -3565,7 +3565,7 @@
                 <a:ea typeface="微软雅黑"/>
                 <a:cs typeface="微软雅黑"/>
               </a:rPr>
-              <a:t>    ·    V3.6.17    ·    LangChain · pywebview/WebView2 · 本地/云端双算力    ·    2026</a:t>
+              <a:t>    ·    V3.6.18    ·    LangChain · pywebview/WebView2 · 本地/云端双算力    ·    2026</a:t>
             </a:r>
           </a:p>
         </p:txBody>
@@ -13938,7 +13938,7 @@
                 <a:ea typeface="微软雅黑"/>
                 <a:cs typeface="微软雅黑"/>
               </a:rPr>
-              <a:t>39 个测试/评测套件 · 全部通过（攻防 9 项实验 + 留出集 + 控制面七组 + V3.6.17 缺陷 12 条）</a:t>
+              <a:t>39 个测试/评测套件 · 全部通过（攻防 9 项实验 + 留出集 + 控制面七组 + V3.6.18 缺陷 12 条）</a:t>
             </a:r>
           </a:p>
         </p:txBody>

--- a/docs/隐盾安全智能体_项目汇报.pptx
+++ b/docs/隐盾安全智能体_项目汇报.pptx
@@ -3565,7 +3565,7 @@
                 <a:ea typeface="微软雅黑"/>
                 <a:cs typeface="微软雅黑"/>
               </a:rPr>
-              <a:t>    ·    V3.6.18    ·    LangChain · pywebview/WebView2 · 本地/云端双算力    ·    2026</a:t>
+              <a:t>    ·    V3.6.19    ·    LangChain · pywebview/WebView2 · 本地/云端双算力    ·    2026</a:t>
             </a:r>
           </a:p>
         </p:txBody>
@@ -13938,7 +13938,7 @@
                 <a:ea typeface="微软雅黑"/>
                 <a:cs typeface="微软雅黑"/>
               </a:rPr>
-              <a:t>39 个测试/评测套件 · 全部通过（攻防 9 项实验 + 留出集 + 控制面七组 + V3.6.18 缺陷 12 条）</a:t>
+              <a:t>39 个测试/评测套件 · 全部通过（攻防 9 项实验 + 留出集 + 控制面七组 + V3.6.19 缺陷 12 条）</a:t>
             </a:r>
           </a:p>
         </p:txBody>

--- a/docs/隐盾安全智能体_项目汇报.pptx
+++ b/docs/隐盾安全智能体_项目汇报.pptx
@@ -3788,7 +3788,7 @@
                 <a:gridCol w="5669280"/>
                 <a:gridCol w="2773375"/>
               </a:tblGrid>
-              <a:tr h="365760">
+              <a:tr h="325120">
                 <a:tc>
                   <a:txBody>
                     <a:bodyPr/>
@@ -3865,7 +3865,7 @@
                   </a:tcPr>
                 </a:tc>
               </a:tr>
-              <a:tr h="365760">
+              <a:tr h="325120">
                 <a:tc>
                   <a:txBody>
                     <a:bodyPr/>
@@ -3942,7 +3942,7 @@
                   </a:tcPr>
                 </a:tc>
               </a:tr>
-              <a:tr h="365760">
+              <a:tr h="325120">
                 <a:tc>
                   <a:txBody>
                     <a:bodyPr/>
@@ -3983,7 +3983,7 @@
                           <a:ea typeface="微软雅黑"/>
                           <a:cs typeface="微软雅黑"/>
                         </a:rPr>
-                        <a:t>往返逐字一致 / 劫持成功</a:t>
+                        <a:t>60 篇真实格式文档往返</a:t>
                       </a:r>
                     </a:p>
                   </a:txBody>
@@ -4008,7 +4008,7 @@
                           <a:ea typeface="微软雅黑"/>
                           <a:cs typeface="微软雅黑"/>
                         </a:rPr>
-                        <a:t>60/60 · 0（500 轮）</a:t>
+                        <a:t>逐字一致（语料自建）</a:t>
                       </a:r>
                     </a:p>
                   </a:txBody>
@@ -4019,7 +4019,7 @@
                   </a:tcPr>
                 </a:tc>
               </a:tr>
-              <a:tr h="365760">
+              <a:tr h="325120">
                 <a:tc>
                   <a:txBody>
                     <a:bodyPr/>
@@ -4035,7 +4035,7 @@
                           <a:ea typeface="微软雅黑"/>
                           <a:cs typeface="微软雅黑"/>
                         </a:rPr>
-                        <a:t>架构保证 · 落盘</a:t>
+                        <a:t>架构保证 · 还原</a:t>
                       </a:r>
                     </a:p>
                   </a:txBody>
@@ -4060,7 +4060,7 @@
                           <a:ea typeface="微软雅黑"/>
                           <a:cs typeface="微软雅黑"/>
                         </a:rPr>
-                        <a:t>持久化与审计产物明文命中</a:t>
+                        <a:t>500 轮定向还原劫持</a:t>
                       </a:r>
                     </a:p>
                   </a:txBody>
@@ -4085,7 +4085,7 @@
                           <a:ea typeface="微软雅黑"/>
                           <a:cs typeface="微软雅黑"/>
                         </a:rPr>
-                        <a:t>0</a:t>
+                        <a:t>未成功（限该攻击面）</a:t>
                       </a:r>
                     </a:p>
                   </a:txBody>
@@ -4096,7 +4096,161 @@
                   </a:tcPr>
                 </a:tc>
               </a:tr>
-              <a:tr h="365760">
+              <a:tr h="325120">
+                <a:tc>
+                  <a:txBody>
+                    <a:bodyPr/>
+                    <a:lstStyle/>
+                    <a:p>
+                      <a:pPr algn="l"/>
+                      <a:r>
+                        <a:rPr sz="1200" b="0">
+                          <a:solidFill>
+                            <a:srgbClr val="1A2332"/>
+                          </a:solidFill>
+                          <a:latin typeface="微软雅黑"/>
+                          <a:ea typeface="微软雅黑"/>
+                          <a:cs typeface="微软雅黑"/>
+                        </a:rPr>
+                        <a:t>架构保证 · 落盘</a:t>
+                      </a:r>
+                    </a:p>
+                  </a:txBody>
+                  <a:tcPr>
+                    <a:solidFill>
+                      <a:srgbClr val="F0F5F2"/>
+                    </a:solidFill>
+                  </a:tcPr>
+                </a:tc>
+                <a:tc>
+                  <a:txBody>
+                    <a:bodyPr/>
+                    <a:lstStyle/>
+                    <a:p>
+                      <a:pPr algn="l"/>
+                      <a:r>
+                        <a:rPr sz="1200" b="0">
+                          <a:solidFill>
+                            <a:srgbClr val="1A2332"/>
+                          </a:solidFill>
+                          <a:latin typeface="微软雅黑"/>
+                          <a:ea typeface="微软雅黑"/>
+                          <a:cs typeface="微软雅黑"/>
+                        </a:rPr>
+                        <a:t>持久化与审计产物明文命中</a:t>
+                      </a:r>
+                    </a:p>
+                  </a:txBody>
+                  <a:tcPr>
+                    <a:solidFill>
+                      <a:srgbClr val="F0F5F2"/>
+                    </a:solidFill>
+                  </a:tcPr>
+                </a:tc>
+                <a:tc>
+                  <a:txBody>
+                    <a:bodyPr/>
+                    <a:lstStyle/>
+                    <a:p>
+                      <a:pPr algn="ctr"/>
+                      <a:r>
+                        <a:rPr sz="1200" b="1">
+                          <a:solidFill>
+                            <a:srgbClr val="0E7A4F"/>
+                          </a:solidFill>
+                          <a:latin typeface="微软雅黑"/>
+                          <a:ea typeface="微软雅黑"/>
+                          <a:cs typeface="微软雅黑"/>
+                        </a:rPr>
+                        <a:t>0 例</a:t>
+                      </a:r>
+                    </a:p>
+                  </a:txBody>
+                  <a:tcPr>
+                    <a:solidFill>
+                      <a:srgbClr val="F0F5F2"/>
+                    </a:solidFill>
+                  </a:tcPr>
+                </a:tc>
+              </a:tr>
+              <a:tr h="325120">
+                <a:tc>
+                  <a:txBody>
+                    <a:bodyPr/>
+                    <a:lstStyle/>
+                    <a:p>
+                      <a:pPr algn="l"/>
+                      <a:r>
+                        <a:rPr sz="1200" b="0">
+                          <a:solidFill>
+                            <a:srgbClr val="1A2332"/>
+                          </a:solidFill>
+                          <a:latin typeface="微软雅黑"/>
+                          <a:ea typeface="微软雅黑"/>
+                          <a:cs typeface="微软雅黑"/>
+                        </a:rPr>
+                        <a:t>经验测量 · 识别</a:t>
+                      </a:r>
+                    </a:p>
+                  </a:txBody>
+                  <a:tcPr>
+                    <a:solidFill>
+                      <a:srgbClr val="FFFFFF"/>
+                    </a:solidFill>
+                  </a:tcPr>
+                </a:tc>
+                <a:tc>
+                  <a:txBody>
+                    <a:bodyPr/>
+                    <a:lstStyle/>
+                    <a:p>
+                      <a:pPr algn="l"/>
+                      <a:r>
+                        <a:rPr sz="1200" b="0">
+                          <a:solidFill>
+                            <a:srgbClr val="1A2332"/>
+                          </a:solidFill>
+                          <a:latin typeface="微软雅黑"/>
+                          <a:ea typeface="微软雅黑"/>
+                          <a:cs typeface="微软雅黑"/>
+                        </a:rPr>
+                        <a:t>留出集完整脱敏（全量口径）</a:t>
+                      </a:r>
+                    </a:p>
+                  </a:txBody>
+                  <a:tcPr>
+                    <a:solidFill>
+                      <a:srgbClr val="FFFFFF"/>
+                    </a:solidFill>
+                  </a:tcPr>
+                </a:tc>
+                <a:tc>
+                  <a:txBody>
+                    <a:bodyPr/>
+                    <a:lstStyle/>
+                    <a:p>
+                      <a:pPr algn="ctr"/>
+                      <a:r>
+                        <a:rPr sz="1200" b="1">
+                          <a:solidFill>
+                            <a:srgbClr val="0E7A4F"/>
+                          </a:solidFill>
+                          <a:latin typeface="微软雅黑"/>
+                          <a:ea typeface="微软雅黑"/>
+                          <a:cs typeface="微软雅黑"/>
+                        </a:rPr>
+                        <a:t>222/280（含 58 例未覆盖）</a:t>
+                      </a:r>
+                    </a:p>
+                  </a:txBody>
+                  <a:tcPr>
+                    <a:solidFill>
+                      <a:srgbClr val="FFFFFF"/>
+                    </a:solidFill>
+                  </a:tcPr>
+                </a:tc>
+              </a:tr>
+              <a:tr h="325120">
                 <a:tc>
                   <a:txBody>
                     <a:bodyPr/>
@@ -4137,7 +4291,7 @@
                           <a:ea typeface="微软雅黑"/>
                           <a:cs typeface="微软雅黑"/>
                         </a:rPr>
-                        <a:t>留出集完整脱敏（全量口径）</a:t>
+                        <a:t>其中：系统声明支持的写法</a:t>
                       </a:r>
                     </a:p>
                   </a:txBody>
@@ -4162,7 +4316,7 @@
                           <a:ea typeface="微软雅黑"/>
                           <a:cs typeface="微软雅黑"/>
                         </a:rPr>
-                        <a:t>222/280</a:t>
+                        <a:t>222/230</a:t>
                       </a:r>
                     </a:p>
                   </a:txBody>
@@ -4173,7 +4327,7 @@
                   </a:tcPr>
                 </a:tc>
               </a:tr>
-              <a:tr h="365760">
+              <a:tr h="325120">
                 <a:tc>
                   <a:txBody>
                     <a:bodyPr/>
@@ -4189,7 +4343,7 @@
                           <a:ea typeface="微软雅黑"/>
                           <a:cs typeface="微软雅黑"/>
                         </a:rPr>
-                        <a:t>经验测量 · 识别</a:t>
+                        <a:t>经验测量 · 误伤</a:t>
                       </a:r>
                     </a:p>
                   </a:txBody>
@@ -4214,7 +4368,7 @@
                           <a:ea typeface="微软雅黑"/>
                           <a:cs typeface="微软雅黑"/>
                         </a:rPr>
-                        <a:t>其中：系统声明支持的写法</a:t>
+                        <a:t>80 个负样本中误伤</a:t>
                       </a:r>
                     </a:p>
                   </a:txBody>
@@ -4239,7 +4393,7 @@
                           <a:ea typeface="微软雅黑"/>
                           <a:cs typeface="微软雅黑"/>
                         </a:rPr>
-                        <a:t>222/230</a:t>
+                        <a:t>0 例</a:t>
                       </a:r>
                     </a:p>
                   </a:txBody>
@@ -4250,7 +4404,7 @@
                   </a:tcPr>
                 </a:tc>
               </a:tr>
-              <a:tr h="365760">
+              <a:tr h="325120">
                 <a:tc>
                   <a:txBody>
                     <a:bodyPr/>
@@ -4266,7 +4420,7 @@
                           <a:ea typeface="微软雅黑"/>
                           <a:cs typeface="微软雅黑"/>
                         </a:rPr>
-                        <a:t>经验测量 · 误伤</a:t>
+                        <a:t>边界公开</a:t>
                       </a:r>
                     </a:p>
                   </a:txBody>
@@ -4291,7 +4445,7 @@
                           <a:ea typeface="微软雅黑"/>
                           <a:cs typeface="微软雅黑"/>
                         </a:rPr>
-                        <a:t>业务数字被误脱敏</a:t>
+                        <a:t>已声明未覆盖的形态清单</a:t>
                       </a:r>
                     </a:p>
                   </a:txBody>
@@ -4316,90 +4470,13 @@
                           <a:ea typeface="微软雅黑"/>
                           <a:cs typeface="微软雅黑"/>
                         </a:rPr>
-                        <a:t>0/80</a:t>
+                        <a:t>50 例（报告 5.4）</a:t>
                       </a:r>
                     </a:p>
                   </a:txBody>
                   <a:tcPr>
                     <a:solidFill>
                       <a:srgbClr val="F0F5F2"/>
-                    </a:solidFill>
-                  </a:tcPr>
-                </a:tc>
-              </a:tr>
-              <a:tr h="365760">
-                <a:tc>
-                  <a:txBody>
-                    <a:bodyPr/>
-                    <a:lstStyle/>
-                    <a:p>
-                      <a:pPr algn="l"/>
-                      <a:r>
-                        <a:rPr sz="1200" b="0">
-                          <a:solidFill>
-                            <a:srgbClr val="1A2332"/>
-                          </a:solidFill>
-                          <a:latin typeface="微软雅黑"/>
-                          <a:ea typeface="微软雅黑"/>
-                          <a:cs typeface="微软雅黑"/>
-                        </a:rPr>
-                        <a:t>边界公开</a:t>
-                      </a:r>
-                    </a:p>
-                  </a:txBody>
-                  <a:tcPr>
-                    <a:solidFill>
-                      <a:srgbClr val="FFFFFF"/>
-                    </a:solidFill>
-                  </a:tcPr>
-                </a:tc>
-                <a:tc>
-                  <a:txBody>
-                    <a:bodyPr/>
-                    <a:lstStyle/>
-                    <a:p>
-                      <a:pPr algn="l"/>
-                      <a:r>
-                        <a:rPr sz="1200" b="0">
-                          <a:solidFill>
-                            <a:srgbClr val="1A2332"/>
-                          </a:solidFill>
-                          <a:latin typeface="微软雅黑"/>
-                          <a:ea typeface="微软雅黑"/>
-                          <a:cs typeface="微软雅黑"/>
-                        </a:rPr>
-                        <a:t>已声明未覆盖的形态清单</a:t>
-                      </a:r>
-                    </a:p>
-                  </a:txBody>
-                  <a:tcPr>
-                    <a:solidFill>
-                      <a:srgbClr val="FFFFFF"/>
-                    </a:solidFill>
-                  </a:tcPr>
-                </a:tc>
-                <a:tc>
-                  <a:txBody>
-                    <a:bodyPr/>
-                    <a:lstStyle/>
-                    <a:p>
-                      <a:pPr algn="ctr"/>
-                      <a:r>
-                        <a:rPr sz="1200" b="1">
-                          <a:solidFill>
-                            <a:srgbClr val="0E7A4F"/>
-                          </a:solidFill>
-                          <a:latin typeface="微软雅黑"/>
-                          <a:ea typeface="微软雅黑"/>
-                          <a:cs typeface="微软雅黑"/>
-                        </a:rPr>
-                        <a:t>50 例（报告 5.4）</a:t>
-                      </a:r>
-                    </a:p>
-                  </a:txBody>
-                  <a:tcPr>
-                    <a:solidFill>
-                      <a:srgbClr val="FFFFFF"/>
                     </a:solidFill>
                   </a:tcPr>
                 </a:tc>

--- a/docs/隐盾安全智能体_项目汇报.pptx
+++ b/docs/隐盾安全智能体_项目汇报.pptx
@@ -6179,7 +6179,7 @@
                 <a:ea typeface="微软雅黑"/>
                 <a:cs typeface="微软雅黑"/>
               </a:rPr>
-              <a:t>高危操作：先判用途，再熔断挂起</a:t>
+              <a:t>先判用途，再判操作：审批不是一次盲签</a:t>
             </a:r>
           </a:p>
         </p:txBody>
@@ -6193,7 +6193,7 @@
         <p:spPr>
           <a:xfrm>
             <a:off x="640080" y="1645920"/>
-            <a:ext cx="5486400" cy="4023360"/>
+            <a:ext cx="5486400" cy="4114800"/>
           </a:xfrm>
           <a:prstGeom prst="rect">
             <a:avLst/>
@@ -6208,14 +6208,14 @@
           <a:p>
             <a:pPr algn="l">
               <a:lnSpc>
-                <a:spcPct val="110000"/>
+                <a:spcPct val="108000"/>
               </a:lnSpc>
               <a:spcAft>
-                <a:spcPts val="800"/>
+                <a:spcPts val="700"/>
               </a:spcAft>
             </a:pPr>
             <a:r>
-              <a:rPr sz="1500" b="1">
+              <a:rPr sz="1450" b="1">
                 <a:solidFill>
                   <a:srgbClr val="0E7A4F"/>
                 </a:solidFill>
@@ -6223,10 +6223,10 @@
                 <a:ea typeface="微软雅黑"/>
                 <a:cs typeface="微软雅黑"/>
               </a:rPr>
-              <a:t>用途红线先行</a:t>
-            </a:r>
-            <a:r>
-              <a:rPr sz="1200" b="0">
+              <a:t>① 请求用途</a:t>
+            </a:r>
+            <a:r>
+              <a:rPr sz="1150" b="0">
                 <a:solidFill>
                   <a:srgbClr val="1A2332"/>
                 </a:solidFill>
@@ -6234,20 +6234,20 @@
                 <a:ea typeface="微软雅黑"/>
                 <a:cs typeface="微软雅黑"/>
               </a:rPr>
-              <a:t>   收集个人信息用于出售/牟利 → 模型与工具调用前直接拒绝；外发/公开 → 弹窗顶部红色警示</a:t>
+              <a:t>   先问「想干什么」：意图 / 数据 / 去向 / 用途（操作意图预判插件）</a:t>
             </a:r>
           </a:p>
           <a:p>
             <a:pPr algn="l">
               <a:lnSpc>
-                <a:spcPct val="110000"/>
+                <a:spcPct val="108000"/>
               </a:lnSpc>
               <a:spcAft>
-                <a:spcPts val="800"/>
+                <a:spcPts val="700"/>
               </a:spcAft>
             </a:pPr>
             <a:r>
-              <a:rPr sz="1500" b="1">
+              <a:rPr sz="1450" b="1">
                 <a:solidFill>
                   <a:srgbClr val="0E7A4F"/>
                 </a:solidFill>
@@ -6255,10 +6255,10 @@
                 <a:ea typeface="微软雅黑"/>
                 <a:cs typeface="微软雅黑"/>
               </a:rPr>
-              <a:t>独立审批弹窗</a:t>
-            </a:r>
-            <a:r>
-              <a:rPr sz="1200" b="0">
+              <a:t>② 是否相符</a:t>
+            </a:r>
+            <a:r>
+              <a:rPr sz="1150" b="0">
                 <a:solidFill>
                   <a:srgbClr val="1A2332"/>
                 </a:solidFill>
@@ -6266,20 +6266,20 @@
                 <a:ea typeface="微软雅黑"/>
                 <a:cs typeface="微软雅黑"/>
               </a:rPr>
-              <a:t>   检测到越界写盘 / 删除 / 命令执行时，后台写盘线程强行阻塞，等待人工决策</a:t>
+              <a:t>   再问「操作对不对得上请求」；用途触线时不再输出「相符」</a:t>
             </a:r>
           </a:p>
           <a:p>
             <a:pPr algn="l">
               <a:lnSpc>
-                <a:spcPct val="110000"/>
+                <a:spcPct val="108000"/>
               </a:lnSpc>
               <a:spcAft>
-                <a:spcPts val="800"/>
+                <a:spcPts val="700"/>
               </a:spcAft>
             </a:pPr>
             <a:r>
-              <a:rPr sz="1500" b="1">
+              <a:rPr sz="1450" b="1">
                 <a:solidFill>
                   <a:srgbClr val="0E7A4F"/>
                 </a:solidFill>
@@ -6287,10 +6287,10 @@
                 <a:ea typeface="微软雅黑"/>
                 <a:cs typeface="微软雅黑"/>
               </a:rPr>
-              <a:t>透明展示上下文</a:t>
-            </a:r>
-            <a:r>
-              <a:rPr sz="1200" b="0">
+              <a:t>③ 操作风险</a:t>
+            </a:r>
+            <a:r>
+              <a:rPr sz="1150" b="0">
                 <a:solidFill>
                   <a:srgbClr val="1A2332"/>
                 </a:solidFill>
@@ -6298,20 +6298,20 @@
                 <a:ea typeface="微软雅黑"/>
                 <a:cs typeface="微软雅黑"/>
               </a:rPr>
-              <a:t>   弹窗展示申请工具、目标路径与即将执行的命令/写入内容，杜绝“盲批”</a:t>
+              <a:t>   最后评操作本身；laya 明确标注「只评操作，不评价用途」</a:t>
             </a:r>
           </a:p>
           <a:p>
             <a:pPr algn="l">
               <a:lnSpc>
-                <a:spcPct val="110000"/>
+                <a:spcPct val="108000"/>
               </a:lnSpc>
               <a:spcAft>
-                <a:spcPts val="800"/>
+                <a:spcPts val="700"/>
               </a:spcAft>
             </a:pPr>
             <a:r>
-              <a:rPr sz="1500" b="1">
+              <a:rPr sz="1450" b="1">
                 <a:solidFill>
                   <a:srgbClr val="0E7A4F"/>
                 </a:solidFill>
@@ -6319,10 +6319,10 @@
                 <a:ea typeface="微软雅黑"/>
                 <a:cs typeface="微软雅黑"/>
               </a:rPr>
-              <a:t>授权 / 驳回双通道</a:t>
-            </a:r>
-            <a:r>
-              <a:rPr sz="1200" b="0">
+              <a:t>红线先行</a:t>
+            </a:r>
+            <a:r>
+              <a:rPr sz="1150" b="0">
                 <a:solidFill>
                   <a:srgbClr val="1A2332"/>
                 </a:solidFill>
@@ -6330,20 +6330,20 @@
                 <a:ea typeface="微软雅黑"/>
                 <a:cs typeface="微软雅黑"/>
               </a:rPr>
-              <a:t>   驳回则工具不执行并如实反馈模型；授权才放行</a:t>
+              <a:t>   个人信息 + 出售/牟利 → 模型与工具调用前直接拒绝；外发/公开 → 顶部红色警示</a:t>
             </a:r>
           </a:p>
           <a:p>
             <a:pPr algn="l">
               <a:lnSpc>
-                <a:spcPct val="110000"/>
+                <a:spcPct val="108000"/>
               </a:lnSpc>
               <a:spcAft>
-                <a:spcPts val="800"/>
+                <a:spcPts val="700"/>
               </a:spcAft>
             </a:pPr>
             <a:r>
-              <a:rPr sz="1500" b="1">
+              <a:rPr sz="1450" b="1">
                 <a:solidFill>
                   <a:srgbClr val="0E7A4F"/>
                 </a:solidFill>
@@ -6351,10 +6351,10 @@
                 <a:ea typeface="微软雅黑"/>
                 <a:cs typeface="微软雅黑"/>
               </a:rPr>
-              <a:t>超时安全兜底</a:t>
-            </a:r>
-            <a:r>
-              <a:rPr sz="1200" b="0">
+              <a:t>独立审批 + 透明上下文</a:t>
+            </a:r>
+            <a:r>
+              <a:rPr sz="1150" b="0">
                 <a:solidFill>
                   <a:srgbClr val="1A2332"/>
                 </a:solidFill>
@@ -6362,20 +6362,20 @@
                 <a:ea typeface="微软雅黑"/>
                 <a:cs typeface="微软雅黑"/>
               </a:rPr>
-              <a:t>   5 分钟无响应自动按驳回处理，并关闭残留弹窗防误导</a:t>
+              <a:t>   阻塞写盘线程；展示工具、真实路径与待写入内容，杜绝「盲批」</a:t>
             </a:r>
           </a:p>
           <a:p>
             <a:pPr algn="l">
               <a:lnSpc>
-                <a:spcPct val="110000"/>
+                <a:spcPct val="108000"/>
               </a:lnSpc>
               <a:spcAft>
-                <a:spcPts val="800"/>
+                <a:spcPts val="700"/>
               </a:spcAft>
             </a:pPr>
             <a:r>
-              <a:rPr sz="1500" b="1">
+              <a:rPr sz="1450" b="1">
                 <a:solidFill>
                   <a:srgbClr val="0E7A4F"/>
                 </a:solidFill>
@@ -6383,10 +6383,10 @@
                 <a:ea typeface="微软雅黑"/>
                 <a:cs typeface="微软雅黑"/>
               </a:rPr>
-              <a:t>审批入审计</a:t>
-            </a:r>
-            <a:r>
-              <a:rPr sz="1200" b="0">
+              <a:t>驳回即停 + 超时兜底 + 审计</a:t>
+            </a:r>
+            <a:r>
+              <a:rPr sz="1150" b="0">
                 <a:solidFill>
                   <a:srgbClr val="1A2332"/>
                 </a:solidFill>
@@ -6394,7 +6394,7 @@
                 <a:ea typeface="微软雅黑"/>
                 <a:cs typeface="微软雅黑"/>
               </a:rPr>
-              <a:t>   批准/驳回均记入哈希链，critical 级告警</a:t>
+              <a:t>   驳回不执行；超时终止本轮；批准/驳回均入哈希链</a:t>
             </a:r>
           </a:p>
         </p:txBody>
@@ -6508,7 +6508,7 @@
                 <a:ea typeface="微软雅黑"/>
                 <a:cs typeface="微软雅黑"/>
               </a:rPr>
-              <a:t>图 2  隐盾安全决策网关拦截弹窗（含待审命令/内容）</a:t>
+              <a:t>图 2  审批弹窗：顶部红色用途警示；下方「意图预判」与「只评操作本身」分层，不再用「相符 + 低危」给卖数据背书</a:t>
             </a:r>
           </a:p>
         </p:txBody>

--- a/docs/隐盾安全智能体_项目汇报.pptx
+++ b/docs/隐盾安全智能体_项目汇报.pptx
@@ -4239,7 +4239,7 @@
                           <a:ea typeface="微软雅黑"/>
                           <a:cs typeface="微软雅黑"/>
                         </a:rPr>
-                        <a:t>222/280（含 58 例未覆盖）</a:t>
+                        <a:t>264/280、94.3%（含 16 例未覆盖）</a:t>
                       </a:r>
                     </a:p>
                   </a:txBody>
@@ -4316,7 +4316,7 @@
                           <a:ea typeface="微软雅黑"/>
                           <a:cs typeface="微软雅黑"/>
                         </a:rPr>
-                        <a:t>222/230</a:t>
+                        <a:t>264/264</a:t>
                       </a:r>
                     </a:p>
                   </a:txBody>
@@ -4470,7 +4470,7 @@
                           <a:ea typeface="微软雅黑"/>
                           <a:cs typeface="微软雅黑"/>
                         </a:rPr>
-                        <a:t>50 例（报告 5.4）</a:t>
+                        <a:t>16 例 / 4 类（报告 5.4）</a:t>
                       </a:r>
                     </a:p>
                   </a:txBody>
@@ -4550,7 +4550,7 @@
                 <a:ea typeface="微软雅黑"/>
                 <a:cs typeface="微软雅黑"/>
               </a:rPr>
-              <a:t>nonce ⇒ 还原环节不可被植入劫持（碰撞率≈5.9×10⁻⁷）；Fernet+DPAPI ⇒ 拿走磁盘文件、无密钥也恢复不出明文；全部读数可一键复现。</a:t>
+              <a:t>识别读数均为修复后在原留出集上的复测（首跑 222/280）；nonce ⇒ 还原环节不可被植入劫持（碰撞率≈5.9×10⁻⁷）；Fernet+DPAPI ⇒ 拿走磁盘文件、无密钥也恢复不出明文；全部读数可一键复现。</a:t>
             </a:r>
           </a:p>
         </p:txBody>

--- a/docs/隐盾安全智能体_项目汇报.pptx
+++ b/docs/隐盾安全智能体_项目汇报.pptx
@@ -3565,7 +3565,7 @@
                 <a:ea typeface="微软雅黑"/>
                 <a:cs typeface="微软雅黑"/>
               </a:rPr>
-              <a:t>    ·    V3.6.19    ·    LangChain · pywebview/WebView2 · 本地/云端双算力    ·    2026</a:t>
+              <a:t>    ·    V3.6.20    ·    LangChain · pywebview/WebView2 · 本地/云端双算力    ·    2026</a:t>
             </a:r>
           </a:p>
         </p:txBody>

--- a/docs/隐盾安全智能体_项目汇报.pptx
+++ b/docs/隐盾安全智能体_项目汇报.pptx
@@ -4239,7 +4239,7 @@
                           <a:ea typeface="微软雅黑"/>
                           <a:cs typeface="微软雅黑"/>
                         </a:rPr>
-                        <a:t>264/280、94.3%（含 16 例未覆盖）</a:t>
+                        <a:t>281/296、94.9%（含 15 例不可合理识别形态）</a:t>
                       </a:r>
                     </a:p>
                   </a:txBody>
@@ -4316,7 +4316,7 @@
                           <a:ea typeface="微软雅黑"/>
                           <a:cs typeface="微软雅黑"/>
                         </a:rPr>
-                        <a:t>264/264</a:t>
+                        <a:t>281/281</a:t>
                       </a:r>
                     </a:p>
                   </a:txBody>
@@ -4470,7 +4470,7 @@
                           <a:ea typeface="微软雅黑"/>
                           <a:cs typeface="微软雅黑"/>
                         </a:rPr>
-                        <a:t>16 例 / 4 类（报告 5.4）</a:t>
+                        <a:t>15 例 / 5 类（报告 5.4）</a:t>
                       </a:r>
                     </a:p>
                   </a:txBody>
@@ -14135,7 +14135,7 @@
                 <a:ea typeface="微软雅黑"/>
                 <a:cs typeface="微软雅黑"/>
               </a:rPr>
-              <a:t>27 类实体；泄露 0 / 误伤 0 / 落盘扫描</a:t>
+              <a:t>30 类实体；泄露 0 / 误伤 0 / 落盘扫描</a:t>
             </a:r>
           </a:p>
         </p:txBody>
